--- a/docs/content/05-teaching-resources/slides/specialism/12-data-connections-and-deployment.pptx
+++ b/docs/content/05-teaching-resources/slides/specialism/12-data-connections-and-deployment.pptx
@@ -10,10 +10,14 @@
     <p:sldId id="258" r:id="rId9"/>
     <p:sldId id="259" r:id="rId10"/>
     <p:sldId id="260" r:id="rId11"/>
-    <p:sldId id="261" r:id="rId12"/>
+    <p:sldId id="261" r:id="rId13"/>
     <p:sldId id="262" r:id="rId14"/>
     <p:sldId id="263" r:id="rId15"/>
     <p:sldId id="264" r:id="rId16"/>
+    <p:sldId id="265" r:id="rId17"/>
+    <p:sldId id="266" r:id="rId18"/>
+    <p:sldId id="267" r:id="rId19"/>
+    <p:sldId id="268" r:id="rId20"/>
   </p:sldIdLst>
   <p:sldSz cx="12191695" cy="6858000" type="screen4x3"/>
   <p:notesSz cx="6858000" cy="9144000"/>
@@ -510,7 +514,22 @@
           <a:lstStyle/>
           <a:p>
             <a:r>
-              <a:t>Give students a few minutes to answer on mini whiteboards or paper, then reveal the answers on the next slide.</a:t>
+              <a:t>Answers:</a:t>
+            </a:r>
+          </a:p>
+          <a:p>
+            <a:r>
+              <a:t>1. A specific URL where requests are sent.</a:t>
+            </a:r>
+          </a:p>
+          <a:p>
+            <a:r>
+              <a:t>2. SQL injection.</a:t>
+            </a:r>
+          </a:p>
+          <a:p>
+            <a:r>
+              <a:t>3. JSON.</a:t>
             </a:r>
           </a:p>
         </p:txBody>
@@ -580,7 +599,22 @@
           <a:lstStyle/>
           <a:p>
             <a:r>
-              <a:t>Talk through any answers the class found difficult.</a:t>
+              <a:t>Answers:</a:t>
+            </a:r>
+          </a:p>
+          <a:p>
+            <a:r>
+              <a:t>1. The app runs identically anywhere and scales easily.</a:t>
+            </a:r>
+          </a:p>
+          <a:p>
+            <a:r>
+              <a:t>2. Through app stores.</a:t>
+            </a:r>
+          </a:p>
+          <a:p>
+            <a:r>
+              <a:t>3. Easy updates and access from any browser.</a:t>
             </a:r>
           </a:p>
         </p:txBody>
@@ -606,6 +640,146 @@
 </file>
 
 <file path=ppt/notesSlides/notesSlide3.xml><?xml version="1.0" encoding="utf-8"?>
+<p:notes xmlns:a="http://schemas.openxmlformats.org/drawingml/2006/main" xmlns:p="http://schemas.openxmlformats.org/presentationml/2006/main" xmlns:r="http://schemas.openxmlformats.org/officeDocument/2006/relationships">
+  <p:cSld>
+    <p:spTree>
+      <p:nvGrpSpPr>
+        <p:cNvPr id="1" name=""/>
+        <p:cNvGrpSpPr/>
+        <p:nvPr/>
+      </p:nvGrpSpPr>
+      <p:grpSpPr>
+        <a:xfrm>
+          <a:off x="0" y="0"/>
+          <a:ext cx="0" cy="0"/>
+          <a:chOff x="0" y="0"/>
+          <a:chExt cx="0" cy="0"/>
+        </a:xfrm>
+      </p:grpSpPr>
+      <p:sp>
+        <p:nvSpPr>
+          <p:cNvPr id="2" name="Slide Image Placeholder 1"/>
+          <p:cNvSpPr>
+            <a:spLocks noGrp="1"/>
+          </p:cNvSpPr>
+          <p:nvPr>
+            <p:ph type="sldImg" idx="2"/>
+          </p:nvPr>
+        </p:nvSpPr>
+        <p:spPr/>
+      </p:sp>
+      <p:sp>
+        <p:nvSpPr>
+          <p:cNvPr id="3" name="Notes Placeholder 2"/>
+          <p:cNvSpPr>
+            <a:spLocks noGrp="1"/>
+          </p:cNvSpPr>
+          <p:nvPr>
+            <p:ph type="body" idx="3" sz="quarter"/>
+          </p:nvPr>
+        </p:nvSpPr>
+        <p:spPr/>
+        <p:txBody>
+          <a:bodyPr/>
+          <a:lstStyle/>
+          <a:p>
+            <a:r>
+              <a:t>Give students a few minutes to answer on mini whiteboards or paper, then reveal the answers on the next slide.</a:t>
+            </a:r>
+          </a:p>
+        </p:txBody>
+      </p:sp>
+      <p:sp>
+        <p:nvSpPr>
+          <p:cNvPr id="4" name="Slide Number Placeholder 3"/>
+          <p:cNvSpPr>
+            <a:spLocks noGrp="1"/>
+          </p:cNvSpPr>
+          <p:nvPr>
+            <p:ph type="sldNum" idx="5" sz="quarter"/>
+          </p:nvPr>
+        </p:nvSpPr>
+        <p:spPr/>
+      </p:sp>
+    </p:spTree>
+  </p:cSld>
+  <p:clrMapOvr>
+    <a:masterClrMapping/>
+  </p:clrMapOvr>
+</p:notes>
+</file>
+
+<file path=ppt/notesSlides/notesSlide4.xml><?xml version="1.0" encoding="utf-8"?>
+<p:notes xmlns:a="http://schemas.openxmlformats.org/drawingml/2006/main" xmlns:p="http://schemas.openxmlformats.org/presentationml/2006/main" xmlns:r="http://schemas.openxmlformats.org/officeDocument/2006/relationships">
+  <p:cSld>
+    <p:spTree>
+      <p:nvGrpSpPr>
+        <p:cNvPr id="1" name=""/>
+        <p:cNvGrpSpPr/>
+        <p:nvPr/>
+      </p:nvGrpSpPr>
+      <p:grpSpPr>
+        <a:xfrm>
+          <a:off x="0" y="0"/>
+          <a:ext cx="0" cy="0"/>
+          <a:chOff x="0" y="0"/>
+          <a:chExt cx="0" cy="0"/>
+        </a:xfrm>
+      </p:grpSpPr>
+      <p:sp>
+        <p:nvSpPr>
+          <p:cNvPr id="2" name="Slide Image Placeholder 1"/>
+          <p:cNvSpPr>
+            <a:spLocks noGrp="1"/>
+          </p:cNvSpPr>
+          <p:nvPr>
+            <p:ph type="sldImg" idx="2"/>
+          </p:nvPr>
+        </p:nvSpPr>
+        <p:spPr/>
+      </p:sp>
+      <p:sp>
+        <p:nvSpPr>
+          <p:cNvPr id="3" name="Notes Placeholder 2"/>
+          <p:cNvSpPr>
+            <a:spLocks noGrp="1"/>
+          </p:cNvSpPr>
+          <p:nvPr>
+            <p:ph type="body" idx="3" sz="quarter"/>
+          </p:nvPr>
+        </p:nvSpPr>
+        <p:spPr/>
+        <p:txBody>
+          <a:bodyPr/>
+          <a:lstStyle/>
+          <a:p>
+            <a:r>
+              <a:t>Talk through any answers the class found difficult.</a:t>
+            </a:r>
+          </a:p>
+        </p:txBody>
+      </p:sp>
+      <p:sp>
+        <p:nvSpPr>
+          <p:cNvPr id="4" name="Slide Number Placeholder 3"/>
+          <p:cNvSpPr>
+            <a:spLocks noGrp="1"/>
+          </p:cNvSpPr>
+          <p:nvPr>
+            <p:ph type="sldNum" idx="5" sz="quarter"/>
+          </p:nvPr>
+        </p:nvSpPr>
+        <p:spPr/>
+      </p:sp>
+    </p:spTree>
+  </p:cSld>
+  <p:clrMapOvr>
+    <a:masterClrMapping/>
+  </p:clrMapOvr>
+</p:notes>
+</file>
+
+<file path=ppt/notesSlides/notesSlide5.xml><?xml version="1.0" encoding="utf-8"?>
 <p:notes xmlns:a="http://schemas.openxmlformats.org/drawingml/2006/main" xmlns:p="http://schemas.openxmlformats.org/presentationml/2006/main" xmlns:r="http://schemas.openxmlformats.org/officeDocument/2006/relationships">
   <p:cSld>
     <p:spTree>
@@ -3975,6 +4149,2355 @@
 </p:sld>
 </file>
 
+<file path=ppt/slides/slide10.xml><?xml version="1.0" encoding="utf-8"?>
+<p:sld xmlns:a="http://schemas.openxmlformats.org/drawingml/2006/main" xmlns:p="http://schemas.openxmlformats.org/presentationml/2006/main" xmlns:r="http://schemas.openxmlformats.org/officeDocument/2006/relationships">
+  <p:cSld>
+    <p:bg>
+      <p:bgPr>
+        <a:solidFill>
+          <a:srgbClr val="FFFFFF"/>
+        </a:solidFill>
+        <a:effectLst/>
+      </p:bgPr>
+    </p:bg>
+    <p:spTree>
+      <p:nvGrpSpPr>
+        <p:cNvPr id="1" name=""/>
+        <p:cNvGrpSpPr/>
+        <p:nvPr/>
+      </p:nvGrpSpPr>
+      <p:grpSpPr/>
+      <p:sp>
+        <p:nvSpPr>
+          <p:cNvPr id="2" name="TextBox 1"/>
+          <p:cNvSpPr txBox="1"/>
+          <p:nvPr/>
+        </p:nvSpPr>
+        <p:spPr>
+          <a:xfrm>
+            <a:off x="548640" y="320040"/>
+            <a:ext cx="11094415" cy="274320"/>
+          </a:xfrm>
+          <a:prstGeom prst="rect">
+            <a:avLst/>
+          </a:prstGeom>
+          <a:noFill/>
+        </p:spPr>
+        <p:txBody>
+          <a:bodyPr wrap="square" anchor="t" lIns="0" rIns="0" tIns="0" bIns="0"/>
+          <a:lstStyle/>
+          <a:p>
+            <a:pPr algn="l"/>
+            <a:r>
+              <a:rPr sz="1100" b="1" i="0">
+                <a:solidFill>
+                  <a:srgbClr val="54595D"/>
+                </a:solidFill>
+                <a:latin typeface="Calibri"/>
+              </a:rPr>
+              <a:t>OCCUPATIONAL SPECIALISM  ·  Specialism Content Area 6</a:t>
+            </a:r>
+          </a:p>
+        </p:txBody>
+      </p:sp>
+      <p:sp>
+        <p:nvSpPr>
+          <p:cNvPr id="3" name="TextBox 2"/>
+          <p:cNvSpPr txBox="1"/>
+          <p:nvPr/>
+        </p:nvSpPr>
+        <p:spPr>
+          <a:xfrm>
+            <a:off x="548640" y="566928"/>
+            <a:ext cx="11094415" cy="822960"/>
+          </a:xfrm>
+          <a:prstGeom prst="rect">
+            <a:avLst/>
+          </a:prstGeom>
+          <a:noFill/>
+        </p:spPr>
+        <p:txBody>
+          <a:bodyPr wrap="square" anchor="ctr" lIns="0" rIns="0" tIns="0" bIns="0"/>
+          <a:lstStyle/>
+          <a:p>
+            <a:pPr algn="l"/>
+            <a:r>
+              <a:rPr sz="3200" b="1" i="0">
+                <a:solidFill>
+                  <a:srgbClr val="03306E"/>
+                </a:solidFill>
+                <a:latin typeface="Cambria"/>
+              </a:rPr>
+              <a:t>Check your understanding</a:t>
+            </a:r>
+          </a:p>
+        </p:txBody>
+      </p:sp>
+      <p:sp>
+        <p:nvSpPr>
+          <p:cNvPr id="4" name="TextBox 3"/>
+          <p:cNvSpPr txBox="1"/>
+          <p:nvPr/>
+        </p:nvSpPr>
+        <p:spPr>
+          <a:xfrm>
+            <a:off x="548640" y="6446520"/>
+            <a:ext cx="8229600" cy="274320"/>
+          </a:xfrm>
+          <a:prstGeom prst="rect">
+            <a:avLst/>
+          </a:prstGeom>
+          <a:noFill/>
+        </p:spPr>
+        <p:txBody>
+          <a:bodyPr wrap="square" anchor="t" lIns="0" rIns="0" tIns="0" bIns="0"/>
+          <a:lstStyle/>
+          <a:p>
+            <a:pPr algn="l"/>
+            <a:r>
+              <a:rPr sz="1000" b="0" i="0">
+                <a:solidFill>
+                  <a:srgbClr val="54595D"/>
+                </a:solidFill>
+                <a:latin typeface="Calibri"/>
+              </a:rPr>
+              <a:t>Digital Software Development T Level  ·  Connecting to Data and Deploying Software</a:t>
+            </a:r>
+          </a:p>
+        </p:txBody>
+      </p:sp>
+      <p:sp>
+        <p:nvSpPr>
+          <p:cNvPr id="5" name="TextBox 4"/>
+          <p:cNvSpPr txBox="1"/>
+          <p:nvPr/>
+        </p:nvSpPr>
+        <p:spPr>
+          <a:xfrm>
+            <a:off x="10728655" y="6446520"/>
+            <a:ext cx="914400" cy="274320"/>
+          </a:xfrm>
+          <a:prstGeom prst="rect">
+            <a:avLst/>
+          </a:prstGeom>
+          <a:noFill/>
+        </p:spPr>
+        <p:txBody>
+          <a:bodyPr wrap="square" anchor="t" lIns="0" rIns="0" tIns="0" bIns="0"/>
+          <a:lstStyle/>
+          <a:p>
+            <a:pPr algn="r"/>
+            <a:r>
+              <a:rPr sz="1000" b="0" i="0">
+                <a:solidFill>
+                  <a:srgbClr val="54595D"/>
+                </a:solidFill>
+                <a:latin typeface="Calibri"/>
+              </a:rPr>
+              <a:t>10</a:t>
+            </a:r>
+          </a:p>
+        </p:txBody>
+      </p:sp>
+      <p:sp>
+        <p:nvSpPr>
+          <p:cNvPr id="6" name="Oval 5"/>
+          <p:cNvSpPr/>
+          <p:nvPr/>
+        </p:nvSpPr>
+        <p:spPr>
+          <a:xfrm>
+            <a:off x="548640" y="1618488"/>
+            <a:ext cx="411480" cy="411480"/>
+          </a:xfrm>
+          <a:prstGeom prst="ellipse">
+            <a:avLst/>
+          </a:prstGeom>
+          <a:solidFill>
+            <a:srgbClr val="33C17A"/>
+          </a:solidFill>
+          <a:ln>
+            <a:noFill/>
+          </a:ln>
+          <a:effectLst/>
+        </p:spPr>
+        <p:style>
+          <a:lnRef idx="1">
+            <a:schemeClr val="accent1"/>
+          </a:lnRef>
+          <a:fillRef idx="3">
+            <a:schemeClr val="accent1"/>
+          </a:fillRef>
+          <a:effectRef idx="2">
+            <a:schemeClr val="accent1"/>
+          </a:effectRef>
+          <a:fontRef idx="minor">
+            <a:schemeClr val="lt1"/>
+          </a:fontRef>
+        </p:style>
+        <p:txBody>
+          <a:bodyPr rtlCol="0" anchor="ctr" lIns="0" rIns="0" tIns="0" bIns="0"/>
+          <a:lstStyle/>
+          <a:p>
+            <a:pPr algn="ctr"/>
+            <a:r>
+              <a:rPr sz="1400" b="1">
+                <a:solidFill>
+                  <a:srgbClr val="202122"/>
+                </a:solidFill>
+                <a:latin typeface="Calibri"/>
+              </a:rPr>
+              <a:t>1</a:t>
+            </a:r>
+          </a:p>
+        </p:txBody>
+      </p:sp>
+      <p:sp>
+        <p:nvSpPr>
+          <p:cNvPr id="7" name="TextBox 6"/>
+          <p:cNvSpPr txBox="1"/>
+          <p:nvPr/>
+        </p:nvSpPr>
+        <p:spPr>
+          <a:xfrm>
+            <a:off x="1234440" y="1600200"/>
+            <a:ext cx="10408615" cy="1030986"/>
+          </a:xfrm>
+          <a:prstGeom prst="rect">
+            <a:avLst/>
+          </a:prstGeom>
+          <a:noFill/>
+        </p:spPr>
+        <p:txBody>
+          <a:bodyPr wrap="square" anchor="t" lIns="0" rIns="0" tIns="0" bIns="0"/>
+          <a:lstStyle/>
+          <a:p>
+            <a:pPr algn="l"/>
+            <a:r>
+              <a:rPr sz="2200" b="0" i="0">
+                <a:solidFill>
+                  <a:srgbClr val="202122"/>
+                </a:solidFill>
+                <a:latin typeface="Calibri"/>
+              </a:rPr>
+              <a:t>What is an API endpoint?</a:t>
+            </a:r>
+          </a:p>
+        </p:txBody>
+      </p:sp>
+      <p:sp>
+        <p:nvSpPr>
+          <p:cNvPr id="8" name="Oval 7"/>
+          <p:cNvSpPr/>
+          <p:nvPr/>
+        </p:nvSpPr>
+        <p:spPr>
+          <a:xfrm>
+            <a:off x="548640" y="2814066"/>
+            <a:ext cx="411480" cy="411480"/>
+          </a:xfrm>
+          <a:prstGeom prst="ellipse">
+            <a:avLst/>
+          </a:prstGeom>
+          <a:solidFill>
+            <a:srgbClr val="33C17A"/>
+          </a:solidFill>
+          <a:ln>
+            <a:noFill/>
+          </a:ln>
+          <a:effectLst/>
+        </p:spPr>
+        <p:style>
+          <a:lnRef idx="1">
+            <a:schemeClr val="accent1"/>
+          </a:lnRef>
+          <a:fillRef idx="3">
+            <a:schemeClr val="accent1"/>
+          </a:fillRef>
+          <a:effectRef idx="2">
+            <a:schemeClr val="accent1"/>
+          </a:effectRef>
+          <a:fontRef idx="minor">
+            <a:schemeClr val="lt1"/>
+          </a:fontRef>
+        </p:style>
+        <p:txBody>
+          <a:bodyPr rtlCol="0" anchor="ctr" lIns="0" rIns="0" tIns="0" bIns="0"/>
+          <a:lstStyle/>
+          <a:p>
+            <a:pPr algn="ctr"/>
+            <a:r>
+              <a:rPr sz="1400" b="1">
+                <a:solidFill>
+                  <a:srgbClr val="202122"/>
+                </a:solidFill>
+                <a:latin typeface="Calibri"/>
+              </a:rPr>
+              <a:t>2</a:t>
+            </a:r>
+          </a:p>
+        </p:txBody>
+      </p:sp>
+      <p:sp>
+        <p:nvSpPr>
+          <p:cNvPr id="9" name="TextBox 8"/>
+          <p:cNvSpPr txBox="1"/>
+          <p:nvPr/>
+        </p:nvSpPr>
+        <p:spPr>
+          <a:xfrm>
+            <a:off x="1234440" y="2795778"/>
+            <a:ext cx="10408615" cy="1030986"/>
+          </a:xfrm>
+          <a:prstGeom prst="rect">
+            <a:avLst/>
+          </a:prstGeom>
+          <a:noFill/>
+        </p:spPr>
+        <p:txBody>
+          <a:bodyPr wrap="square" anchor="t" lIns="0" rIns="0" tIns="0" bIns="0"/>
+          <a:lstStyle/>
+          <a:p>
+            <a:pPr algn="l"/>
+            <a:r>
+              <a:rPr sz="2200" b="0" i="0">
+                <a:solidFill>
+                  <a:srgbClr val="202122"/>
+                </a:solidFill>
+                <a:latin typeface="Calibri"/>
+              </a:rPr>
+              <a:t>What does a prepared statement protect against?</a:t>
+            </a:r>
+          </a:p>
+        </p:txBody>
+      </p:sp>
+      <p:sp>
+        <p:nvSpPr>
+          <p:cNvPr id="10" name="Oval 9"/>
+          <p:cNvSpPr/>
+          <p:nvPr/>
+        </p:nvSpPr>
+        <p:spPr>
+          <a:xfrm>
+            <a:off x="548640" y="4009644"/>
+            <a:ext cx="411480" cy="411480"/>
+          </a:xfrm>
+          <a:prstGeom prst="ellipse">
+            <a:avLst/>
+          </a:prstGeom>
+          <a:solidFill>
+            <a:srgbClr val="33C17A"/>
+          </a:solidFill>
+          <a:ln>
+            <a:noFill/>
+          </a:ln>
+          <a:effectLst/>
+        </p:spPr>
+        <p:style>
+          <a:lnRef idx="1">
+            <a:schemeClr val="accent1"/>
+          </a:lnRef>
+          <a:fillRef idx="3">
+            <a:schemeClr val="accent1"/>
+          </a:fillRef>
+          <a:effectRef idx="2">
+            <a:schemeClr val="accent1"/>
+          </a:effectRef>
+          <a:fontRef idx="minor">
+            <a:schemeClr val="lt1"/>
+          </a:fontRef>
+        </p:style>
+        <p:txBody>
+          <a:bodyPr rtlCol="0" anchor="ctr" lIns="0" rIns="0" tIns="0" bIns="0"/>
+          <a:lstStyle/>
+          <a:p>
+            <a:pPr algn="ctr"/>
+            <a:r>
+              <a:rPr sz="1400" b="1">
+                <a:solidFill>
+                  <a:srgbClr val="202122"/>
+                </a:solidFill>
+                <a:latin typeface="Calibri"/>
+              </a:rPr>
+              <a:t>3</a:t>
+            </a:r>
+          </a:p>
+        </p:txBody>
+      </p:sp>
+      <p:sp>
+        <p:nvSpPr>
+          <p:cNvPr id="11" name="TextBox 10"/>
+          <p:cNvSpPr txBox="1"/>
+          <p:nvPr/>
+        </p:nvSpPr>
+        <p:spPr>
+          <a:xfrm>
+            <a:off x="1234440" y="3991356"/>
+            <a:ext cx="10408615" cy="1030986"/>
+          </a:xfrm>
+          <a:prstGeom prst="rect">
+            <a:avLst/>
+          </a:prstGeom>
+          <a:noFill/>
+        </p:spPr>
+        <p:txBody>
+          <a:bodyPr wrap="square" anchor="t" lIns="0" rIns="0" tIns="0" bIns="0"/>
+          <a:lstStyle/>
+          <a:p>
+            <a:pPr algn="l"/>
+            <a:r>
+              <a:rPr sz="2200" b="0" i="0">
+                <a:solidFill>
+                  <a:srgbClr val="202122"/>
+                </a:solidFill>
+                <a:latin typeface="Calibri"/>
+              </a:rPr>
+              <a:t>What does ODBC stand for?</a:t>
+            </a:r>
+          </a:p>
+        </p:txBody>
+      </p:sp>
+      <p:sp>
+        <p:nvSpPr>
+          <p:cNvPr id="12" name="Oval 11"/>
+          <p:cNvSpPr/>
+          <p:nvPr/>
+        </p:nvSpPr>
+        <p:spPr>
+          <a:xfrm>
+            <a:off x="548640" y="5205221"/>
+            <a:ext cx="411480" cy="411480"/>
+          </a:xfrm>
+          <a:prstGeom prst="ellipse">
+            <a:avLst/>
+          </a:prstGeom>
+          <a:solidFill>
+            <a:srgbClr val="33C17A"/>
+          </a:solidFill>
+          <a:ln>
+            <a:noFill/>
+          </a:ln>
+          <a:effectLst/>
+        </p:spPr>
+        <p:style>
+          <a:lnRef idx="1">
+            <a:schemeClr val="accent1"/>
+          </a:lnRef>
+          <a:fillRef idx="3">
+            <a:schemeClr val="accent1"/>
+          </a:fillRef>
+          <a:effectRef idx="2">
+            <a:schemeClr val="accent1"/>
+          </a:effectRef>
+          <a:fontRef idx="minor">
+            <a:schemeClr val="lt1"/>
+          </a:fontRef>
+        </p:style>
+        <p:txBody>
+          <a:bodyPr rtlCol="0" anchor="ctr" lIns="0" rIns="0" tIns="0" bIns="0"/>
+          <a:lstStyle/>
+          <a:p>
+            <a:pPr algn="ctr"/>
+            <a:r>
+              <a:rPr sz="1400" b="1">
+                <a:solidFill>
+                  <a:srgbClr val="202122"/>
+                </a:solidFill>
+                <a:latin typeface="Calibri"/>
+              </a:rPr>
+              <a:t>4</a:t>
+            </a:r>
+          </a:p>
+        </p:txBody>
+      </p:sp>
+      <p:sp>
+        <p:nvSpPr>
+          <p:cNvPr id="13" name="TextBox 12"/>
+          <p:cNvSpPr txBox="1"/>
+          <p:nvPr/>
+        </p:nvSpPr>
+        <p:spPr>
+          <a:xfrm>
+            <a:off x="1234440" y="5186933"/>
+            <a:ext cx="10408615" cy="1030986"/>
+          </a:xfrm>
+          <a:prstGeom prst="rect">
+            <a:avLst/>
+          </a:prstGeom>
+          <a:noFill/>
+        </p:spPr>
+        <p:txBody>
+          <a:bodyPr wrap="square" anchor="t" lIns="0" rIns="0" tIns="0" bIns="0"/>
+          <a:lstStyle/>
+          <a:p>
+            <a:pPr algn="l"/>
+            <a:r>
+              <a:rPr sz="2200" b="0" i="0">
+                <a:solidFill>
+                  <a:srgbClr val="202122"/>
+                </a:solidFill>
+                <a:latin typeface="Calibri"/>
+              </a:rPr>
+              <a:t>Why use containers for deployment?</a:t>
+            </a:r>
+          </a:p>
+        </p:txBody>
+      </p:sp>
+    </p:spTree>
+  </p:cSld>
+  <p:clrMapOvr>
+    <a:masterClrMapping/>
+  </p:clrMapOvr>
+</p:sld>
+</file>
+
+<file path=ppt/slides/slide11.xml><?xml version="1.0" encoding="utf-8"?>
+<p:sld xmlns:a="http://schemas.openxmlformats.org/drawingml/2006/main" xmlns:p="http://schemas.openxmlformats.org/presentationml/2006/main" xmlns:r="http://schemas.openxmlformats.org/officeDocument/2006/relationships">
+  <p:cSld>
+    <p:bg>
+      <p:bgPr>
+        <a:solidFill>
+          <a:srgbClr val="FFFFFF"/>
+        </a:solidFill>
+        <a:effectLst/>
+      </p:bgPr>
+    </p:bg>
+    <p:spTree>
+      <p:nvGrpSpPr>
+        <p:cNvPr id="1" name=""/>
+        <p:cNvGrpSpPr/>
+        <p:nvPr/>
+      </p:nvGrpSpPr>
+      <p:grpSpPr/>
+      <p:sp>
+        <p:nvSpPr>
+          <p:cNvPr id="2" name="TextBox 1"/>
+          <p:cNvSpPr txBox="1"/>
+          <p:nvPr/>
+        </p:nvSpPr>
+        <p:spPr>
+          <a:xfrm>
+            <a:off x="548640" y="320040"/>
+            <a:ext cx="11094415" cy="274320"/>
+          </a:xfrm>
+          <a:prstGeom prst="rect">
+            <a:avLst/>
+          </a:prstGeom>
+          <a:noFill/>
+        </p:spPr>
+        <p:txBody>
+          <a:bodyPr wrap="square" anchor="t" lIns="0" rIns="0" tIns="0" bIns="0"/>
+          <a:lstStyle/>
+          <a:p>
+            <a:pPr algn="l"/>
+            <a:r>
+              <a:rPr sz="1100" b="1" i="0">
+                <a:solidFill>
+                  <a:srgbClr val="54595D"/>
+                </a:solidFill>
+                <a:latin typeface="Calibri"/>
+              </a:rPr>
+              <a:t>OCCUPATIONAL SPECIALISM  ·  Specialism Content Area 6</a:t>
+            </a:r>
+          </a:p>
+        </p:txBody>
+      </p:sp>
+      <p:sp>
+        <p:nvSpPr>
+          <p:cNvPr id="3" name="TextBox 2"/>
+          <p:cNvSpPr txBox="1"/>
+          <p:nvPr/>
+        </p:nvSpPr>
+        <p:spPr>
+          <a:xfrm>
+            <a:off x="548640" y="566928"/>
+            <a:ext cx="11094415" cy="822960"/>
+          </a:xfrm>
+          <a:prstGeom prst="rect">
+            <a:avLst/>
+          </a:prstGeom>
+          <a:noFill/>
+        </p:spPr>
+        <p:txBody>
+          <a:bodyPr wrap="square" anchor="ctr" lIns="0" rIns="0" tIns="0" bIns="0"/>
+          <a:lstStyle/>
+          <a:p>
+            <a:pPr algn="l"/>
+            <a:r>
+              <a:rPr sz="3200" b="1" i="0">
+                <a:solidFill>
+                  <a:srgbClr val="03306E"/>
+                </a:solidFill>
+                <a:latin typeface="Cambria"/>
+              </a:rPr>
+              <a:t>Answers</a:t>
+            </a:r>
+          </a:p>
+        </p:txBody>
+      </p:sp>
+      <p:sp>
+        <p:nvSpPr>
+          <p:cNvPr id="4" name="TextBox 3"/>
+          <p:cNvSpPr txBox="1"/>
+          <p:nvPr/>
+        </p:nvSpPr>
+        <p:spPr>
+          <a:xfrm>
+            <a:off x="548640" y="6446520"/>
+            <a:ext cx="8229600" cy="274320"/>
+          </a:xfrm>
+          <a:prstGeom prst="rect">
+            <a:avLst/>
+          </a:prstGeom>
+          <a:noFill/>
+        </p:spPr>
+        <p:txBody>
+          <a:bodyPr wrap="square" anchor="t" lIns="0" rIns="0" tIns="0" bIns="0"/>
+          <a:lstStyle/>
+          <a:p>
+            <a:pPr algn="l"/>
+            <a:r>
+              <a:rPr sz="1000" b="0" i="0">
+                <a:solidFill>
+                  <a:srgbClr val="54595D"/>
+                </a:solidFill>
+                <a:latin typeface="Calibri"/>
+              </a:rPr>
+              <a:t>Digital Software Development T Level  ·  Connecting to Data and Deploying Software</a:t>
+            </a:r>
+          </a:p>
+        </p:txBody>
+      </p:sp>
+      <p:sp>
+        <p:nvSpPr>
+          <p:cNvPr id="5" name="TextBox 4"/>
+          <p:cNvSpPr txBox="1"/>
+          <p:nvPr/>
+        </p:nvSpPr>
+        <p:spPr>
+          <a:xfrm>
+            <a:off x="10728655" y="6446520"/>
+            <a:ext cx="914400" cy="274320"/>
+          </a:xfrm>
+          <a:prstGeom prst="rect">
+            <a:avLst/>
+          </a:prstGeom>
+          <a:noFill/>
+        </p:spPr>
+        <p:txBody>
+          <a:bodyPr wrap="square" anchor="t" lIns="0" rIns="0" tIns="0" bIns="0"/>
+          <a:lstStyle/>
+          <a:p>
+            <a:pPr algn="r"/>
+            <a:r>
+              <a:rPr sz="1000" b="0" i="0">
+                <a:solidFill>
+                  <a:srgbClr val="54595D"/>
+                </a:solidFill>
+                <a:latin typeface="Calibri"/>
+              </a:rPr>
+              <a:t>11</a:t>
+            </a:r>
+          </a:p>
+        </p:txBody>
+      </p:sp>
+      <p:sp>
+        <p:nvSpPr>
+          <p:cNvPr id="6" name="Oval 5"/>
+          <p:cNvSpPr/>
+          <p:nvPr/>
+        </p:nvSpPr>
+        <p:spPr>
+          <a:xfrm>
+            <a:off x="548640" y="1618488"/>
+            <a:ext cx="411480" cy="411480"/>
+          </a:xfrm>
+          <a:prstGeom prst="ellipse">
+            <a:avLst/>
+          </a:prstGeom>
+          <a:solidFill>
+            <a:srgbClr val="33C17A"/>
+          </a:solidFill>
+          <a:ln>
+            <a:noFill/>
+          </a:ln>
+          <a:effectLst/>
+        </p:spPr>
+        <p:style>
+          <a:lnRef idx="1">
+            <a:schemeClr val="accent1"/>
+          </a:lnRef>
+          <a:fillRef idx="3">
+            <a:schemeClr val="accent1"/>
+          </a:fillRef>
+          <a:effectRef idx="2">
+            <a:schemeClr val="accent1"/>
+          </a:effectRef>
+          <a:fontRef idx="minor">
+            <a:schemeClr val="lt1"/>
+          </a:fontRef>
+        </p:style>
+        <p:txBody>
+          <a:bodyPr rtlCol="0" anchor="ctr" lIns="0" rIns="0" tIns="0" bIns="0"/>
+          <a:lstStyle/>
+          <a:p>
+            <a:pPr algn="ctr"/>
+            <a:r>
+              <a:rPr sz="1400" b="1">
+                <a:solidFill>
+                  <a:srgbClr val="202122"/>
+                </a:solidFill>
+                <a:latin typeface="Calibri"/>
+              </a:rPr>
+              <a:t>1</a:t>
+            </a:r>
+          </a:p>
+        </p:txBody>
+      </p:sp>
+      <p:sp>
+        <p:nvSpPr>
+          <p:cNvPr id="7" name="TextBox 6"/>
+          <p:cNvSpPr txBox="1"/>
+          <p:nvPr/>
+        </p:nvSpPr>
+        <p:spPr>
+          <a:xfrm>
+            <a:off x="1234440" y="1600200"/>
+            <a:ext cx="10408615" cy="1030986"/>
+          </a:xfrm>
+          <a:prstGeom prst="rect">
+            <a:avLst/>
+          </a:prstGeom>
+          <a:noFill/>
+        </p:spPr>
+        <p:txBody>
+          <a:bodyPr wrap="square" anchor="t" lIns="0" rIns="0" tIns="0" bIns="0"/>
+          <a:lstStyle/>
+          <a:p>
+            <a:pPr algn="l"/>
+            <a:r>
+              <a:rPr sz="1800" b="0" i="0">
+                <a:solidFill>
+                  <a:srgbClr val="54595D"/>
+                </a:solidFill>
+                <a:latin typeface="Calibri"/>
+              </a:rPr>
+              <a:t>What is an API endpoint?</a:t>
+            </a:r>
+          </a:p>
+          <a:p>
+            <a:r>
+              <a:rPr sz="1800" b="1">
+                <a:solidFill>
+                  <a:srgbClr val="03306E"/>
+                </a:solidFill>
+                <a:latin typeface="Calibri"/>
+              </a:rPr>
+              <a:t>A specific URL where an API receives requests.</a:t>
+            </a:r>
+          </a:p>
+        </p:txBody>
+      </p:sp>
+      <p:sp>
+        <p:nvSpPr>
+          <p:cNvPr id="8" name="Oval 7"/>
+          <p:cNvSpPr/>
+          <p:nvPr/>
+        </p:nvSpPr>
+        <p:spPr>
+          <a:xfrm>
+            <a:off x="548640" y="2814066"/>
+            <a:ext cx="411480" cy="411480"/>
+          </a:xfrm>
+          <a:prstGeom prst="ellipse">
+            <a:avLst/>
+          </a:prstGeom>
+          <a:solidFill>
+            <a:srgbClr val="33C17A"/>
+          </a:solidFill>
+          <a:ln>
+            <a:noFill/>
+          </a:ln>
+          <a:effectLst/>
+        </p:spPr>
+        <p:style>
+          <a:lnRef idx="1">
+            <a:schemeClr val="accent1"/>
+          </a:lnRef>
+          <a:fillRef idx="3">
+            <a:schemeClr val="accent1"/>
+          </a:fillRef>
+          <a:effectRef idx="2">
+            <a:schemeClr val="accent1"/>
+          </a:effectRef>
+          <a:fontRef idx="minor">
+            <a:schemeClr val="lt1"/>
+          </a:fontRef>
+        </p:style>
+        <p:txBody>
+          <a:bodyPr rtlCol="0" anchor="ctr" lIns="0" rIns="0" tIns="0" bIns="0"/>
+          <a:lstStyle/>
+          <a:p>
+            <a:pPr algn="ctr"/>
+            <a:r>
+              <a:rPr sz="1400" b="1">
+                <a:solidFill>
+                  <a:srgbClr val="202122"/>
+                </a:solidFill>
+                <a:latin typeface="Calibri"/>
+              </a:rPr>
+              <a:t>2</a:t>
+            </a:r>
+          </a:p>
+        </p:txBody>
+      </p:sp>
+      <p:sp>
+        <p:nvSpPr>
+          <p:cNvPr id="9" name="TextBox 8"/>
+          <p:cNvSpPr txBox="1"/>
+          <p:nvPr/>
+        </p:nvSpPr>
+        <p:spPr>
+          <a:xfrm>
+            <a:off x="1234440" y="2795778"/>
+            <a:ext cx="10408615" cy="1030986"/>
+          </a:xfrm>
+          <a:prstGeom prst="rect">
+            <a:avLst/>
+          </a:prstGeom>
+          <a:noFill/>
+        </p:spPr>
+        <p:txBody>
+          <a:bodyPr wrap="square" anchor="t" lIns="0" rIns="0" tIns="0" bIns="0"/>
+          <a:lstStyle/>
+          <a:p>
+            <a:pPr algn="l"/>
+            <a:r>
+              <a:rPr sz="1800" b="0" i="0">
+                <a:solidFill>
+                  <a:srgbClr val="54595D"/>
+                </a:solidFill>
+                <a:latin typeface="Calibri"/>
+              </a:rPr>
+              <a:t>What does a prepared statement protect against?</a:t>
+            </a:r>
+          </a:p>
+          <a:p>
+            <a:r>
+              <a:rPr sz="1800" b="1">
+                <a:solidFill>
+                  <a:srgbClr val="03306E"/>
+                </a:solidFill>
+                <a:latin typeface="Calibri"/>
+              </a:rPr>
+              <a:t>SQL injection.</a:t>
+            </a:r>
+          </a:p>
+        </p:txBody>
+      </p:sp>
+      <p:sp>
+        <p:nvSpPr>
+          <p:cNvPr id="10" name="Oval 9"/>
+          <p:cNvSpPr/>
+          <p:nvPr/>
+        </p:nvSpPr>
+        <p:spPr>
+          <a:xfrm>
+            <a:off x="548640" y="4009644"/>
+            <a:ext cx="411480" cy="411480"/>
+          </a:xfrm>
+          <a:prstGeom prst="ellipse">
+            <a:avLst/>
+          </a:prstGeom>
+          <a:solidFill>
+            <a:srgbClr val="33C17A"/>
+          </a:solidFill>
+          <a:ln>
+            <a:noFill/>
+          </a:ln>
+          <a:effectLst/>
+        </p:spPr>
+        <p:style>
+          <a:lnRef idx="1">
+            <a:schemeClr val="accent1"/>
+          </a:lnRef>
+          <a:fillRef idx="3">
+            <a:schemeClr val="accent1"/>
+          </a:fillRef>
+          <a:effectRef idx="2">
+            <a:schemeClr val="accent1"/>
+          </a:effectRef>
+          <a:fontRef idx="minor">
+            <a:schemeClr val="lt1"/>
+          </a:fontRef>
+        </p:style>
+        <p:txBody>
+          <a:bodyPr rtlCol="0" anchor="ctr" lIns="0" rIns="0" tIns="0" bIns="0"/>
+          <a:lstStyle/>
+          <a:p>
+            <a:pPr algn="ctr"/>
+            <a:r>
+              <a:rPr sz="1400" b="1">
+                <a:solidFill>
+                  <a:srgbClr val="202122"/>
+                </a:solidFill>
+                <a:latin typeface="Calibri"/>
+              </a:rPr>
+              <a:t>3</a:t>
+            </a:r>
+          </a:p>
+        </p:txBody>
+      </p:sp>
+      <p:sp>
+        <p:nvSpPr>
+          <p:cNvPr id="11" name="TextBox 10"/>
+          <p:cNvSpPr txBox="1"/>
+          <p:nvPr/>
+        </p:nvSpPr>
+        <p:spPr>
+          <a:xfrm>
+            <a:off x="1234440" y="3991356"/>
+            <a:ext cx="10408615" cy="1030986"/>
+          </a:xfrm>
+          <a:prstGeom prst="rect">
+            <a:avLst/>
+          </a:prstGeom>
+          <a:noFill/>
+        </p:spPr>
+        <p:txBody>
+          <a:bodyPr wrap="square" anchor="t" lIns="0" rIns="0" tIns="0" bIns="0"/>
+          <a:lstStyle/>
+          <a:p>
+            <a:pPr algn="l"/>
+            <a:r>
+              <a:rPr sz="1800" b="0" i="0">
+                <a:solidFill>
+                  <a:srgbClr val="54595D"/>
+                </a:solidFill>
+                <a:latin typeface="Calibri"/>
+              </a:rPr>
+              <a:t>What does ODBC stand for?</a:t>
+            </a:r>
+          </a:p>
+          <a:p>
+            <a:r>
+              <a:rPr sz="1800" b="1">
+                <a:solidFill>
+                  <a:srgbClr val="03306E"/>
+                </a:solidFill>
+                <a:latin typeface="Calibri"/>
+              </a:rPr>
+              <a:t>Open Database Connectivity.</a:t>
+            </a:r>
+          </a:p>
+        </p:txBody>
+      </p:sp>
+      <p:sp>
+        <p:nvSpPr>
+          <p:cNvPr id="12" name="Oval 11"/>
+          <p:cNvSpPr/>
+          <p:nvPr/>
+        </p:nvSpPr>
+        <p:spPr>
+          <a:xfrm>
+            <a:off x="548640" y="5205221"/>
+            <a:ext cx="411480" cy="411480"/>
+          </a:xfrm>
+          <a:prstGeom prst="ellipse">
+            <a:avLst/>
+          </a:prstGeom>
+          <a:solidFill>
+            <a:srgbClr val="33C17A"/>
+          </a:solidFill>
+          <a:ln>
+            <a:noFill/>
+          </a:ln>
+          <a:effectLst/>
+        </p:spPr>
+        <p:style>
+          <a:lnRef idx="1">
+            <a:schemeClr val="accent1"/>
+          </a:lnRef>
+          <a:fillRef idx="3">
+            <a:schemeClr val="accent1"/>
+          </a:fillRef>
+          <a:effectRef idx="2">
+            <a:schemeClr val="accent1"/>
+          </a:effectRef>
+          <a:fontRef idx="minor">
+            <a:schemeClr val="lt1"/>
+          </a:fontRef>
+        </p:style>
+        <p:txBody>
+          <a:bodyPr rtlCol="0" anchor="ctr" lIns="0" rIns="0" tIns="0" bIns="0"/>
+          <a:lstStyle/>
+          <a:p>
+            <a:pPr algn="ctr"/>
+            <a:r>
+              <a:rPr sz="1400" b="1">
+                <a:solidFill>
+                  <a:srgbClr val="202122"/>
+                </a:solidFill>
+                <a:latin typeface="Calibri"/>
+              </a:rPr>
+              <a:t>4</a:t>
+            </a:r>
+          </a:p>
+        </p:txBody>
+      </p:sp>
+      <p:sp>
+        <p:nvSpPr>
+          <p:cNvPr id="13" name="TextBox 12"/>
+          <p:cNvSpPr txBox="1"/>
+          <p:nvPr/>
+        </p:nvSpPr>
+        <p:spPr>
+          <a:xfrm>
+            <a:off x="1234440" y="5186933"/>
+            <a:ext cx="10408615" cy="1030986"/>
+          </a:xfrm>
+          <a:prstGeom prst="rect">
+            <a:avLst/>
+          </a:prstGeom>
+          <a:noFill/>
+        </p:spPr>
+        <p:txBody>
+          <a:bodyPr wrap="square" anchor="t" lIns="0" rIns="0" tIns="0" bIns="0"/>
+          <a:lstStyle/>
+          <a:p>
+            <a:pPr algn="l"/>
+            <a:r>
+              <a:rPr sz="1800" b="0" i="0">
+                <a:solidFill>
+                  <a:srgbClr val="54595D"/>
+                </a:solidFill>
+                <a:latin typeface="Calibri"/>
+              </a:rPr>
+              <a:t>Why use containers for deployment?</a:t>
+            </a:r>
+          </a:p>
+          <a:p>
+            <a:r>
+              <a:rPr sz="1800" b="1">
+                <a:solidFill>
+                  <a:srgbClr val="03306E"/>
+                </a:solidFill>
+                <a:latin typeface="Calibri"/>
+              </a:rPr>
+              <a:t>The app runs the same way everywhere and scales easily.</a:t>
+            </a:r>
+          </a:p>
+        </p:txBody>
+      </p:sp>
+    </p:spTree>
+  </p:cSld>
+  <p:clrMapOvr>
+    <a:masterClrMapping/>
+  </p:clrMapOvr>
+</p:sld>
+</file>
+
+<file path=ppt/slides/slide12.xml><?xml version="1.0" encoding="utf-8"?>
+<p:sld xmlns:a="http://schemas.openxmlformats.org/drawingml/2006/main" xmlns:p="http://schemas.openxmlformats.org/presentationml/2006/main" xmlns:r="http://schemas.openxmlformats.org/officeDocument/2006/relationships">
+  <p:cSld>
+    <p:bg>
+      <p:bgPr>
+        <a:solidFill>
+          <a:srgbClr val="FFFFFF"/>
+        </a:solidFill>
+        <a:effectLst/>
+      </p:bgPr>
+    </p:bg>
+    <p:spTree>
+      <p:nvGrpSpPr>
+        <p:cNvPr id="1" name=""/>
+        <p:cNvGrpSpPr/>
+        <p:nvPr/>
+      </p:nvGrpSpPr>
+      <p:grpSpPr/>
+      <p:sp>
+        <p:nvSpPr>
+          <p:cNvPr id="2" name="TextBox 1"/>
+          <p:cNvSpPr txBox="1"/>
+          <p:nvPr/>
+        </p:nvSpPr>
+        <p:spPr>
+          <a:xfrm>
+            <a:off x="548640" y="320040"/>
+            <a:ext cx="11094415" cy="274320"/>
+          </a:xfrm>
+          <a:prstGeom prst="rect">
+            <a:avLst/>
+          </a:prstGeom>
+          <a:noFill/>
+        </p:spPr>
+        <p:txBody>
+          <a:bodyPr wrap="square" anchor="t" lIns="0" rIns="0" tIns="0" bIns="0"/>
+          <a:lstStyle/>
+          <a:p>
+            <a:pPr algn="l"/>
+            <a:r>
+              <a:rPr sz="1100" b="1" i="0">
+                <a:solidFill>
+                  <a:srgbClr val="54595D"/>
+                </a:solidFill>
+                <a:latin typeface="Calibri"/>
+              </a:rPr>
+              <a:t>OCCUPATIONAL SPECIALISM  ·  Specialism Content Area 6</a:t>
+            </a:r>
+          </a:p>
+        </p:txBody>
+      </p:sp>
+      <p:sp>
+        <p:nvSpPr>
+          <p:cNvPr id="3" name="TextBox 2"/>
+          <p:cNvSpPr txBox="1"/>
+          <p:nvPr/>
+        </p:nvSpPr>
+        <p:spPr>
+          <a:xfrm>
+            <a:off x="548640" y="566928"/>
+            <a:ext cx="11094415" cy="822960"/>
+          </a:xfrm>
+          <a:prstGeom prst="rect">
+            <a:avLst/>
+          </a:prstGeom>
+          <a:noFill/>
+        </p:spPr>
+        <p:txBody>
+          <a:bodyPr wrap="square" anchor="ctr" lIns="0" rIns="0" tIns="0" bIns="0"/>
+          <a:lstStyle/>
+          <a:p>
+            <a:pPr algn="l"/>
+            <a:r>
+              <a:rPr sz="3200" b="1" i="0">
+                <a:solidFill>
+                  <a:srgbClr val="03306E"/>
+                </a:solidFill>
+                <a:latin typeface="Cambria"/>
+              </a:rPr>
+              <a:t>Activity: Call a real API</a:t>
+            </a:r>
+          </a:p>
+        </p:txBody>
+      </p:sp>
+      <p:sp>
+        <p:nvSpPr>
+          <p:cNvPr id="4" name="TextBox 3"/>
+          <p:cNvSpPr txBox="1"/>
+          <p:nvPr/>
+        </p:nvSpPr>
+        <p:spPr>
+          <a:xfrm>
+            <a:off x="548640" y="6446520"/>
+            <a:ext cx="8229600" cy="274320"/>
+          </a:xfrm>
+          <a:prstGeom prst="rect">
+            <a:avLst/>
+          </a:prstGeom>
+          <a:noFill/>
+        </p:spPr>
+        <p:txBody>
+          <a:bodyPr wrap="square" anchor="t" lIns="0" rIns="0" tIns="0" bIns="0"/>
+          <a:lstStyle/>
+          <a:p>
+            <a:pPr algn="l"/>
+            <a:r>
+              <a:rPr sz="1000" b="0" i="0">
+                <a:solidFill>
+                  <a:srgbClr val="54595D"/>
+                </a:solidFill>
+                <a:latin typeface="Calibri"/>
+              </a:rPr>
+              <a:t>Digital Software Development T Level  ·  Connecting to Data and Deploying Software</a:t>
+            </a:r>
+          </a:p>
+        </p:txBody>
+      </p:sp>
+      <p:sp>
+        <p:nvSpPr>
+          <p:cNvPr id="5" name="TextBox 4"/>
+          <p:cNvSpPr txBox="1"/>
+          <p:nvPr/>
+        </p:nvSpPr>
+        <p:spPr>
+          <a:xfrm>
+            <a:off x="10728655" y="6446520"/>
+            <a:ext cx="914400" cy="274320"/>
+          </a:xfrm>
+          <a:prstGeom prst="rect">
+            <a:avLst/>
+          </a:prstGeom>
+          <a:noFill/>
+        </p:spPr>
+        <p:txBody>
+          <a:bodyPr wrap="square" anchor="t" lIns="0" rIns="0" tIns="0" bIns="0"/>
+          <a:lstStyle/>
+          <a:p>
+            <a:pPr algn="r"/>
+            <a:r>
+              <a:rPr sz="1000" b="0" i="0">
+                <a:solidFill>
+                  <a:srgbClr val="54595D"/>
+                </a:solidFill>
+                <a:latin typeface="Calibri"/>
+              </a:rPr>
+              <a:t>12</a:t>
+            </a:r>
+          </a:p>
+        </p:txBody>
+      </p:sp>
+      <p:sp>
+        <p:nvSpPr>
+          <p:cNvPr id="6" name="Rounded Rectangle 5"/>
+          <p:cNvSpPr/>
+          <p:nvPr/>
+        </p:nvSpPr>
+        <p:spPr>
+          <a:xfrm>
+            <a:off x="548640" y="1508760"/>
+            <a:ext cx="2011680" cy="457200"/>
+          </a:xfrm>
+          <a:prstGeom prst="roundRect">
+            <a:avLst>
+              <a:gd name="adj" fmla="val 50000"/>
+            </a:avLst>
+          </a:prstGeom>
+          <a:solidFill>
+            <a:srgbClr val="33C17A"/>
+          </a:solidFill>
+          <a:ln>
+            <a:noFill/>
+          </a:ln>
+          <a:effectLst/>
+        </p:spPr>
+        <p:style>
+          <a:lnRef idx="1">
+            <a:schemeClr val="accent1"/>
+          </a:lnRef>
+          <a:fillRef idx="3">
+            <a:schemeClr val="accent1"/>
+          </a:fillRef>
+          <a:effectRef idx="2">
+            <a:schemeClr val="accent1"/>
+          </a:effectRef>
+          <a:fontRef idx="minor">
+            <a:schemeClr val="lt1"/>
+          </a:fontRef>
+        </p:style>
+        <p:txBody>
+          <a:bodyPr rtlCol="0" anchor="ctr"/>
+          <a:lstStyle/>
+          <a:p/>
+        </p:txBody>
+      </p:sp>
+      <p:sp>
+        <p:nvSpPr>
+          <p:cNvPr id="7" name="TextBox 6"/>
+          <p:cNvSpPr txBox="1"/>
+          <p:nvPr/>
+        </p:nvSpPr>
+        <p:spPr>
+          <a:xfrm>
+            <a:off x="548640" y="1508760"/>
+            <a:ext cx="2011680" cy="457200"/>
+          </a:xfrm>
+          <a:prstGeom prst="rect">
+            <a:avLst/>
+          </a:prstGeom>
+          <a:noFill/>
+        </p:spPr>
+        <p:txBody>
+          <a:bodyPr wrap="square" anchor="ctr" lIns="0" rIns="0" tIns="0" bIns="0"/>
+          <a:lstStyle/>
+          <a:p>
+            <a:pPr algn="ctr"/>
+            <a:r>
+              <a:rPr sz="1400" b="1" i="0">
+                <a:solidFill>
+                  <a:srgbClr val="202122"/>
+                </a:solidFill>
+                <a:latin typeface="Calibri"/>
+              </a:rPr>
+              <a:t>30 minutes</a:t>
+            </a:r>
+          </a:p>
+        </p:txBody>
+      </p:sp>
+      <p:sp>
+        <p:nvSpPr>
+          <p:cNvPr id="8" name="TextBox 7"/>
+          <p:cNvSpPr txBox="1"/>
+          <p:nvPr/>
+        </p:nvSpPr>
+        <p:spPr>
+          <a:xfrm>
+            <a:off x="2743200" y="1508760"/>
+            <a:ext cx="4754880" cy="457200"/>
+          </a:xfrm>
+          <a:prstGeom prst="rect">
+            <a:avLst/>
+          </a:prstGeom>
+          <a:noFill/>
+        </p:spPr>
+        <p:txBody>
+          <a:bodyPr wrap="square" anchor="ctr" lIns="0" rIns="0" tIns="0" bIns="0"/>
+          <a:lstStyle/>
+          <a:p>
+            <a:pPr algn="l"/>
+            <a:r>
+              <a:rPr sz="1400" b="0" i="1">
+                <a:solidFill>
+                  <a:srgbClr val="54595D"/>
+                </a:solidFill>
+                <a:latin typeface="Calibri"/>
+              </a:rPr>
+              <a:t>Pairs, in Python</a:t>
+            </a:r>
+          </a:p>
+        </p:txBody>
+      </p:sp>
+      <p:sp>
+        <p:nvSpPr>
+          <p:cNvPr id="9" name="Oval 8"/>
+          <p:cNvSpPr/>
+          <p:nvPr/>
+        </p:nvSpPr>
+        <p:spPr>
+          <a:xfrm>
+            <a:off x="548640" y="2482596"/>
+            <a:ext cx="384048" cy="384048"/>
+          </a:xfrm>
+          <a:prstGeom prst="ellipse">
+            <a:avLst/>
+          </a:prstGeom>
+          <a:solidFill>
+            <a:srgbClr val="0645AD"/>
+          </a:solidFill>
+          <a:ln>
+            <a:noFill/>
+          </a:ln>
+          <a:effectLst/>
+        </p:spPr>
+        <p:style>
+          <a:lnRef idx="1">
+            <a:schemeClr val="accent1"/>
+          </a:lnRef>
+          <a:fillRef idx="3">
+            <a:schemeClr val="accent1"/>
+          </a:fillRef>
+          <a:effectRef idx="2">
+            <a:schemeClr val="accent1"/>
+          </a:effectRef>
+          <a:fontRef idx="minor">
+            <a:schemeClr val="lt1"/>
+          </a:fontRef>
+        </p:style>
+        <p:txBody>
+          <a:bodyPr rtlCol="0" anchor="ctr" lIns="0" rIns="0" tIns="0" bIns="0"/>
+          <a:lstStyle/>
+          <a:p>
+            <a:pPr algn="ctr"/>
+            <a:r>
+              <a:rPr sz="1300" b="1">
+                <a:solidFill>
+                  <a:srgbClr val="FFFFFF"/>
+                </a:solidFill>
+                <a:latin typeface="Calibri"/>
+              </a:rPr>
+              <a:t>1</a:t>
+            </a:r>
+          </a:p>
+        </p:txBody>
+      </p:sp>
+      <p:sp>
+        <p:nvSpPr>
+          <p:cNvPr id="10" name="TextBox 9"/>
+          <p:cNvSpPr txBox="1"/>
+          <p:nvPr/>
+        </p:nvSpPr>
+        <p:spPr>
+          <a:xfrm>
+            <a:off x="1143000" y="2240280"/>
+            <a:ext cx="5943600" cy="868680"/>
+          </a:xfrm>
+          <a:prstGeom prst="rect">
+            <a:avLst/>
+          </a:prstGeom>
+          <a:noFill/>
+        </p:spPr>
+        <p:txBody>
+          <a:bodyPr wrap="square" anchor="ctr" lIns="0" rIns="0" tIns="0" bIns="0"/>
+          <a:lstStyle/>
+          <a:p>
+            <a:pPr algn="l"/>
+            <a:r>
+              <a:rPr sz="1700" b="0" i="0">
+                <a:solidFill>
+                  <a:srgbClr val="202122"/>
+                </a:solidFill>
+                <a:latin typeface="Calibri"/>
+              </a:rPr>
+              <a:t>Use the requests library to call a free public API chosen by your teacher.</a:t>
+            </a:r>
+          </a:p>
+        </p:txBody>
+      </p:sp>
+      <p:sp>
+        <p:nvSpPr>
+          <p:cNvPr id="11" name="Oval 10"/>
+          <p:cNvSpPr/>
+          <p:nvPr/>
+        </p:nvSpPr>
+        <p:spPr>
+          <a:xfrm>
+            <a:off x="548640" y="3461004"/>
+            <a:ext cx="384048" cy="384048"/>
+          </a:xfrm>
+          <a:prstGeom prst="ellipse">
+            <a:avLst/>
+          </a:prstGeom>
+          <a:solidFill>
+            <a:srgbClr val="0645AD"/>
+          </a:solidFill>
+          <a:ln>
+            <a:noFill/>
+          </a:ln>
+          <a:effectLst/>
+        </p:spPr>
+        <p:style>
+          <a:lnRef idx="1">
+            <a:schemeClr val="accent1"/>
+          </a:lnRef>
+          <a:fillRef idx="3">
+            <a:schemeClr val="accent1"/>
+          </a:fillRef>
+          <a:effectRef idx="2">
+            <a:schemeClr val="accent1"/>
+          </a:effectRef>
+          <a:fontRef idx="minor">
+            <a:schemeClr val="lt1"/>
+          </a:fontRef>
+        </p:style>
+        <p:txBody>
+          <a:bodyPr rtlCol="0" anchor="ctr" lIns="0" rIns="0" tIns="0" bIns="0"/>
+          <a:lstStyle/>
+          <a:p>
+            <a:pPr algn="ctr"/>
+            <a:r>
+              <a:rPr sz="1300" b="1">
+                <a:solidFill>
+                  <a:srgbClr val="FFFFFF"/>
+                </a:solidFill>
+                <a:latin typeface="Calibri"/>
+              </a:rPr>
+              <a:t>2</a:t>
+            </a:r>
+          </a:p>
+        </p:txBody>
+      </p:sp>
+      <p:sp>
+        <p:nvSpPr>
+          <p:cNvPr id="12" name="TextBox 11"/>
+          <p:cNvSpPr txBox="1"/>
+          <p:nvPr/>
+        </p:nvSpPr>
+        <p:spPr>
+          <a:xfrm>
+            <a:off x="1143000" y="3218688"/>
+            <a:ext cx="5943600" cy="868680"/>
+          </a:xfrm>
+          <a:prstGeom prst="rect">
+            <a:avLst/>
+          </a:prstGeom>
+          <a:noFill/>
+        </p:spPr>
+        <p:txBody>
+          <a:bodyPr wrap="square" anchor="ctr" lIns="0" rIns="0" tIns="0" bIns="0"/>
+          <a:lstStyle/>
+          <a:p>
+            <a:pPr algn="l"/>
+            <a:r>
+              <a:rPr sz="1700" b="0" i="0">
+                <a:solidFill>
+                  <a:srgbClr val="202122"/>
+                </a:solidFill>
+                <a:latin typeface="Calibri"/>
+              </a:rPr>
+              <a:t>Parse the JSON response and display three values.</a:t>
+            </a:r>
+          </a:p>
+        </p:txBody>
+      </p:sp>
+      <p:sp>
+        <p:nvSpPr>
+          <p:cNvPr id="13" name="Oval 12"/>
+          <p:cNvSpPr/>
+          <p:nvPr/>
+        </p:nvSpPr>
+        <p:spPr>
+          <a:xfrm>
+            <a:off x="548640" y="4439412"/>
+            <a:ext cx="384048" cy="384048"/>
+          </a:xfrm>
+          <a:prstGeom prst="ellipse">
+            <a:avLst/>
+          </a:prstGeom>
+          <a:solidFill>
+            <a:srgbClr val="0645AD"/>
+          </a:solidFill>
+          <a:ln>
+            <a:noFill/>
+          </a:ln>
+          <a:effectLst/>
+        </p:spPr>
+        <p:style>
+          <a:lnRef idx="1">
+            <a:schemeClr val="accent1"/>
+          </a:lnRef>
+          <a:fillRef idx="3">
+            <a:schemeClr val="accent1"/>
+          </a:fillRef>
+          <a:effectRef idx="2">
+            <a:schemeClr val="accent1"/>
+          </a:effectRef>
+          <a:fontRef idx="minor">
+            <a:schemeClr val="lt1"/>
+          </a:fontRef>
+        </p:style>
+        <p:txBody>
+          <a:bodyPr rtlCol="0" anchor="ctr" lIns="0" rIns="0" tIns="0" bIns="0"/>
+          <a:lstStyle/>
+          <a:p>
+            <a:pPr algn="ctr"/>
+            <a:r>
+              <a:rPr sz="1300" b="1">
+                <a:solidFill>
+                  <a:srgbClr val="FFFFFF"/>
+                </a:solidFill>
+                <a:latin typeface="Calibri"/>
+              </a:rPr>
+              <a:t>3</a:t>
+            </a:r>
+          </a:p>
+        </p:txBody>
+      </p:sp>
+      <p:sp>
+        <p:nvSpPr>
+          <p:cNvPr id="14" name="TextBox 13"/>
+          <p:cNvSpPr txBox="1"/>
+          <p:nvPr/>
+        </p:nvSpPr>
+        <p:spPr>
+          <a:xfrm>
+            <a:off x="1143000" y="4197096"/>
+            <a:ext cx="5943600" cy="868680"/>
+          </a:xfrm>
+          <a:prstGeom prst="rect">
+            <a:avLst/>
+          </a:prstGeom>
+          <a:noFill/>
+        </p:spPr>
+        <p:txBody>
+          <a:bodyPr wrap="square" anchor="ctr" lIns="0" rIns="0" tIns="0" bIns="0"/>
+          <a:lstStyle/>
+          <a:p>
+            <a:pPr algn="l"/>
+            <a:r>
+              <a:rPr sz="1700" b="0" i="0">
+                <a:solidFill>
+                  <a:srgbClr val="202122"/>
+                </a:solidFill>
+                <a:latin typeface="Calibri"/>
+              </a:rPr>
+              <a:t>Handle a failed request with a clear message.</a:t>
+            </a:r>
+          </a:p>
+        </p:txBody>
+      </p:sp>
+      <p:sp>
+        <p:nvSpPr>
+          <p:cNvPr id="15" name="Oval 14"/>
+          <p:cNvSpPr/>
+          <p:nvPr/>
+        </p:nvSpPr>
+        <p:spPr>
+          <a:xfrm>
+            <a:off x="548640" y="5417820"/>
+            <a:ext cx="384048" cy="384048"/>
+          </a:xfrm>
+          <a:prstGeom prst="ellipse">
+            <a:avLst/>
+          </a:prstGeom>
+          <a:solidFill>
+            <a:srgbClr val="0645AD"/>
+          </a:solidFill>
+          <a:ln>
+            <a:noFill/>
+          </a:ln>
+          <a:effectLst/>
+        </p:spPr>
+        <p:style>
+          <a:lnRef idx="1">
+            <a:schemeClr val="accent1"/>
+          </a:lnRef>
+          <a:fillRef idx="3">
+            <a:schemeClr val="accent1"/>
+          </a:fillRef>
+          <a:effectRef idx="2">
+            <a:schemeClr val="accent1"/>
+          </a:effectRef>
+          <a:fontRef idx="minor">
+            <a:schemeClr val="lt1"/>
+          </a:fontRef>
+        </p:style>
+        <p:txBody>
+          <a:bodyPr rtlCol="0" anchor="ctr" lIns="0" rIns="0" tIns="0" bIns="0"/>
+          <a:lstStyle/>
+          <a:p>
+            <a:pPr algn="ctr"/>
+            <a:r>
+              <a:rPr sz="1300" b="1">
+                <a:solidFill>
+                  <a:srgbClr val="FFFFFF"/>
+                </a:solidFill>
+                <a:latin typeface="Calibri"/>
+              </a:rPr>
+              <a:t>4</a:t>
+            </a:r>
+          </a:p>
+        </p:txBody>
+      </p:sp>
+      <p:sp>
+        <p:nvSpPr>
+          <p:cNvPr id="16" name="TextBox 15"/>
+          <p:cNvSpPr txBox="1"/>
+          <p:nvPr/>
+        </p:nvSpPr>
+        <p:spPr>
+          <a:xfrm>
+            <a:off x="1143000" y="5175504"/>
+            <a:ext cx="5943600" cy="868680"/>
+          </a:xfrm>
+          <a:prstGeom prst="rect">
+            <a:avLst/>
+          </a:prstGeom>
+          <a:noFill/>
+        </p:spPr>
+        <p:txBody>
+          <a:bodyPr wrap="square" anchor="ctr" lIns="0" rIns="0" tIns="0" bIns="0"/>
+          <a:lstStyle/>
+          <a:p>
+            <a:pPr algn="l"/>
+            <a:r>
+              <a:rPr sz="1700" b="0" i="0">
+                <a:solidFill>
+                  <a:srgbClr val="202122"/>
+                </a:solidFill>
+                <a:latin typeface="Calibri"/>
+              </a:rPr>
+              <a:t>Recommend a deployment method for your tool.</a:t>
+            </a:r>
+          </a:p>
+        </p:txBody>
+      </p:sp>
+      <p:sp>
+        <p:nvSpPr>
+          <p:cNvPr id="17" name="Rounded Rectangle 16"/>
+          <p:cNvSpPr/>
+          <p:nvPr/>
+        </p:nvSpPr>
+        <p:spPr>
+          <a:xfrm>
+            <a:off x="7772400" y="1508760"/>
+            <a:ext cx="3867912" cy="4572000"/>
+          </a:xfrm>
+          <a:prstGeom prst="roundRect">
+            <a:avLst>
+              <a:gd name="adj" fmla="val 8000"/>
+            </a:avLst>
+          </a:prstGeom>
+          <a:solidFill>
+            <a:srgbClr val="EAF3FF"/>
+          </a:solidFill>
+          <a:ln>
+            <a:noFill/>
+          </a:ln>
+          <a:effectLst/>
+        </p:spPr>
+        <p:style>
+          <a:lnRef idx="1">
+            <a:schemeClr val="accent1"/>
+          </a:lnRef>
+          <a:fillRef idx="3">
+            <a:schemeClr val="accent1"/>
+          </a:fillRef>
+          <a:effectRef idx="2">
+            <a:schemeClr val="accent1"/>
+          </a:effectRef>
+          <a:fontRef idx="minor">
+            <a:schemeClr val="lt1"/>
+          </a:fontRef>
+        </p:style>
+        <p:txBody>
+          <a:bodyPr rtlCol="0" anchor="ctr"/>
+          <a:lstStyle/>
+          <a:p/>
+        </p:txBody>
+      </p:sp>
+      <p:sp>
+        <p:nvSpPr>
+          <p:cNvPr id="18" name="TextBox 17"/>
+          <p:cNvSpPr txBox="1"/>
+          <p:nvPr/>
+        </p:nvSpPr>
+        <p:spPr>
+          <a:xfrm>
+            <a:off x="8046720" y="1737360"/>
+            <a:ext cx="3291840" cy="365760"/>
+          </a:xfrm>
+          <a:prstGeom prst="rect">
+            <a:avLst/>
+          </a:prstGeom>
+          <a:noFill/>
+        </p:spPr>
+        <p:txBody>
+          <a:bodyPr wrap="square" anchor="t" lIns="0" rIns="0" tIns="0" bIns="0"/>
+          <a:lstStyle/>
+          <a:p>
+            <a:pPr algn="l"/>
+            <a:r>
+              <a:rPr sz="1300" b="1" i="0">
+                <a:solidFill>
+                  <a:srgbClr val="0645AD"/>
+                </a:solidFill>
+                <a:latin typeface="Calibri"/>
+              </a:rPr>
+              <a:t>SUCCESS CRITERIA</a:t>
+            </a:r>
+          </a:p>
+        </p:txBody>
+      </p:sp>
+      <p:sp>
+        <p:nvSpPr>
+          <p:cNvPr id="19" name="TextBox 18"/>
+          <p:cNvSpPr txBox="1"/>
+          <p:nvPr/>
+        </p:nvSpPr>
+        <p:spPr>
+          <a:xfrm>
+            <a:off x="8046720" y="2240280"/>
+            <a:ext cx="3337560" cy="3657600"/>
+          </a:xfrm>
+          <a:prstGeom prst="rect">
+            <a:avLst/>
+          </a:prstGeom>
+          <a:noFill/>
+        </p:spPr>
+        <p:txBody>
+          <a:bodyPr wrap="square" lIns="0" rIns="0" tIns="0" bIns="0">
+            <a:spAutoFit/>
+          </a:bodyPr>
+          <a:lstStyle/>
+          <a:p>
+            <a:pPr marL="274320" indent="-274320">
+              <a:spcAft>
+                <a:spcPts val="810"/>
+              </a:spcAft>
+              <a:buClr>
+                <a:srgbClr val="0645AD"/>
+              </a:buClr>
+              <a:buFont typeface="Arial"/>
+              <a:buChar char="•"/>
+            </a:pPr>
+            <a:r>
+              <a:rPr sz="1800" b="0">
+                <a:solidFill>
+                  <a:srgbClr val="202122"/>
+                </a:solidFill>
+                <a:latin typeface="Calibri"/>
+              </a:rPr>
+              <a:t>Data parsed correctly</a:t>
+            </a:r>
+          </a:p>
+          <a:p>
+            <a:pPr marL="274320" indent="-274320">
+              <a:spcAft>
+                <a:spcPts val="810"/>
+              </a:spcAft>
+              <a:buClr>
+                <a:srgbClr val="0645AD"/>
+              </a:buClr>
+              <a:buFont typeface="Arial"/>
+              <a:buChar char="•"/>
+            </a:pPr>
+            <a:r>
+              <a:rPr sz="1800" b="0">
+                <a:solidFill>
+                  <a:srgbClr val="202122"/>
+                </a:solidFill>
+                <a:latin typeface="Calibri"/>
+              </a:rPr>
+              <a:t>Errors handled</a:t>
+            </a:r>
+          </a:p>
+          <a:p>
+            <a:pPr marL="274320" indent="-274320">
+              <a:spcAft>
+                <a:spcPts val="810"/>
+              </a:spcAft>
+              <a:buClr>
+                <a:srgbClr val="0645AD"/>
+              </a:buClr>
+              <a:buFont typeface="Arial"/>
+              <a:buChar char="•"/>
+            </a:pPr>
+            <a:r>
+              <a:rPr sz="1800" b="0">
+                <a:solidFill>
+                  <a:srgbClr val="202122"/>
+                </a:solidFill>
+                <a:latin typeface="Calibri"/>
+              </a:rPr>
+              <a:t>Deployment choice justified</a:t>
+            </a:r>
+          </a:p>
+        </p:txBody>
+      </p:sp>
+    </p:spTree>
+  </p:cSld>
+  <p:clrMapOvr>
+    <a:masterClrMapping/>
+  </p:clrMapOvr>
+</p:sld>
+</file>
+
+<file path=ppt/slides/slide13.xml><?xml version="1.0" encoding="utf-8"?>
+<p:sld xmlns:a="http://schemas.openxmlformats.org/drawingml/2006/main" xmlns:p="http://schemas.openxmlformats.org/presentationml/2006/main" xmlns:r="http://schemas.openxmlformats.org/officeDocument/2006/relationships">
+  <p:cSld>
+    <p:bg>
+      <p:bgPr>
+        <a:solidFill>
+          <a:srgbClr val="03306E"/>
+        </a:solidFill>
+        <a:effectLst/>
+      </p:bgPr>
+    </p:bg>
+    <p:spTree>
+      <p:nvGrpSpPr>
+        <p:cNvPr id="1" name=""/>
+        <p:cNvGrpSpPr/>
+        <p:nvPr/>
+      </p:nvGrpSpPr>
+      <p:grpSpPr/>
+      <p:sp>
+        <p:nvSpPr>
+          <p:cNvPr id="2" name="TextBox 1"/>
+          <p:cNvSpPr txBox="1"/>
+          <p:nvPr/>
+        </p:nvSpPr>
+        <p:spPr>
+          <a:xfrm>
+            <a:off x="548640" y="320040"/>
+            <a:ext cx="11094415" cy="274320"/>
+          </a:xfrm>
+          <a:prstGeom prst="rect">
+            <a:avLst/>
+          </a:prstGeom>
+          <a:noFill/>
+        </p:spPr>
+        <p:txBody>
+          <a:bodyPr wrap="square" anchor="t" lIns="0" rIns="0" tIns="0" bIns="0"/>
+          <a:lstStyle/>
+          <a:p>
+            <a:pPr algn="l"/>
+            <a:r>
+              <a:rPr sz="1100" b="1" i="0">
+                <a:solidFill>
+                  <a:srgbClr val="A9C8F0"/>
+                </a:solidFill>
+                <a:latin typeface="Calibri"/>
+              </a:rPr>
+              <a:t>OCCUPATIONAL SPECIALISM  ·  Specialism Content Area 6</a:t>
+            </a:r>
+          </a:p>
+        </p:txBody>
+      </p:sp>
+      <p:sp>
+        <p:nvSpPr>
+          <p:cNvPr id="3" name="TextBox 2"/>
+          <p:cNvSpPr txBox="1"/>
+          <p:nvPr/>
+        </p:nvSpPr>
+        <p:spPr>
+          <a:xfrm>
+            <a:off x="548640" y="566928"/>
+            <a:ext cx="11094415" cy="822960"/>
+          </a:xfrm>
+          <a:prstGeom prst="rect">
+            <a:avLst/>
+          </a:prstGeom>
+          <a:noFill/>
+        </p:spPr>
+        <p:txBody>
+          <a:bodyPr wrap="square" anchor="ctr" lIns="0" rIns="0" tIns="0" bIns="0"/>
+          <a:lstStyle/>
+          <a:p>
+            <a:pPr algn="l"/>
+            <a:r>
+              <a:rPr sz="3200" b="1" i="0">
+                <a:solidFill>
+                  <a:srgbClr val="FFFFFF"/>
+                </a:solidFill>
+                <a:latin typeface="Cambria"/>
+              </a:rPr>
+              <a:t>Exit ticket</a:t>
+            </a:r>
+          </a:p>
+        </p:txBody>
+      </p:sp>
+      <p:sp>
+        <p:nvSpPr>
+          <p:cNvPr id="4" name="Oval 3"/>
+          <p:cNvSpPr/>
+          <p:nvPr/>
+        </p:nvSpPr>
+        <p:spPr>
+          <a:xfrm>
+            <a:off x="548640" y="1737360"/>
+            <a:ext cx="502920" cy="502920"/>
+          </a:xfrm>
+          <a:prstGeom prst="ellipse">
+            <a:avLst/>
+          </a:prstGeom>
+          <a:solidFill>
+            <a:srgbClr val="33C17A"/>
+          </a:solidFill>
+          <a:ln>
+            <a:noFill/>
+          </a:ln>
+          <a:effectLst/>
+        </p:spPr>
+        <p:style>
+          <a:lnRef idx="1">
+            <a:schemeClr val="accent1"/>
+          </a:lnRef>
+          <a:fillRef idx="3">
+            <a:schemeClr val="accent1"/>
+          </a:fillRef>
+          <a:effectRef idx="2">
+            <a:schemeClr val="accent1"/>
+          </a:effectRef>
+          <a:fontRef idx="minor">
+            <a:schemeClr val="lt1"/>
+          </a:fontRef>
+        </p:style>
+        <p:txBody>
+          <a:bodyPr rtlCol="0" anchor="ctr" lIns="0" rIns="0" tIns="0" bIns="0"/>
+          <a:lstStyle/>
+          <a:p>
+            <a:pPr algn="ctr"/>
+            <a:r>
+              <a:rPr sz="1700" b="1">
+                <a:solidFill>
+                  <a:srgbClr val="202122"/>
+                </a:solidFill>
+                <a:latin typeface="Calibri"/>
+              </a:rPr>
+              <a:t>1</a:t>
+            </a:r>
+          </a:p>
+        </p:txBody>
+      </p:sp>
+      <p:sp>
+        <p:nvSpPr>
+          <p:cNvPr id="5" name="TextBox 4"/>
+          <p:cNvSpPr txBox="1"/>
+          <p:nvPr/>
+        </p:nvSpPr>
+        <p:spPr>
+          <a:xfrm>
+            <a:off x="1325880" y="1645920"/>
+            <a:ext cx="6583680" cy="822960"/>
+          </a:xfrm>
+          <a:prstGeom prst="rect">
+            <a:avLst/>
+          </a:prstGeom>
+          <a:noFill/>
+        </p:spPr>
+        <p:txBody>
+          <a:bodyPr wrap="square" anchor="ctr" lIns="0" rIns="0" tIns="0" bIns="0"/>
+          <a:lstStyle/>
+          <a:p>
+            <a:pPr algn="l"/>
+            <a:r>
+              <a:rPr sz="2000" b="0" i="0">
+                <a:solidFill>
+                  <a:srgbClr val="FFFFFF"/>
+                </a:solidFill>
+                <a:latin typeface="Calibri"/>
+              </a:rPr>
+              <a:t>Why keep API keys secret?</a:t>
+            </a:r>
+          </a:p>
+        </p:txBody>
+      </p:sp>
+      <p:sp>
+        <p:nvSpPr>
+          <p:cNvPr id="6" name="Oval 5"/>
+          <p:cNvSpPr/>
+          <p:nvPr/>
+        </p:nvSpPr>
+        <p:spPr>
+          <a:xfrm>
+            <a:off x="548640" y="2697480"/>
+            <a:ext cx="502920" cy="502920"/>
+          </a:xfrm>
+          <a:prstGeom prst="ellipse">
+            <a:avLst/>
+          </a:prstGeom>
+          <a:solidFill>
+            <a:srgbClr val="33C17A"/>
+          </a:solidFill>
+          <a:ln>
+            <a:noFill/>
+          </a:ln>
+          <a:effectLst/>
+        </p:spPr>
+        <p:style>
+          <a:lnRef idx="1">
+            <a:schemeClr val="accent1"/>
+          </a:lnRef>
+          <a:fillRef idx="3">
+            <a:schemeClr val="accent1"/>
+          </a:fillRef>
+          <a:effectRef idx="2">
+            <a:schemeClr val="accent1"/>
+          </a:effectRef>
+          <a:fontRef idx="minor">
+            <a:schemeClr val="lt1"/>
+          </a:fontRef>
+        </p:style>
+        <p:txBody>
+          <a:bodyPr rtlCol="0" anchor="ctr" lIns="0" rIns="0" tIns="0" bIns="0"/>
+          <a:lstStyle/>
+          <a:p>
+            <a:pPr algn="ctr"/>
+            <a:r>
+              <a:rPr sz="1700" b="1">
+                <a:solidFill>
+                  <a:srgbClr val="202122"/>
+                </a:solidFill>
+                <a:latin typeface="Calibri"/>
+              </a:rPr>
+              <a:t>2</a:t>
+            </a:r>
+          </a:p>
+        </p:txBody>
+      </p:sp>
+      <p:sp>
+        <p:nvSpPr>
+          <p:cNvPr id="7" name="TextBox 6"/>
+          <p:cNvSpPr txBox="1"/>
+          <p:nvPr/>
+        </p:nvSpPr>
+        <p:spPr>
+          <a:xfrm>
+            <a:off x="1325880" y="2606040"/>
+            <a:ext cx="6583680" cy="822960"/>
+          </a:xfrm>
+          <a:prstGeom prst="rect">
+            <a:avLst/>
+          </a:prstGeom>
+          <a:noFill/>
+        </p:spPr>
+        <p:txBody>
+          <a:bodyPr wrap="square" anchor="ctr" lIns="0" rIns="0" tIns="0" bIns="0"/>
+          <a:lstStyle/>
+          <a:p>
+            <a:pPr algn="l"/>
+            <a:r>
+              <a:rPr sz="2000" b="0" i="0">
+                <a:solidFill>
+                  <a:srgbClr val="FFFFFF"/>
+                </a:solidFill>
+                <a:latin typeface="Calibri"/>
+              </a:rPr>
+              <a:t>When would you choose a mobile deployment?</a:t>
+            </a:r>
+          </a:p>
+        </p:txBody>
+      </p:sp>
+      <p:sp>
+        <p:nvSpPr>
+          <p:cNvPr id="8" name="Oval 7"/>
+          <p:cNvSpPr/>
+          <p:nvPr/>
+        </p:nvSpPr>
+        <p:spPr>
+          <a:xfrm>
+            <a:off x="548640" y="3657600"/>
+            <a:ext cx="502920" cy="502920"/>
+          </a:xfrm>
+          <a:prstGeom prst="ellipse">
+            <a:avLst/>
+          </a:prstGeom>
+          <a:solidFill>
+            <a:srgbClr val="33C17A"/>
+          </a:solidFill>
+          <a:ln>
+            <a:noFill/>
+          </a:ln>
+          <a:effectLst/>
+        </p:spPr>
+        <p:style>
+          <a:lnRef idx="1">
+            <a:schemeClr val="accent1"/>
+          </a:lnRef>
+          <a:fillRef idx="3">
+            <a:schemeClr val="accent1"/>
+          </a:fillRef>
+          <a:effectRef idx="2">
+            <a:schemeClr val="accent1"/>
+          </a:effectRef>
+          <a:fontRef idx="minor">
+            <a:schemeClr val="lt1"/>
+          </a:fontRef>
+        </p:style>
+        <p:txBody>
+          <a:bodyPr rtlCol="0" anchor="ctr" lIns="0" rIns="0" tIns="0" bIns="0"/>
+          <a:lstStyle/>
+          <a:p>
+            <a:pPr algn="ctr"/>
+            <a:r>
+              <a:rPr sz="1700" b="1">
+                <a:solidFill>
+                  <a:srgbClr val="202122"/>
+                </a:solidFill>
+                <a:latin typeface="Calibri"/>
+              </a:rPr>
+              <a:t>3</a:t>
+            </a:r>
+          </a:p>
+        </p:txBody>
+      </p:sp>
+      <p:sp>
+        <p:nvSpPr>
+          <p:cNvPr id="9" name="TextBox 8"/>
+          <p:cNvSpPr txBox="1"/>
+          <p:nvPr/>
+        </p:nvSpPr>
+        <p:spPr>
+          <a:xfrm>
+            <a:off x="1325880" y="3566160"/>
+            <a:ext cx="6583680" cy="822960"/>
+          </a:xfrm>
+          <a:prstGeom prst="rect">
+            <a:avLst/>
+          </a:prstGeom>
+          <a:noFill/>
+        </p:spPr>
+        <p:txBody>
+          <a:bodyPr wrap="square" anchor="ctr" lIns="0" rIns="0" tIns="0" bIns="0"/>
+          <a:lstStyle/>
+          <a:p>
+            <a:pPr algn="l"/>
+            <a:r>
+              <a:rPr sz="2000" b="0" i="0">
+                <a:solidFill>
+                  <a:srgbClr val="FFFFFF"/>
+                </a:solidFill>
+                <a:latin typeface="Calibri"/>
+              </a:rPr>
+              <a:t>What does CRUD stand for?</a:t>
+            </a:r>
+          </a:p>
+        </p:txBody>
+      </p:sp>
+      <p:sp>
+        <p:nvSpPr>
+          <p:cNvPr id="10" name="Rounded Rectangle 9"/>
+          <p:cNvSpPr/>
+          <p:nvPr/>
+        </p:nvSpPr>
+        <p:spPr>
+          <a:xfrm>
+            <a:off x="8229600" y="1645920"/>
+            <a:ext cx="3410712" cy="2926080"/>
+          </a:xfrm>
+          <a:prstGeom prst="roundRect">
+            <a:avLst>
+              <a:gd name="adj" fmla="val 8000"/>
+            </a:avLst>
+          </a:prstGeom>
+          <a:solidFill>
+            <a:srgbClr val="0645AD"/>
+          </a:solidFill>
+          <a:ln>
+            <a:noFill/>
+          </a:ln>
+          <a:effectLst/>
+        </p:spPr>
+        <p:style>
+          <a:lnRef idx="1">
+            <a:schemeClr val="accent1"/>
+          </a:lnRef>
+          <a:fillRef idx="3">
+            <a:schemeClr val="accent1"/>
+          </a:fillRef>
+          <a:effectRef idx="2">
+            <a:schemeClr val="accent1"/>
+          </a:effectRef>
+          <a:fontRef idx="minor">
+            <a:schemeClr val="lt1"/>
+          </a:fontRef>
+        </p:style>
+        <p:txBody>
+          <a:bodyPr rtlCol="0" anchor="ctr"/>
+          <a:lstStyle/>
+          <a:p/>
+        </p:txBody>
+      </p:sp>
+      <p:sp>
+        <p:nvSpPr>
+          <p:cNvPr id="11" name="TextBox 10"/>
+          <p:cNvSpPr txBox="1"/>
+          <p:nvPr/>
+        </p:nvSpPr>
+        <p:spPr>
+          <a:xfrm>
+            <a:off x="8503920" y="1874519"/>
+            <a:ext cx="2926080" cy="365760"/>
+          </a:xfrm>
+          <a:prstGeom prst="rect">
+            <a:avLst/>
+          </a:prstGeom>
+          <a:noFill/>
+        </p:spPr>
+        <p:txBody>
+          <a:bodyPr wrap="square" anchor="t" lIns="0" rIns="0" tIns="0" bIns="0"/>
+          <a:lstStyle/>
+          <a:p>
+            <a:pPr algn="l"/>
+            <a:r>
+              <a:rPr sz="1300" b="1" i="0">
+                <a:solidFill>
+                  <a:srgbClr val="A9C8F0"/>
+                </a:solidFill>
+                <a:latin typeface="Calibri"/>
+              </a:rPr>
+              <a:t>REVISE THIS TOPIC</a:t>
+            </a:r>
+          </a:p>
+        </p:txBody>
+      </p:sp>
+      <p:sp>
+        <p:nvSpPr>
+          <p:cNvPr id="12" name="TextBox 11"/>
+          <p:cNvSpPr txBox="1"/>
+          <p:nvPr/>
+        </p:nvSpPr>
+        <p:spPr>
+          <a:xfrm>
+            <a:off x="8503920" y="2286000"/>
+            <a:ext cx="2926080" cy="548640"/>
+          </a:xfrm>
+          <a:prstGeom prst="rect">
+            <a:avLst/>
+          </a:prstGeom>
+          <a:noFill/>
+        </p:spPr>
+        <p:txBody>
+          <a:bodyPr wrap="square" anchor="t" lIns="0" rIns="0" tIns="0" bIns="0"/>
+          <a:lstStyle/>
+          <a:p>
+            <a:pPr algn="l"/>
+            <a:r>
+              <a:rPr sz="1400" b="0" i="0">
+                <a:solidFill>
+                  <a:srgbClr val="FFFFFF"/>
+                </a:solidFill>
+                <a:latin typeface="Calibri"/>
+              </a:rPr>
+              <a:t>Revision notes for this lesson are on the study wiki:</a:t>
+            </a:r>
+          </a:p>
+        </p:txBody>
+      </p:sp>
+      <p:sp>
+        <p:nvSpPr>
+          <p:cNvPr id="13" name="TextBox 12"/>
+          <p:cNvSpPr txBox="1"/>
+          <p:nvPr/>
+        </p:nvSpPr>
+        <p:spPr>
+          <a:xfrm>
+            <a:off x="8503920" y="2926080"/>
+            <a:ext cx="2926080" cy="1463040"/>
+          </a:xfrm>
+          <a:prstGeom prst="rect">
+            <a:avLst/>
+          </a:prstGeom>
+          <a:noFill/>
+        </p:spPr>
+        <p:txBody>
+          <a:bodyPr wrap="square" anchor="t" lIns="0" rIns="0" tIns="0" bIns="0"/>
+          <a:lstStyle/>
+          <a:p>
+            <a:pPr algn="l"/>
+            <a:r>
+              <a:rPr sz="2000" b="1" i="0">
+                <a:solidFill>
+                  <a:srgbClr val="FFFFFF"/>
+                </a:solidFill>
+                <a:latin typeface="Cambria"/>
+              </a:rPr>
+              <a:t>Implement a Solution Using at Least Two Appropriate Languages</a:t>
+            </a:r>
+          </a:p>
+        </p:txBody>
+      </p:sp>
+      <p:sp>
+        <p:nvSpPr>
+          <p:cNvPr id="14" name="TextBox 13"/>
+          <p:cNvSpPr txBox="1"/>
+          <p:nvPr/>
+        </p:nvSpPr>
+        <p:spPr>
+          <a:xfrm>
+            <a:off x="548640" y="5669280"/>
+            <a:ext cx="11094415" cy="548640"/>
+          </a:xfrm>
+          <a:prstGeom prst="rect">
+            <a:avLst/>
+          </a:prstGeom>
+          <a:noFill/>
+        </p:spPr>
+        <p:txBody>
+          <a:bodyPr wrap="square" anchor="t" lIns="0" rIns="0" tIns="0" bIns="0"/>
+          <a:lstStyle/>
+          <a:p>
+            <a:pPr algn="l"/>
+            <a:r>
+              <a:rPr sz="1200" b="0" i="0">
+                <a:solidFill>
+                  <a:srgbClr val="A9C8F0"/>
+                </a:solidFill>
+                <a:latin typeface="Calibri"/>
+              </a:rPr>
+              <a:t>https://lana6478.github.io/T-level-Digital-Software-Development/#/02-occupational-specialism/06-implementation.md</a:t>
+            </a:r>
+          </a:p>
+        </p:txBody>
+      </p:sp>
+    </p:spTree>
+  </p:cSld>
+  <p:clrMapOvr>
+    <a:masterClrMapping/>
+  </p:clrMapOvr>
+</p:sld>
+</file>
+
 <file path=ppt/slides/slide2.xml><?xml version="1.0" encoding="utf-8"?>
 <p:sld xmlns:a="http://schemas.openxmlformats.org/drawingml/2006/main" xmlns:p="http://schemas.openxmlformats.org/presentationml/2006/main" xmlns:r="http://schemas.openxmlformats.org/officeDocument/2006/relationships">
   <p:cSld>
@@ -4680,6 +7203,414 @@
                 <a:latin typeface="Calibri"/>
               </a:rPr>
               <a:t>3</a:t>
+            </a:r>
+          </a:p>
+        </p:txBody>
+      </p:sp>
+      <p:sp>
+        <p:nvSpPr>
+          <p:cNvPr id="6" name="TextBox 5"/>
+          <p:cNvSpPr txBox="1"/>
+          <p:nvPr/>
+        </p:nvSpPr>
+        <p:spPr>
+          <a:xfrm>
+            <a:off x="548640" y="1554480"/>
+            <a:ext cx="6720840" cy="4617720"/>
+          </a:xfrm>
+          <a:prstGeom prst="rect">
+            <a:avLst/>
+          </a:prstGeom>
+          <a:noFill/>
+        </p:spPr>
+        <p:txBody>
+          <a:bodyPr wrap="square" lIns="0" rIns="0" tIns="0" bIns="0">
+            <a:spAutoFit/>
+          </a:bodyPr>
+          <a:lstStyle/>
+          <a:p>
+            <a:pPr>
+              <a:spcAft>
+                <a:spcPts val="1260"/>
+              </a:spcAft>
+            </a:pPr>
+            <a:r>
+              <a:rPr sz="2100" b="0">
+                <a:solidFill>
+                  <a:srgbClr val="202122"/>
+                </a:solidFill>
+                <a:latin typeface="Calibri"/>
+              </a:rPr>
+              <a:t>Software connects to data sources in several ways.</a:t>
+            </a:r>
+          </a:p>
+          <a:p>
+            <a:pPr>
+              <a:spcAft>
+                <a:spcPts val="1260"/>
+              </a:spcAft>
+            </a:pPr>
+            <a:r>
+              <a:rPr sz="2100" b="0">
+                <a:solidFill>
+                  <a:srgbClr val="202122"/>
+                </a:solidFill>
+                <a:latin typeface="Calibri"/>
+              </a:rPr>
+              <a:t>An API is accessed with requests (GET to read, POST to create and so on) to endpoints (specific URLs). The response, usually JSON, is parsed and displayed. API keys identify and authorise your app.</a:t>
+            </a:r>
+          </a:p>
+          <a:p>
+            <a:pPr>
+              <a:spcAft>
+                <a:spcPts val="1260"/>
+              </a:spcAft>
+            </a:pPr>
+            <a:r>
+              <a:rPr sz="2100" b="0">
+                <a:solidFill>
+                  <a:srgbClr val="202122"/>
+                </a:solidFill>
+                <a:latin typeface="Calibri"/>
+              </a:rPr>
+              <a:t>JDBC connects Java programs to databases using a driver manager, a connection, statements or prepared statements, SQL queries and result sets.</a:t>
+            </a:r>
+          </a:p>
+          <a:p>
+            <a:pPr>
+              <a:spcAft>
+                <a:spcPts val="1260"/>
+              </a:spcAft>
+            </a:pPr>
+            <a:r>
+              <a:rPr sz="2100" b="0">
+                <a:solidFill>
+                  <a:srgbClr val="202122"/>
+                </a:solidFill>
+                <a:latin typeface="Calibri"/>
+              </a:rPr>
+              <a:t>ODBC is a standard any application can use: the app talks to a driver manager and driver, which connect to a data source using its name and credentials.</a:t>
+            </a:r>
+          </a:p>
+        </p:txBody>
+      </p:sp>
+      <p:sp>
+        <p:nvSpPr>
+          <p:cNvPr id="7" name="Rounded Rectangle 6"/>
+          <p:cNvSpPr/>
+          <p:nvPr/>
+        </p:nvSpPr>
+        <p:spPr>
+          <a:xfrm>
+            <a:off x="7772400" y="1554480"/>
+            <a:ext cx="3867912" cy="4526280"/>
+          </a:xfrm>
+          <a:prstGeom prst="roundRect">
+            <a:avLst>
+              <a:gd name="adj" fmla="val 8000"/>
+            </a:avLst>
+          </a:prstGeom>
+          <a:solidFill>
+            <a:srgbClr val="03306E"/>
+          </a:solidFill>
+          <a:ln>
+            <a:noFill/>
+          </a:ln>
+          <a:effectLst/>
+        </p:spPr>
+        <p:style>
+          <a:lnRef idx="1">
+            <a:schemeClr val="accent1"/>
+          </a:lnRef>
+          <a:fillRef idx="3">
+            <a:schemeClr val="accent1"/>
+          </a:fillRef>
+          <a:effectRef idx="2">
+            <a:schemeClr val="accent1"/>
+          </a:effectRef>
+          <a:fontRef idx="minor">
+            <a:schemeClr val="lt1"/>
+          </a:fontRef>
+        </p:style>
+        <p:txBody>
+          <a:bodyPr rtlCol="0" anchor="ctr"/>
+          <a:lstStyle/>
+          <a:p/>
+        </p:txBody>
+      </p:sp>
+      <p:sp>
+        <p:nvSpPr>
+          <p:cNvPr id="8" name="Oval 7"/>
+          <p:cNvSpPr/>
+          <p:nvPr/>
+        </p:nvSpPr>
+        <p:spPr>
+          <a:xfrm>
+            <a:off x="8046720" y="1828800"/>
+            <a:ext cx="548640" cy="548640"/>
+          </a:xfrm>
+          <a:prstGeom prst="ellipse">
+            <a:avLst/>
+          </a:prstGeom>
+          <a:solidFill>
+            <a:srgbClr val="33C17A"/>
+          </a:solidFill>
+          <a:ln>
+            <a:noFill/>
+          </a:ln>
+          <a:effectLst/>
+        </p:spPr>
+        <p:style>
+          <a:lnRef idx="1">
+            <a:schemeClr val="accent1"/>
+          </a:lnRef>
+          <a:fillRef idx="3">
+            <a:schemeClr val="accent1"/>
+          </a:fillRef>
+          <a:effectRef idx="2">
+            <a:schemeClr val="accent1"/>
+          </a:effectRef>
+          <a:fontRef idx="minor">
+            <a:schemeClr val="lt1"/>
+          </a:fontRef>
+        </p:style>
+        <p:txBody>
+          <a:bodyPr rtlCol="0" anchor="ctr" lIns="0" rIns="0" tIns="0" bIns="0"/>
+          <a:lstStyle/>
+          <a:p>
+            <a:pPr algn="ctr"/>
+            <a:r>
+              <a:rPr sz="1300" b="1">
+                <a:solidFill>
+                  <a:srgbClr val="202122"/>
+                </a:solidFill>
+                <a:latin typeface="Calibri"/>
+              </a:rPr>
+              <a:t>e.g.</a:t>
+            </a:r>
+          </a:p>
+        </p:txBody>
+      </p:sp>
+      <p:sp>
+        <p:nvSpPr>
+          <p:cNvPr id="9" name="TextBox 8"/>
+          <p:cNvSpPr txBox="1"/>
+          <p:nvPr/>
+        </p:nvSpPr>
+        <p:spPr>
+          <a:xfrm>
+            <a:off x="8046720" y="2560320"/>
+            <a:ext cx="3291840" cy="365760"/>
+          </a:xfrm>
+          <a:prstGeom prst="rect">
+            <a:avLst/>
+          </a:prstGeom>
+          <a:noFill/>
+        </p:spPr>
+        <p:txBody>
+          <a:bodyPr wrap="square" anchor="t" lIns="0" rIns="0" tIns="0" bIns="0"/>
+          <a:lstStyle/>
+          <a:p>
+            <a:pPr algn="l"/>
+            <a:r>
+              <a:rPr sz="1300" b="1" i="0">
+                <a:solidFill>
+                  <a:srgbClr val="A9C8F0"/>
+                </a:solidFill>
+                <a:latin typeface="Calibri"/>
+              </a:rPr>
+              <a:t>EXAMPLE</a:t>
+            </a:r>
+          </a:p>
+        </p:txBody>
+      </p:sp>
+      <p:sp>
+        <p:nvSpPr>
+          <p:cNvPr id="10" name="TextBox 9"/>
+          <p:cNvSpPr txBox="1"/>
+          <p:nvPr/>
+        </p:nvSpPr>
+        <p:spPr>
+          <a:xfrm>
+            <a:off x="8046720" y="2971800"/>
+            <a:ext cx="3291840" cy="2971800"/>
+          </a:xfrm>
+          <a:prstGeom prst="rect">
+            <a:avLst/>
+          </a:prstGeom>
+          <a:noFill/>
+        </p:spPr>
+        <p:txBody>
+          <a:bodyPr wrap="square" anchor="t" lIns="0" rIns="0" tIns="0" bIns="0"/>
+          <a:lstStyle/>
+          <a:p>
+            <a:pPr algn="l"/>
+            <a:r>
+              <a:rPr sz="1900" b="0" i="0">
+                <a:solidFill>
+                  <a:srgbClr val="FFFFFF"/>
+                </a:solidFill>
+                <a:latin typeface="Cambria"/>
+              </a:rPr>
+              <a:t>A weather app sends a GET request to the forecast endpoint with its API key. The JSON reply is parsed into a Python dictionary and today's temperature is displayed.</a:t>
+            </a:r>
+          </a:p>
+        </p:txBody>
+      </p:sp>
+    </p:spTree>
+  </p:cSld>
+  <p:clrMapOvr>
+    <a:masterClrMapping/>
+  </p:clrMapOvr>
+</p:sld>
+</file>
+
+<file path=ppt/slides/slide4.xml><?xml version="1.0" encoding="utf-8"?>
+<p:sld xmlns:a="http://schemas.openxmlformats.org/drawingml/2006/main" xmlns:p="http://schemas.openxmlformats.org/presentationml/2006/main" xmlns:r="http://schemas.openxmlformats.org/officeDocument/2006/relationships">
+  <p:cSld>
+    <p:bg>
+      <p:bgPr>
+        <a:solidFill>
+          <a:srgbClr val="FFFFFF"/>
+        </a:solidFill>
+        <a:effectLst/>
+      </p:bgPr>
+    </p:bg>
+    <p:spTree>
+      <p:nvGrpSpPr>
+        <p:cNvPr id="1" name=""/>
+        <p:cNvGrpSpPr/>
+        <p:nvPr/>
+      </p:nvGrpSpPr>
+      <p:grpSpPr/>
+      <p:sp>
+        <p:nvSpPr>
+          <p:cNvPr id="2" name="TextBox 1"/>
+          <p:cNvSpPr txBox="1"/>
+          <p:nvPr/>
+        </p:nvSpPr>
+        <p:spPr>
+          <a:xfrm>
+            <a:off x="548640" y="320040"/>
+            <a:ext cx="11094415" cy="274320"/>
+          </a:xfrm>
+          <a:prstGeom prst="rect">
+            <a:avLst/>
+          </a:prstGeom>
+          <a:noFill/>
+        </p:spPr>
+        <p:txBody>
+          <a:bodyPr wrap="square" anchor="t" lIns="0" rIns="0" tIns="0" bIns="0"/>
+          <a:lstStyle/>
+          <a:p>
+            <a:pPr algn="l"/>
+            <a:r>
+              <a:rPr sz="1100" b="1" i="0">
+                <a:solidFill>
+                  <a:srgbClr val="54595D"/>
+                </a:solidFill>
+                <a:latin typeface="Calibri"/>
+              </a:rPr>
+              <a:t>OCCUPATIONAL SPECIALISM  ·  Specialism Content Area 6</a:t>
+            </a:r>
+          </a:p>
+        </p:txBody>
+      </p:sp>
+      <p:sp>
+        <p:nvSpPr>
+          <p:cNvPr id="3" name="TextBox 2"/>
+          <p:cNvSpPr txBox="1"/>
+          <p:nvPr/>
+        </p:nvSpPr>
+        <p:spPr>
+          <a:xfrm>
+            <a:off x="548640" y="566928"/>
+            <a:ext cx="11094415" cy="822960"/>
+          </a:xfrm>
+          <a:prstGeom prst="rect">
+            <a:avLst/>
+          </a:prstGeom>
+          <a:noFill/>
+        </p:spPr>
+        <p:txBody>
+          <a:bodyPr wrap="square" anchor="ctr" lIns="0" rIns="0" tIns="0" bIns="0"/>
+          <a:lstStyle/>
+          <a:p>
+            <a:pPr algn="l"/>
+            <a:r>
+              <a:rPr sz="3200" b="1" i="0">
+                <a:solidFill>
+                  <a:srgbClr val="03306E"/>
+                </a:solidFill>
+                <a:latin typeface="Cambria"/>
+              </a:rPr>
+              <a:t>Connecting to data</a:t>
+            </a:r>
+          </a:p>
+        </p:txBody>
+      </p:sp>
+      <p:sp>
+        <p:nvSpPr>
+          <p:cNvPr id="4" name="TextBox 3"/>
+          <p:cNvSpPr txBox="1"/>
+          <p:nvPr/>
+        </p:nvSpPr>
+        <p:spPr>
+          <a:xfrm>
+            <a:off x="548640" y="6446520"/>
+            <a:ext cx="8229600" cy="274320"/>
+          </a:xfrm>
+          <a:prstGeom prst="rect">
+            <a:avLst/>
+          </a:prstGeom>
+          <a:noFill/>
+        </p:spPr>
+        <p:txBody>
+          <a:bodyPr wrap="square" anchor="t" lIns="0" rIns="0" tIns="0" bIns="0"/>
+          <a:lstStyle/>
+          <a:p>
+            <a:pPr algn="l"/>
+            <a:r>
+              <a:rPr sz="1000" b="0" i="0">
+                <a:solidFill>
+                  <a:srgbClr val="54595D"/>
+                </a:solidFill>
+                <a:latin typeface="Calibri"/>
+              </a:rPr>
+              <a:t>Digital Software Development T Level  ·  Connecting to Data and Deploying Software</a:t>
+            </a:r>
+          </a:p>
+        </p:txBody>
+      </p:sp>
+      <p:sp>
+        <p:nvSpPr>
+          <p:cNvPr id="5" name="TextBox 4"/>
+          <p:cNvSpPr txBox="1"/>
+          <p:nvPr/>
+        </p:nvSpPr>
+        <p:spPr>
+          <a:xfrm>
+            <a:off x="10728655" y="6446520"/>
+            <a:ext cx="914400" cy="274320"/>
+          </a:xfrm>
+          <a:prstGeom prst="rect">
+            <a:avLst/>
+          </a:prstGeom>
+          <a:noFill/>
+        </p:spPr>
+        <p:txBody>
+          <a:bodyPr wrap="square" anchor="t" lIns="0" rIns="0" tIns="0" bIns="0"/>
+          <a:lstStyle/>
+          <a:p>
+            <a:pPr algn="r"/>
+            <a:r>
+              <a:rPr sz="1000" b="0" i="0">
+                <a:solidFill>
+                  <a:srgbClr val="54595D"/>
+                </a:solidFill>
+                <a:latin typeface="Calibri"/>
+              </a:rPr>
+              <a:t>4</a:t>
             </a:r>
           </a:p>
         </p:txBody>
@@ -4935,816 +7866,6 @@
 </p:sld>
 </file>
 
-<file path=ppt/slides/slide4.xml><?xml version="1.0" encoding="utf-8"?>
-<p:sld xmlns:a="http://schemas.openxmlformats.org/drawingml/2006/main" xmlns:p="http://schemas.openxmlformats.org/presentationml/2006/main" xmlns:r="http://schemas.openxmlformats.org/officeDocument/2006/relationships">
-  <p:cSld>
-    <p:bg>
-      <p:bgPr>
-        <a:solidFill>
-          <a:srgbClr val="FFFFFF"/>
-        </a:solidFill>
-        <a:effectLst/>
-      </p:bgPr>
-    </p:bg>
-    <p:spTree>
-      <p:nvGrpSpPr>
-        <p:cNvPr id="1" name=""/>
-        <p:cNvGrpSpPr/>
-        <p:nvPr/>
-      </p:nvGrpSpPr>
-      <p:grpSpPr/>
-      <p:sp>
-        <p:nvSpPr>
-          <p:cNvPr id="2" name="TextBox 1"/>
-          <p:cNvSpPr txBox="1"/>
-          <p:nvPr/>
-        </p:nvSpPr>
-        <p:spPr>
-          <a:xfrm>
-            <a:off x="548640" y="320040"/>
-            <a:ext cx="11094415" cy="274320"/>
-          </a:xfrm>
-          <a:prstGeom prst="rect">
-            <a:avLst/>
-          </a:prstGeom>
-          <a:noFill/>
-        </p:spPr>
-        <p:txBody>
-          <a:bodyPr wrap="square" anchor="t" lIns="0" rIns="0" tIns="0" bIns="0"/>
-          <a:lstStyle/>
-          <a:p>
-            <a:pPr algn="l"/>
-            <a:r>
-              <a:rPr sz="1100" b="1" i="0">
-                <a:solidFill>
-                  <a:srgbClr val="54595D"/>
-                </a:solidFill>
-                <a:latin typeface="Calibri"/>
-              </a:rPr>
-              <a:t>OCCUPATIONAL SPECIALISM  ·  Specialism Content Area 6</a:t>
-            </a:r>
-          </a:p>
-        </p:txBody>
-      </p:sp>
-      <p:sp>
-        <p:nvSpPr>
-          <p:cNvPr id="3" name="TextBox 2"/>
-          <p:cNvSpPr txBox="1"/>
-          <p:nvPr/>
-        </p:nvSpPr>
-        <p:spPr>
-          <a:xfrm>
-            <a:off x="548640" y="566928"/>
-            <a:ext cx="11094415" cy="822960"/>
-          </a:xfrm>
-          <a:prstGeom prst="rect">
-            <a:avLst/>
-          </a:prstGeom>
-          <a:noFill/>
-        </p:spPr>
-        <p:txBody>
-          <a:bodyPr wrap="square" anchor="ctr" lIns="0" rIns="0" tIns="0" bIns="0"/>
-          <a:lstStyle/>
-          <a:p>
-            <a:pPr algn="l"/>
-            <a:r>
-              <a:rPr sz="3200" b="1" i="0">
-                <a:solidFill>
-                  <a:srgbClr val="03306E"/>
-                </a:solidFill>
-                <a:latin typeface="Cambria"/>
-              </a:rPr>
-              <a:t>Working with data</a:t>
-            </a:r>
-          </a:p>
-        </p:txBody>
-      </p:sp>
-      <p:sp>
-        <p:nvSpPr>
-          <p:cNvPr id="4" name="TextBox 3"/>
-          <p:cNvSpPr txBox="1"/>
-          <p:nvPr/>
-        </p:nvSpPr>
-        <p:spPr>
-          <a:xfrm>
-            <a:off x="548640" y="6446520"/>
-            <a:ext cx="8229600" cy="274320"/>
-          </a:xfrm>
-          <a:prstGeom prst="rect">
-            <a:avLst/>
-          </a:prstGeom>
-          <a:noFill/>
-        </p:spPr>
-        <p:txBody>
-          <a:bodyPr wrap="square" anchor="t" lIns="0" rIns="0" tIns="0" bIns="0"/>
-          <a:lstStyle/>
-          <a:p>
-            <a:pPr algn="l"/>
-            <a:r>
-              <a:rPr sz="1000" b="0" i="0">
-                <a:solidFill>
-                  <a:srgbClr val="54595D"/>
-                </a:solidFill>
-                <a:latin typeface="Calibri"/>
-              </a:rPr>
-              <a:t>Digital Software Development T Level  ·  Connecting to Data and Deploying Software</a:t>
-            </a:r>
-          </a:p>
-        </p:txBody>
-      </p:sp>
-      <p:sp>
-        <p:nvSpPr>
-          <p:cNvPr id="5" name="TextBox 4"/>
-          <p:cNvSpPr txBox="1"/>
-          <p:nvPr/>
-        </p:nvSpPr>
-        <p:spPr>
-          <a:xfrm>
-            <a:off x="10728655" y="6446520"/>
-            <a:ext cx="914400" cy="274320"/>
-          </a:xfrm>
-          <a:prstGeom prst="rect">
-            <a:avLst/>
-          </a:prstGeom>
-          <a:noFill/>
-        </p:spPr>
-        <p:txBody>
-          <a:bodyPr wrap="square" anchor="t" lIns="0" rIns="0" tIns="0" bIns="0"/>
-          <a:lstStyle/>
-          <a:p>
-            <a:pPr algn="r"/>
-            <a:r>
-              <a:rPr sz="1000" b="0" i="0">
-                <a:solidFill>
-                  <a:srgbClr val="54595D"/>
-                </a:solidFill>
-                <a:latin typeface="Calibri"/>
-              </a:rPr>
-              <a:t>4</a:t>
-            </a:r>
-          </a:p>
-        </p:txBody>
-      </p:sp>
-      <p:sp>
-        <p:nvSpPr>
-          <p:cNvPr id="6" name="Rounded Rectangle 5"/>
-          <p:cNvSpPr/>
-          <p:nvPr/>
-        </p:nvSpPr>
-        <p:spPr>
-          <a:xfrm>
-            <a:off x="548640" y="1600200"/>
-            <a:ext cx="5410047" cy="2148840"/>
-          </a:xfrm>
-          <a:prstGeom prst="roundRect">
-            <a:avLst>
-              <a:gd name="adj" fmla="val 6000"/>
-            </a:avLst>
-          </a:prstGeom>
-          <a:solidFill>
-            <a:srgbClr val="EAF3FF"/>
-          </a:solidFill>
-          <a:ln>
-            <a:noFill/>
-          </a:ln>
-          <a:effectLst/>
-        </p:spPr>
-        <p:style>
-          <a:lnRef idx="1">
-            <a:schemeClr val="accent1"/>
-          </a:lnRef>
-          <a:fillRef idx="3">
-            <a:schemeClr val="accent1"/>
-          </a:fillRef>
-          <a:effectRef idx="2">
-            <a:schemeClr val="accent1"/>
-          </a:effectRef>
-          <a:fontRef idx="minor">
-            <a:schemeClr val="lt1"/>
-          </a:fontRef>
-        </p:style>
-        <p:txBody>
-          <a:bodyPr rtlCol="0" anchor="ctr"/>
-          <a:lstStyle/>
-          <a:p/>
-        </p:txBody>
-      </p:sp>
-      <p:sp>
-        <p:nvSpPr>
-          <p:cNvPr id="7" name="Oval 6"/>
-          <p:cNvSpPr/>
-          <p:nvPr/>
-        </p:nvSpPr>
-        <p:spPr>
-          <a:xfrm>
-            <a:off x="777240" y="1828800"/>
-            <a:ext cx="457200" cy="457200"/>
-          </a:xfrm>
-          <a:prstGeom prst="ellipse">
-            <a:avLst/>
-          </a:prstGeom>
-          <a:solidFill>
-            <a:srgbClr val="33C17A"/>
-          </a:solidFill>
-          <a:ln>
-            <a:noFill/>
-          </a:ln>
-          <a:effectLst/>
-        </p:spPr>
-        <p:style>
-          <a:lnRef idx="1">
-            <a:schemeClr val="accent1"/>
-          </a:lnRef>
-          <a:fillRef idx="3">
-            <a:schemeClr val="accent1"/>
-          </a:fillRef>
-          <a:effectRef idx="2">
-            <a:schemeClr val="accent1"/>
-          </a:effectRef>
-          <a:fontRef idx="minor">
-            <a:schemeClr val="lt1"/>
-          </a:fontRef>
-        </p:style>
-        <p:txBody>
-          <a:bodyPr rtlCol="0" anchor="ctr" lIns="0" rIns="0" tIns="0" bIns="0"/>
-          <a:lstStyle/>
-          <a:p>
-            <a:pPr algn="ctr"/>
-            <a:r>
-              <a:rPr sz="1500" b="1">
-                <a:solidFill>
-                  <a:srgbClr val="202122"/>
-                </a:solidFill>
-                <a:latin typeface="Calibri"/>
-              </a:rPr>
-              <a:t>1</a:t>
-            </a:r>
-          </a:p>
-        </p:txBody>
-      </p:sp>
-      <p:sp>
-        <p:nvSpPr>
-          <p:cNvPr id="8" name="TextBox 7"/>
-          <p:cNvSpPr txBox="1"/>
-          <p:nvPr/>
-        </p:nvSpPr>
-        <p:spPr>
-          <a:xfrm>
-            <a:off x="1371600" y="1801368"/>
-            <a:ext cx="4404207" cy="512064"/>
-          </a:xfrm>
-          <a:prstGeom prst="rect">
-            <a:avLst/>
-          </a:prstGeom>
-          <a:noFill/>
-        </p:spPr>
-        <p:txBody>
-          <a:bodyPr wrap="square" anchor="ctr" lIns="0" rIns="0" tIns="0" bIns="0"/>
-          <a:lstStyle/>
-          <a:p>
-            <a:pPr algn="l"/>
-            <a:r>
-              <a:rPr sz="1900" b="1" i="0">
-                <a:solidFill>
-                  <a:srgbClr val="03306E"/>
-                </a:solidFill>
-                <a:latin typeface="Calibri"/>
-              </a:rPr>
-              <a:t>Create</a:t>
-            </a:r>
-          </a:p>
-        </p:txBody>
-      </p:sp>
-      <p:sp>
-        <p:nvSpPr>
-          <p:cNvPr id="9" name="TextBox 8"/>
-          <p:cNvSpPr txBox="1"/>
-          <p:nvPr/>
-        </p:nvSpPr>
-        <p:spPr>
-          <a:xfrm>
-            <a:off x="777240" y="2468880"/>
-            <a:ext cx="4952847" cy="1143000"/>
-          </a:xfrm>
-          <a:prstGeom prst="rect">
-            <a:avLst/>
-          </a:prstGeom>
-          <a:noFill/>
-        </p:spPr>
-        <p:txBody>
-          <a:bodyPr wrap="square" anchor="t" lIns="0" rIns="0" tIns="0" bIns="0"/>
-          <a:lstStyle/>
-          <a:p>
-            <a:pPr algn="l"/>
-            <a:r>
-              <a:rPr sz="2000" b="0" i="0">
-                <a:solidFill>
-                  <a:srgbClr val="202122"/>
-                </a:solidFill>
-                <a:latin typeface="Calibri"/>
-              </a:rPr>
-              <a:t>Store new records.</a:t>
-            </a:r>
-          </a:p>
-        </p:txBody>
-      </p:sp>
-      <p:sp>
-        <p:nvSpPr>
-          <p:cNvPr id="10" name="Rounded Rectangle 9"/>
-          <p:cNvSpPr/>
-          <p:nvPr/>
-        </p:nvSpPr>
-        <p:spPr>
-          <a:xfrm>
-            <a:off x="6233007" y="1600200"/>
-            <a:ext cx="5410047" cy="2148840"/>
-          </a:xfrm>
-          <a:prstGeom prst="roundRect">
-            <a:avLst>
-              <a:gd name="adj" fmla="val 6000"/>
-            </a:avLst>
-          </a:prstGeom>
-          <a:solidFill>
-            <a:srgbClr val="EAF3FF"/>
-          </a:solidFill>
-          <a:ln>
-            <a:noFill/>
-          </a:ln>
-          <a:effectLst/>
-        </p:spPr>
-        <p:style>
-          <a:lnRef idx="1">
-            <a:schemeClr val="accent1"/>
-          </a:lnRef>
-          <a:fillRef idx="3">
-            <a:schemeClr val="accent1"/>
-          </a:fillRef>
-          <a:effectRef idx="2">
-            <a:schemeClr val="accent1"/>
-          </a:effectRef>
-          <a:fontRef idx="minor">
-            <a:schemeClr val="lt1"/>
-          </a:fontRef>
-        </p:style>
-        <p:txBody>
-          <a:bodyPr rtlCol="0" anchor="ctr"/>
-          <a:lstStyle/>
-          <a:p/>
-        </p:txBody>
-      </p:sp>
-      <p:sp>
-        <p:nvSpPr>
-          <p:cNvPr id="11" name="Oval 10"/>
-          <p:cNvSpPr/>
-          <p:nvPr/>
-        </p:nvSpPr>
-        <p:spPr>
-          <a:xfrm>
-            <a:off x="6461607" y="1828800"/>
-            <a:ext cx="457200" cy="457200"/>
-          </a:xfrm>
-          <a:prstGeom prst="ellipse">
-            <a:avLst/>
-          </a:prstGeom>
-          <a:solidFill>
-            <a:srgbClr val="33C17A"/>
-          </a:solidFill>
-          <a:ln>
-            <a:noFill/>
-          </a:ln>
-          <a:effectLst/>
-        </p:spPr>
-        <p:style>
-          <a:lnRef idx="1">
-            <a:schemeClr val="accent1"/>
-          </a:lnRef>
-          <a:fillRef idx="3">
-            <a:schemeClr val="accent1"/>
-          </a:fillRef>
-          <a:effectRef idx="2">
-            <a:schemeClr val="accent1"/>
-          </a:effectRef>
-          <a:fontRef idx="minor">
-            <a:schemeClr val="lt1"/>
-          </a:fontRef>
-        </p:style>
-        <p:txBody>
-          <a:bodyPr rtlCol="0" anchor="ctr" lIns="0" rIns="0" tIns="0" bIns="0"/>
-          <a:lstStyle/>
-          <a:p>
-            <a:pPr algn="ctr"/>
-            <a:r>
-              <a:rPr sz="1500" b="1">
-                <a:solidFill>
-                  <a:srgbClr val="202122"/>
-                </a:solidFill>
-                <a:latin typeface="Calibri"/>
-              </a:rPr>
-              <a:t>2</a:t>
-            </a:r>
-          </a:p>
-        </p:txBody>
-      </p:sp>
-      <p:sp>
-        <p:nvSpPr>
-          <p:cNvPr id="12" name="TextBox 11"/>
-          <p:cNvSpPr txBox="1"/>
-          <p:nvPr/>
-        </p:nvSpPr>
-        <p:spPr>
-          <a:xfrm>
-            <a:off x="7055967" y="1801368"/>
-            <a:ext cx="4404207" cy="512064"/>
-          </a:xfrm>
-          <a:prstGeom prst="rect">
-            <a:avLst/>
-          </a:prstGeom>
-          <a:noFill/>
-        </p:spPr>
-        <p:txBody>
-          <a:bodyPr wrap="square" anchor="ctr" lIns="0" rIns="0" tIns="0" bIns="0"/>
-          <a:lstStyle/>
-          <a:p>
-            <a:pPr algn="l"/>
-            <a:r>
-              <a:rPr sz="1900" b="1" i="0">
-                <a:solidFill>
-                  <a:srgbClr val="03306E"/>
-                </a:solidFill>
-                <a:latin typeface="Calibri"/>
-              </a:rPr>
-              <a:t>Read</a:t>
-            </a:r>
-          </a:p>
-        </p:txBody>
-      </p:sp>
-      <p:sp>
-        <p:nvSpPr>
-          <p:cNvPr id="13" name="TextBox 12"/>
-          <p:cNvSpPr txBox="1"/>
-          <p:nvPr/>
-        </p:nvSpPr>
-        <p:spPr>
-          <a:xfrm>
-            <a:off x="6461607" y="2468880"/>
-            <a:ext cx="4952847" cy="1143000"/>
-          </a:xfrm>
-          <a:prstGeom prst="rect">
-            <a:avLst/>
-          </a:prstGeom>
-          <a:noFill/>
-        </p:spPr>
-        <p:txBody>
-          <a:bodyPr wrap="square" anchor="t" lIns="0" rIns="0" tIns="0" bIns="0"/>
-          <a:lstStyle/>
-          <a:p>
-            <a:pPr algn="l"/>
-            <a:r>
-              <a:rPr sz="2000" b="0" i="0">
-                <a:solidFill>
-                  <a:srgbClr val="202122"/>
-                </a:solidFill>
-                <a:latin typeface="Calibri"/>
-              </a:rPr>
-              <a:t>Extract and display data.</a:t>
-            </a:r>
-          </a:p>
-        </p:txBody>
-      </p:sp>
-      <p:sp>
-        <p:nvSpPr>
-          <p:cNvPr id="14" name="Rounded Rectangle 13"/>
-          <p:cNvSpPr/>
-          <p:nvPr/>
-        </p:nvSpPr>
-        <p:spPr>
-          <a:xfrm>
-            <a:off x="548640" y="4023360"/>
-            <a:ext cx="5410047" cy="2148840"/>
-          </a:xfrm>
-          <a:prstGeom prst="roundRect">
-            <a:avLst>
-              <a:gd name="adj" fmla="val 6000"/>
-            </a:avLst>
-          </a:prstGeom>
-          <a:solidFill>
-            <a:srgbClr val="EAF3FF"/>
-          </a:solidFill>
-          <a:ln>
-            <a:noFill/>
-          </a:ln>
-          <a:effectLst/>
-        </p:spPr>
-        <p:style>
-          <a:lnRef idx="1">
-            <a:schemeClr val="accent1"/>
-          </a:lnRef>
-          <a:fillRef idx="3">
-            <a:schemeClr val="accent1"/>
-          </a:fillRef>
-          <a:effectRef idx="2">
-            <a:schemeClr val="accent1"/>
-          </a:effectRef>
-          <a:fontRef idx="minor">
-            <a:schemeClr val="lt1"/>
-          </a:fontRef>
-        </p:style>
-        <p:txBody>
-          <a:bodyPr rtlCol="0" anchor="ctr"/>
-          <a:lstStyle/>
-          <a:p/>
-        </p:txBody>
-      </p:sp>
-      <p:sp>
-        <p:nvSpPr>
-          <p:cNvPr id="15" name="Oval 14"/>
-          <p:cNvSpPr/>
-          <p:nvPr/>
-        </p:nvSpPr>
-        <p:spPr>
-          <a:xfrm>
-            <a:off x="777240" y="4251960"/>
-            <a:ext cx="457200" cy="457200"/>
-          </a:xfrm>
-          <a:prstGeom prst="ellipse">
-            <a:avLst/>
-          </a:prstGeom>
-          <a:solidFill>
-            <a:srgbClr val="33C17A"/>
-          </a:solidFill>
-          <a:ln>
-            <a:noFill/>
-          </a:ln>
-          <a:effectLst/>
-        </p:spPr>
-        <p:style>
-          <a:lnRef idx="1">
-            <a:schemeClr val="accent1"/>
-          </a:lnRef>
-          <a:fillRef idx="3">
-            <a:schemeClr val="accent1"/>
-          </a:fillRef>
-          <a:effectRef idx="2">
-            <a:schemeClr val="accent1"/>
-          </a:effectRef>
-          <a:fontRef idx="minor">
-            <a:schemeClr val="lt1"/>
-          </a:fontRef>
-        </p:style>
-        <p:txBody>
-          <a:bodyPr rtlCol="0" anchor="ctr" lIns="0" rIns="0" tIns="0" bIns="0"/>
-          <a:lstStyle/>
-          <a:p>
-            <a:pPr algn="ctr"/>
-            <a:r>
-              <a:rPr sz="1500" b="1">
-                <a:solidFill>
-                  <a:srgbClr val="202122"/>
-                </a:solidFill>
-                <a:latin typeface="Calibri"/>
-              </a:rPr>
-              <a:t>3</a:t>
-            </a:r>
-          </a:p>
-        </p:txBody>
-      </p:sp>
-      <p:sp>
-        <p:nvSpPr>
-          <p:cNvPr id="16" name="TextBox 15"/>
-          <p:cNvSpPr txBox="1"/>
-          <p:nvPr/>
-        </p:nvSpPr>
-        <p:spPr>
-          <a:xfrm>
-            <a:off x="1371600" y="4224528"/>
-            <a:ext cx="4404207" cy="512064"/>
-          </a:xfrm>
-          <a:prstGeom prst="rect">
-            <a:avLst/>
-          </a:prstGeom>
-          <a:noFill/>
-        </p:spPr>
-        <p:txBody>
-          <a:bodyPr wrap="square" anchor="ctr" lIns="0" rIns="0" tIns="0" bIns="0"/>
-          <a:lstStyle/>
-          <a:p>
-            <a:pPr algn="l"/>
-            <a:r>
-              <a:rPr sz="1900" b="1" i="0">
-                <a:solidFill>
-                  <a:srgbClr val="03306E"/>
-                </a:solidFill>
-                <a:latin typeface="Calibri"/>
-              </a:rPr>
-              <a:t>Update</a:t>
-            </a:r>
-          </a:p>
-        </p:txBody>
-      </p:sp>
-      <p:sp>
-        <p:nvSpPr>
-          <p:cNvPr id="17" name="TextBox 16"/>
-          <p:cNvSpPr txBox="1"/>
-          <p:nvPr/>
-        </p:nvSpPr>
-        <p:spPr>
-          <a:xfrm>
-            <a:off x="777240" y="4892040"/>
-            <a:ext cx="4952847" cy="1143000"/>
-          </a:xfrm>
-          <a:prstGeom prst="rect">
-            <a:avLst/>
-          </a:prstGeom>
-          <a:noFill/>
-        </p:spPr>
-        <p:txBody>
-          <a:bodyPr wrap="square" anchor="t" lIns="0" rIns="0" tIns="0" bIns="0"/>
-          <a:lstStyle/>
-          <a:p>
-            <a:pPr algn="l"/>
-            <a:r>
-              <a:rPr sz="2000" b="0" i="0">
-                <a:solidFill>
-                  <a:srgbClr val="202122"/>
-                </a:solidFill>
-                <a:latin typeface="Calibri"/>
-              </a:rPr>
-              <a:t>Change existing records.</a:t>
-            </a:r>
-          </a:p>
-        </p:txBody>
-      </p:sp>
-      <p:sp>
-        <p:nvSpPr>
-          <p:cNvPr id="18" name="Rounded Rectangle 17"/>
-          <p:cNvSpPr/>
-          <p:nvPr/>
-        </p:nvSpPr>
-        <p:spPr>
-          <a:xfrm>
-            <a:off x="6233007" y="4023360"/>
-            <a:ext cx="5410047" cy="2148840"/>
-          </a:xfrm>
-          <a:prstGeom prst="roundRect">
-            <a:avLst>
-              <a:gd name="adj" fmla="val 6000"/>
-            </a:avLst>
-          </a:prstGeom>
-          <a:solidFill>
-            <a:srgbClr val="EAF3FF"/>
-          </a:solidFill>
-          <a:ln>
-            <a:noFill/>
-          </a:ln>
-          <a:effectLst/>
-        </p:spPr>
-        <p:style>
-          <a:lnRef idx="1">
-            <a:schemeClr val="accent1"/>
-          </a:lnRef>
-          <a:fillRef idx="3">
-            <a:schemeClr val="accent1"/>
-          </a:fillRef>
-          <a:effectRef idx="2">
-            <a:schemeClr val="accent1"/>
-          </a:effectRef>
-          <a:fontRef idx="minor">
-            <a:schemeClr val="lt1"/>
-          </a:fontRef>
-        </p:style>
-        <p:txBody>
-          <a:bodyPr rtlCol="0" anchor="ctr"/>
-          <a:lstStyle/>
-          <a:p/>
-        </p:txBody>
-      </p:sp>
-      <p:sp>
-        <p:nvSpPr>
-          <p:cNvPr id="19" name="Oval 18"/>
-          <p:cNvSpPr/>
-          <p:nvPr/>
-        </p:nvSpPr>
-        <p:spPr>
-          <a:xfrm>
-            <a:off x="6461607" y="4251960"/>
-            <a:ext cx="457200" cy="457200"/>
-          </a:xfrm>
-          <a:prstGeom prst="ellipse">
-            <a:avLst/>
-          </a:prstGeom>
-          <a:solidFill>
-            <a:srgbClr val="33C17A"/>
-          </a:solidFill>
-          <a:ln>
-            <a:noFill/>
-          </a:ln>
-          <a:effectLst/>
-        </p:spPr>
-        <p:style>
-          <a:lnRef idx="1">
-            <a:schemeClr val="accent1"/>
-          </a:lnRef>
-          <a:fillRef idx="3">
-            <a:schemeClr val="accent1"/>
-          </a:fillRef>
-          <a:effectRef idx="2">
-            <a:schemeClr val="accent1"/>
-          </a:effectRef>
-          <a:fontRef idx="minor">
-            <a:schemeClr val="lt1"/>
-          </a:fontRef>
-        </p:style>
-        <p:txBody>
-          <a:bodyPr rtlCol="0" anchor="ctr" lIns="0" rIns="0" tIns="0" bIns="0"/>
-          <a:lstStyle/>
-          <a:p>
-            <a:pPr algn="ctr"/>
-            <a:r>
-              <a:rPr sz="1500" b="1">
-                <a:solidFill>
-                  <a:srgbClr val="202122"/>
-                </a:solidFill>
-                <a:latin typeface="Calibri"/>
-              </a:rPr>
-              <a:t>4</a:t>
-            </a:r>
-          </a:p>
-        </p:txBody>
-      </p:sp>
-      <p:sp>
-        <p:nvSpPr>
-          <p:cNvPr id="20" name="TextBox 19"/>
-          <p:cNvSpPr txBox="1"/>
-          <p:nvPr/>
-        </p:nvSpPr>
-        <p:spPr>
-          <a:xfrm>
-            <a:off x="7055967" y="4224528"/>
-            <a:ext cx="4404207" cy="512064"/>
-          </a:xfrm>
-          <a:prstGeom prst="rect">
-            <a:avLst/>
-          </a:prstGeom>
-          <a:noFill/>
-        </p:spPr>
-        <p:txBody>
-          <a:bodyPr wrap="square" anchor="ctr" lIns="0" rIns="0" tIns="0" bIns="0"/>
-          <a:lstStyle/>
-          <a:p>
-            <a:pPr algn="l"/>
-            <a:r>
-              <a:rPr sz="1900" b="1" i="0">
-                <a:solidFill>
-                  <a:srgbClr val="03306E"/>
-                </a:solidFill>
-                <a:latin typeface="Calibri"/>
-              </a:rPr>
-              <a:t>Delete</a:t>
-            </a:r>
-          </a:p>
-        </p:txBody>
-      </p:sp>
-      <p:sp>
-        <p:nvSpPr>
-          <p:cNvPr id="21" name="TextBox 20"/>
-          <p:cNvSpPr txBox="1"/>
-          <p:nvPr/>
-        </p:nvSpPr>
-        <p:spPr>
-          <a:xfrm>
-            <a:off x="6461607" y="4892040"/>
-            <a:ext cx="4952847" cy="1143000"/>
-          </a:xfrm>
-          <a:prstGeom prst="rect">
-            <a:avLst/>
-          </a:prstGeom>
-          <a:noFill/>
-        </p:spPr>
-        <p:txBody>
-          <a:bodyPr wrap="square" anchor="t" lIns="0" rIns="0" tIns="0" bIns="0"/>
-          <a:lstStyle/>
-          <a:p>
-            <a:pPr algn="l"/>
-            <a:r>
-              <a:rPr sz="2000" b="0" i="0">
-                <a:solidFill>
-                  <a:srgbClr val="202122"/>
-                </a:solidFill>
-                <a:latin typeface="Calibri"/>
-              </a:rPr>
-              <a:t>Remove records safely.</a:t>
-            </a:r>
-          </a:p>
-        </p:txBody>
-      </p:sp>
-    </p:spTree>
-  </p:cSld>
-  <p:clrMapOvr>
-    <a:masterClrMapping/>
-  </p:clrMapOvr>
-</p:sld>
-</file>
-
 <file path=ppt/slides/slide5.xml><?xml version="1.0" encoding="utf-8"?>
 <p:sld xmlns:a="http://schemas.openxmlformats.org/drawingml/2006/main" xmlns:p="http://schemas.openxmlformats.org/presentationml/2006/main" xmlns:r="http://schemas.openxmlformats.org/officeDocument/2006/relationships">
   <p:cSld>
@@ -5824,7 +7945,7 @@
                 </a:solidFill>
                 <a:latin typeface="Cambria"/>
               </a:rPr>
-              <a:t>Deployment methods</a:t>
+              <a:t>Quick check: Connecting to data</a:t>
             </a:r>
           </a:p>
         </p:txBody>
@@ -5891,6 +8012,1673 @@
                 <a:latin typeface="Calibri"/>
               </a:rPr>
               <a:t>5</a:t>
+            </a:r>
+          </a:p>
+        </p:txBody>
+      </p:sp>
+      <p:sp>
+        <p:nvSpPr>
+          <p:cNvPr id="6" name="Oval 5"/>
+          <p:cNvSpPr/>
+          <p:nvPr/>
+        </p:nvSpPr>
+        <p:spPr>
+          <a:xfrm>
+            <a:off x="548640" y="1691640"/>
+            <a:ext cx="502920" cy="502920"/>
+          </a:xfrm>
+          <a:prstGeom prst="ellipse">
+            <a:avLst/>
+          </a:prstGeom>
+          <a:solidFill>
+            <a:srgbClr val="33C17A"/>
+          </a:solidFill>
+          <a:ln>
+            <a:noFill/>
+          </a:ln>
+          <a:effectLst/>
+        </p:spPr>
+        <p:style>
+          <a:lnRef idx="1">
+            <a:schemeClr val="accent1"/>
+          </a:lnRef>
+          <a:fillRef idx="3">
+            <a:schemeClr val="accent1"/>
+          </a:fillRef>
+          <a:effectRef idx="2">
+            <a:schemeClr val="accent1"/>
+          </a:effectRef>
+          <a:fontRef idx="minor">
+            <a:schemeClr val="lt1"/>
+          </a:fontRef>
+        </p:style>
+        <p:txBody>
+          <a:bodyPr rtlCol="0" anchor="ctr" lIns="0" rIns="0" tIns="0" bIns="0"/>
+          <a:lstStyle/>
+          <a:p>
+            <a:pPr algn="ctr"/>
+            <a:r>
+              <a:rPr sz="1600" b="1">
+                <a:solidFill>
+                  <a:srgbClr val="202122"/>
+                </a:solidFill>
+                <a:latin typeface="Calibri"/>
+              </a:rPr>
+              <a:t>1</a:t>
+            </a:r>
+          </a:p>
+        </p:txBody>
+      </p:sp>
+      <p:sp>
+        <p:nvSpPr>
+          <p:cNvPr id="7" name="TextBox 6"/>
+          <p:cNvSpPr txBox="1"/>
+          <p:nvPr/>
+        </p:nvSpPr>
+        <p:spPr>
+          <a:xfrm>
+            <a:off x="1371600" y="1645920"/>
+            <a:ext cx="10271455" cy="1188720"/>
+          </a:xfrm>
+          <a:prstGeom prst="rect">
+            <a:avLst/>
+          </a:prstGeom>
+          <a:noFill/>
+        </p:spPr>
+        <p:txBody>
+          <a:bodyPr wrap="square" anchor="t" lIns="0" rIns="0" tIns="0" bIns="0"/>
+          <a:lstStyle/>
+          <a:p>
+            <a:pPr algn="l"/>
+            <a:r>
+              <a:rPr sz="2400" b="0" i="0">
+                <a:solidFill>
+                  <a:srgbClr val="202122"/>
+                </a:solidFill>
+                <a:latin typeface="Calibri"/>
+              </a:rPr>
+              <a:t>What is an API endpoint?</a:t>
+            </a:r>
+          </a:p>
+        </p:txBody>
+      </p:sp>
+      <p:sp>
+        <p:nvSpPr>
+          <p:cNvPr id="8" name="Oval 7"/>
+          <p:cNvSpPr/>
+          <p:nvPr/>
+        </p:nvSpPr>
+        <p:spPr>
+          <a:xfrm>
+            <a:off x="548640" y="3108960"/>
+            <a:ext cx="502920" cy="502920"/>
+          </a:xfrm>
+          <a:prstGeom prst="ellipse">
+            <a:avLst/>
+          </a:prstGeom>
+          <a:solidFill>
+            <a:srgbClr val="33C17A"/>
+          </a:solidFill>
+          <a:ln>
+            <a:noFill/>
+          </a:ln>
+          <a:effectLst/>
+        </p:spPr>
+        <p:style>
+          <a:lnRef idx="1">
+            <a:schemeClr val="accent1"/>
+          </a:lnRef>
+          <a:fillRef idx="3">
+            <a:schemeClr val="accent1"/>
+          </a:fillRef>
+          <a:effectRef idx="2">
+            <a:schemeClr val="accent1"/>
+          </a:effectRef>
+          <a:fontRef idx="minor">
+            <a:schemeClr val="lt1"/>
+          </a:fontRef>
+        </p:style>
+        <p:txBody>
+          <a:bodyPr rtlCol="0" anchor="ctr" lIns="0" rIns="0" tIns="0" bIns="0"/>
+          <a:lstStyle/>
+          <a:p>
+            <a:pPr algn="ctr"/>
+            <a:r>
+              <a:rPr sz="1600" b="1">
+                <a:solidFill>
+                  <a:srgbClr val="202122"/>
+                </a:solidFill>
+                <a:latin typeface="Calibri"/>
+              </a:rPr>
+              <a:t>2</a:t>
+            </a:r>
+          </a:p>
+        </p:txBody>
+      </p:sp>
+      <p:sp>
+        <p:nvSpPr>
+          <p:cNvPr id="9" name="TextBox 8"/>
+          <p:cNvSpPr txBox="1"/>
+          <p:nvPr/>
+        </p:nvSpPr>
+        <p:spPr>
+          <a:xfrm>
+            <a:off x="1371600" y="3063240"/>
+            <a:ext cx="10271455" cy="1188720"/>
+          </a:xfrm>
+          <a:prstGeom prst="rect">
+            <a:avLst/>
+          </a:prstGeom>
+          <a:noFill/>
+        </p:spPr>
+        <p:txBody>
+          <a:bodyPr wrap="square" anchor="t" lIns="0" rIns="0" tIns="0" bIns="0"/>
+          <a:lstStyle/>
+          <a:p>
+            <a:pPr algn="l"/>
+            <a:r>
+              <a:rPr sz="2400" b="0" i="0">
+                <a:solidFill>
+                  <a:srgbClr val="202122"/>
+                </a:solidFill>
+                <a:latin typeface="Calibri"/>
+              </a:rPr>
+              <a:t>What does a prepared statement protect against?</a:t>
+            </a:r>
+          </a:p>
+        </p:txBody>
+      </p:sp>
+      <p:sp>
+        <p:nvSpPr>
+          <p:cNvPr id="10" name="Oval 9"/>
+          <p:cNvSpPr/>
+          <p:nvPr/>
+        </p:nvSpPr>
+        <p:spPr>
+          <a:xfrm>
+            <a:off x="548640" y="4526280"/>
+            <a:ext cx="502920" cy="502920"/>
+          </a:xfrm>
+          <a:prstGeom prst="ellipse">
+            <a:avLst/>
+          </a:prstGeom>
+          <a:solidFill>
+            <a:srgbClr val="33C17A"/>
+          </a:solidFill>
+          <a:ln>
+            <a:noFill/>
+          </a:ln>
+          <a:effectLst/>
+        </p:spPr>
+        <p:style>
+          <a:lnRef idx="1">
+            <a:schemeClr val="accent1"/>
+          </a:lnRef>
+          <a:fillRef idx="3">
+            <a:schemeClr val="accent1"/>
+          </a:fillRef>
+          <a:effectRef idx="2">
+            <a:schemeClr val="accent1"/>
+          </a:effectRef>
+          <a:fontRef idx="minor">
+            <a:schemeClr val="lt1"/>
+          </a:fontRef>
+        </p:style>
+        <p:txBody>
+          <a:bodyPr rtlCol="0" anchor="ctr" lIns="0" rIns="0" tIns="0" bIns="0"/>
+          <a:lstStyle/>
+          <a:p>
+            <a:pPr algn="ctr"/>
+            <a:r>
+              <a:rPr sz="1600" b="1">
+                <a:solidFill>
+                  <a:srgbClr val="202122"/>
+                </a:solidFill>
+                <a:latin typeface="Calibri"/>
+              </a:rPr>
+              <a:t>3</a:t>
+            </a:r>
+          </a:p>
+        </p:txBody>
+      </p:sp>
+      <p:sp>
+        <p:nvSpPr>
+          <p:cNvPr id="11" name="TextBox 10"/>
+          <p:cNvSpPr txBox="1"/>
+          <p:nvPr/>
+        </p:nvSpPr>
+        <p:spPr>
+          <a:xfrm>
+            <a:off x="1371600" y="4480560"/>
+            <a:ext cx="10271455" cy="1188720"/>
+          </a:xfrm>
+          <a:prstGeom prst="rect">
+            <a:avLst/>
+          </a:prstGeom>
+          <a:noFill/>
+        </p:spPr>
+        <p:txBody>
+          <a:bodyPr wrap="square" anchor="t" lIns="0" rIns="0" tIns="0" bIns="0"/>
+          <a:lstStyle/>
+          <a:p>
+            <a:pPr algn="l"/>
+            <a:r>
+              <a:rPr sz="2400" b="0" i="0">
+                <a:solidFill>
+                  <a:srgbClr val="202122"/>
+                </a:solidFill>
+                <a:latin typeface="Calibri"/>
+              </a:rPr>
+              <a:t>What format do most APIs return?</a:t>
+            </a:r>
+          </a:p>
+        </p:txBody>
+      </p:sp>
+      <p:sp>
+        <p:nvSpPr>
+          <p:cNvPr id="12" name="TextBox 11"/>
+          <p:cNvSpPr txBox="1"/>
+          <p:nvPr/>
+        </p:nvSpPr>
+        <p:spPr>
+          <a:xfrm>
+            <a:off x="548640" y="5852160"/>
+            <a:ext cx="11094415" cy="365760"/>
+          </a:xfrm>
+          <a:prstGeom prst="rect">
+            <a:avLst/>
+          </a:prstGeom>
+          <a:noFill/>
+        </p:spPr>
+        <p:txBody>
+          <a:bodyPr wrap="square" anchor="t" lIns="0" rIns="0" tIns="0" bIns="0"/>
+          <a:lstStyle/>
+          <a:p>
+            <a:pPr algn="l"/>
+            <a:r>
+              <a:rPr sz="1300" b="0" i="1">
+                <a:solidFill>
+                  <a:srgbClr val="54595D"/>
+                </a:solidFill>
+                <a:latin typeface="Calibri"/>
+              </a:rPr>
+              <a:t>Answer on mini whiteboards or in your book. Answers are in the speaker notes.</a:t>
+            </a:r>
+          </a:p>
+        </p:txBody>
+      </p:sp>
+    </p:spTree>
+  </p:cSld>
+  <p:clrMapOvr>
+    <a:masterClrMapping/>
+  </p:clrMapOvr>
+</p:sld>
+</file>
+
+<file path=ppt/slides/slide6.xml><?xml version="1.0" encoding="utf-8"?>
+<p:sld xmlns:a="http://schemas.openxmlformats.org/drawingml/2006/main" xmlns:p="http://schemas.openxmlformats.org/presentationml/2006/main" xmlns:r="http://schemas.openxmlformats.org/officeDocument/2006/relationships">
+  <p:cSld>
+    <p:bg>
+      <p:bgPr>
+        <a:solidFill>
+          <a:srgbClr val="FFFFFF"/>
+        </a:solidFill>
+        <a:effectLst/>
+      </p:bgPr>
+    </p:bg>
+    <p:spTree>
+      <p:nvGrpSpPr>
+        <p:cNvPr id="1" name=""/>
+        <p:cNvGrpSpPr/>
+        <p:nvPr/>
+      </p:nvGrpSpPr>
+      <p:grpSpPr/>
+      <p:sp>
+        <p:nvSpPr>
+          <p:cNvPr id="2" name="TextBox 1"/>
+          <p:cNvSpPr txBox="1"/>
+          <p:nvPr/>
+        </p:nvSpPr>
+        <p:spPr>
+          <a:xfrm>
+            <a:off x="548640" y="320040"/>
+            <a:ext cx="11094415" cy="274320"/>
+          </a:xfrm>
+          <a:prstGeom prst="rect">
+            <a:avLst/>
+          </a:prstGeom>
+          <a:noFill/>
+        </p:spPr>
+        <p:txBody>
+          <a:bodyPr wrap="square" anchor="t" lIns="0" rIns="0" tIns="0" bIns="0"/>
+          <a:lstStyle/>
+          <a:p>
+            <a:pPr algn="l"/>
+            <a:r>
+              <a:rPr sz="1100" b="1" i="0">
+                <a:solidFill>
+                  <a:srgbClr val="54595D"/>
+                </a:solidFill>
+                <a:latin typeface="Calibri"/>
+              </a:rPr>
+              <a:t>OCCUPATIONAL SPECIALISM  ·  Specialism Content Area 6</a:t>
+            </a:r>
+          </a:p>
+        </p:txBody>
+      </p:sp>
+      <p:sp>
+        <p:nvSpPr>
+          <p:cNvPr id="3" name="TextBox 2"/>
+          <p:cNvSpPr txBox="1"/>
+          <p:nvPr/>
+        </p:nvSpPr>
+        <p:spPr>
+          <a:xfrm>
+            <a:off x="548640" y="566928"/>
+            <a:ext cx="11094415" cy="822960"/>
+          </a:xfrm>
+          <a:prstGeom prst="rect">
+            <a:avLst/>
+          </a:prstGeom>
+          <a:noFill/>
+        </p:spPr>
+        <p:txBody>
+          <a:bodyPr wrap="square" anchor="ctr" lIns="0" rIns="0" tIns="0" bIns="0"/>
+          <a:lstStyle/>
+          <a:p>
+            <a:pPr algn="l"/>
+            <a:r>
+              <a:rPr sz="3200" b="1" i="0">
+                <a:solidFill>
+                  <a:srgbClr val="03306E"/>
+                </a:solidFill>
+                <a:latin typeface="Cambria"/>
+              </a:rPr>
+              <a:t>Working with data</a:t>
+            </a:r>
+          </a:p>
+        </p:txBody>
+      </p:sp>
+      <p:sp>
+        <p:nvSpPr>
+          <p:cNvPr id="4" name="TextBox 3"/>
+          <p:cNvSpPr txBox="1"/>
+          <p:nvPr/>
+        </p:nvSpPr>
+        <p:spPr>
+          <a:xfrm>
+            <a:off x="548640" y="6446520"/>
+            <a:ext cx="8229600" cy="274320"/>
+          </a:xfrm>
+          <a:prstGeom prst="rect">
+            <a:avLst/>
+          </a:prstGeom>
+          <a:noFill/>
+        </p:spPr>
+        <p:txBody>
+          <a:bodyPr wrap="square" anchor="t" lIns="0" rIns="0" tIns="0" bIns="0"/>
+          <a:lstStyle/>
+          <a:p>
+            <a:pPr algn="l"/>
+            <a:r>
+              <a:rPr sz="1000" b="0" i="0">
+                <a:solidFill>
+                  <a:srgbClr val="54595D"/>
+                </a:solidFill>
+                <a:latin typeface="Calibri"/>
+              </a:rPr>
+              <a:t>Digital Software Development T Level  ·  Connecting to Data and Deploying Software</a:t>
+            </a:r>
+          </a:p>
+        </p:txBody>
+      </p:sp>
+      <p:sp>
+        <p:nvSpPr>
+          <p:cNvPr id="5" name="TextBox 4"/>
+          <p:cNvSpPr txBox="1"/>
+          <p:nvPr/>
+        </p:nvSpPr>
+        <p:spPr>
+          <a:xfrm>
+            <a:off x="10728655" y="6446520"/>
+            <a:ext cx="914400" cy="274320"/>
+          </a:xfrm>
+          <a:prstGeom prst="rect">
+            <a:avLst/>
+          </a:prstGeom>
+          <a:noFill/>
+        </p:spPr>
+        <p:txBody>
+          <a:bodyPr wrap="square" anchor="t" lIns="0" rIns="0" tIns="0" bIns="0"/>
+          <a:lstStyle/>
+          <a:p>
+            <a:pPr algn="r"/>
+            <a:r>
+              <a:rPr sz="1000" b="0" i="0">
+                <a:solidFill>
+                  <a:srgbClr val="54595D"/>
+                </a:solidFill>
+                <a:latin typeface="Calibri"/>
+              </a:rPr>
+              <a:t>6</a:t>
+            </a:r>
+          </a:p>
+        </p:txBody>
+      </p:sp>
+      <p:sp>
+        <p:nvSpPr>
+          <p:cNvPr id="6" name="Rounded Rectangle 5"/>
+          <p:cNvSpPr/>
+          <p:nvPr/>
+        </p:nvSpPr>
+        <p:spPr>
+          <a:xfrm>
+            <a:off x="548640" y="1600200"/>
+            <a:ext cx="5410047" cy="2148840"/>
+          </a:xfrm>
+          <a:prstGeom prst="roundRect">
+            <a:avLst>
+              <a:gd name="adj" fmla="val 6000"/>
+            </a:avLst>
+          </a:prstGeom>
+          <a:solidFill>
+            <a:srgbClr val="EAF3FF"/>
+          </a:solidFill>
+          <a:ln>
+            <a:noFill/>
+          </a:ln>
+          <a:effectLst/>
+        </p:spPr>
+        <p:style>
+          <a:lnRef idx="1">
+            <a:schemeClr val="accent1"/>
+          </a:lnRef>
+          <a:fillRef idx="3">
+            <a:schemeClr val="accent1"/>
+          </a:fillRef>
+          <a:effectRef idx="2">
+            <a:schemeClr val="accent1"/>
+          </a:effectRef>
+          <a:fontRef idx="minor">
+            <a:schemeClr val="lt1"/>
+          </a:fontRef>
+        </p:style>
+        <p:txBody>
+          <a:bodyPr rtlCol="0" anchor="ctr"/>
+          <a:lstStyle/>
+          <a:p/>
+        </p:txBody>
+      </p:sp>
+      <p:sp>
+        <p:nvSpPr>
+          <p:cNvPr id="7" name="Oval 6"/>
+          <p:cNvSpPr/>
+          <p:nvPr/>
+        </p:nvSpPr>
+        <p:spPr>
+          <a:xfrm>
+            <a:off x="777240" y="1828800"/>
+            <a:ext cx="457200" cy="457200"/>
+          </a:xfrm>
+          <a:prstGeom prst="ellipse">
+            <a:avLst/>
+          </a:prstGeom>
+          <a:solidFill>
+            <a:srgbClr val="33C17A"/>
+          </a:solidFill>
+          <a:ln>
+            <a:noFill/>
+          </a:ln>
+          <a:effectLst/>
+        </p:spPr>
+        <p:style>
+          <a:lnRef idx="1">
+            <a:schemeClr val="accent1"/>
+          </a:lnRef>
+          <a:fillRef idx="3">
+            <a:schemeClr val="accent1"/>
+          </a:fillRef>
+          <a:effectRef idx="2">
+            <a:schemeClr val="accent1"/>
+          </a:effectRef>
+          <a:fontRef idx="minor">
+            <a:schemeClr val="lt1"/>
+          </a:fontRef>
+        </p:style>
+        <p:txBody>
+          <a:bodyPr rtlCol="0" anchor="ctr" lIns="0" rIns="0" tIns="0" bIns="0"/>
+          <a:lstStyle/>
+          <a:p>
+            <a:pPr algn="ctr"/>
+            <a:r>
+              <a:rPr sz="1500" b="1">
+                <a:solidFill>
+                  <a:srgbClr val="202122"/>
+                </a:solidFill>
+                <a:latin typeface="Calibri"/>
+              </a:rPr>
+              <a:t>1</a:t>
+            </a:r>
+          </a:p>
+        </p:txBody>
+      </p:sp>
+      <p:sp>
+        <p:nvSpPr>
+          <p:cNvPr id="8" name="TextBox 7"/>
+          <p:cNvSpPr txBox="1"/>
+          <p:nvPr/>
+        </p:nvSpPr>
+        <p:spPr>
+          <a:xfrm>
+            <a:off x="1371600" y="1801368"/>
+            <a:ext cx="4404207" cy="512064"/>
+          </a:xfrm>
+          <a:prstGeom prst="rect">
+            <a:avLst/>
+          </a:prstGeom>
+          <a:noFill/>
+        </p:spPr>
+        <p:txBody>
+          <a:bodyPr wrap="square" anchor="ctr" lIns="0" rIns="0" tIns="0" bIns="0"/>
+          <a:lstStyle/>
+          <a:p>
+            <a:pPr algn="l"/>
+            <a:r>
+              <a:rPr sz="1900" b="1" i="0">
+                <a:solidFill>
+                  <a:srgbClr val="03306E"/>
+                </a:solidFill>
+                <a:latin typeface="Calibri"/>
+              </a:rPr>
+              <a:t>Create</a:t>
+            </a:r>
+          </a:p>
+        </p:txBody>
+      </p:sp>
+      <p:sp>
+        <p:nvSpPr>
+          <p:cNvPr id="9" name="TextBox 8"/>
+          <p:cNvSpPr txBox="1"/>
+          <p:nvPr/>
+        </p:nvSpPr>
+        <p:spPr>
+          <a:xfrm>
+            <a:off x="777240" y="2468880"/>
+            <a:ext cx="4952847" cy="1143000"/>
+          </a:xfrm>
+          <a:prstGeom prst="rect">
+            <a:avLst/>
+          </a:prstGeom>
+          <a:noFill/>
+        </p:spPr>
+        <p:txBody>
+          <a:bodyPr wrap="square" anchor="t" lIns="0" rIns="0" tIns="0" bIns="0"/>
+          <a:lstStyle/>
+          <a:p>
+            <a:pPr algn="l"/>
+            <a:r>
+              <a:rPr sz="2000" b="0" i="0">
+                <a:solidFill>
+                  <a:srgbClr val="202122"/>
+                </a:solidFill>
+                <a:latin typeface="Calibri"/>
+              </a:rPr>
+              <a:t>Store new records.</a:t>
+            </a:r>
+          </a:p>
+        </p:txBody>
+      </p:sp>
+      <p:sp>
+        <p:nvSpPr>
+          <p:cNvPr id="10" name="Rounded Rectangle 9"/>
+          <p:cNvSpPr/>
+          <p:nvPr/>
+        </p:nvSpPr>
+        <p:spPr>
+          <a:xfrm>
+            <a:off x="6233007" y="1600200"/>
+            <a:ext cx="5410047" cy="2148840"/>
+          </a:xfrm>
+          <a:prstGeom prst="roundRect">
+            <a:avLst>
+              <a:gd name="adj" fmla="val 6000"/>
+            </a:avLst>
+          </a:prstGeom>
+          <a:solidFill>
+            <a:srgbClr val="EAF3FF"/>
+          </a:solidFill>
+          <a:ln>
+            <a:noFill/>
+          </a:ln>
+          <a:effectLst/>
+        </p:spPr>
+        <p:style>
+          <a:lnRef idx="1">
+            <a:schemeClr val="accent1"/>
+          </a:lnRef>
+          <a:fillRef idx="3">
+            <a:schemeClr val="accent1"/>
+          </a:fillRef>
+          <a:effectRef idx="2">
+            <a:schemeClr val="accent1"/>
+          </a:effectRef>
+          <a:fontRef idx="minor">
+            <a:schemeClr val="lt1"/>
+          </a:fontRef>
+        </p:style>
+        <p:txBody>
+          <a:bodyPr rtlCol="0" anchor="ctr"/>
+          <a:lstStyle/>
+          <a:p/>
+        </p:txBody>
+      </p:sp>
+      <p:sp>
+        <p:nvSpPr>
+          <p:cNvPr id="11" name="Oval 10"/>
+          <p:cNvSpPr/>
+          <p:nvPr/>
+        </p:nvSpPr>
+        <p:spPr>
+          <a:xfrm>
+            <a:off x="6461607" y="1828800"/>
+            <a:ext cx="457200" cy="457200"/>
+          </a:xfrm>
+          <a:prstGeom prst="ellipse">
+            <a:avLst/>
+          </a:prstGeom>
+          <a:solidFill>
+            <a:srgbClr val="33C17A"/>
+          </a:solidFill>
+          <a:ln>
+            <a:noFill/>
+          </a:ln>
+          <a:effectLst/>
+        </p:spPr>
+        <p:style>
+          <a:lnRef idx="1">
+            <a:schemeClr val="accent1"/>
+          </a:lnRef>
+          <a:fillRef idx="3">
+            <a:schemeClr val="accent1"/>
+          </a:fillRef>
+          <a:effectRef idx="2">
+            <a:schemeClr val="accent1"/>
+          </a:effectRef>
+          <a:fontRef idx="minor">
+            <a:schemeClr val="lt1"/>
+          </a:fontRef>
+        </p:style>
+        <p:txBody>
+          <a:bodyPr rtlCol="0" anchor="ctr" lIns="0" rIns="0" tIns="0" bIns="0"/>
+          <a:lstStyle/>
+          <a:p>
+            <a:pPr algn="ctr"/>
+            <a:r>
+              <a:rPr sz="1500" b="1">
+                <a:solidFill>
+                  <a:srgbClr val="202122"/>
+                </a:solidFill>
+                <a:latin typeface="Calibri"/>
+              </a:rPr>
+              <a:t>2</a:t>
+            </a:r>
+          </a:p>
+        </p:txBody>
+      </p:sp>
+      <p:sp>
+        <p:nvSpPr>
+          <p:cNvPr id="12" name="TextBox 11"/>
+          <p:cNvSpPr txBox="1"/>
+          <p:nvPr/>
+        </p:nvSpPr>
+        <p:spPr>
+          <a:xfrm>
+            <a:off x="7055967" y="1801368"/>
+            <a:ext cx="4404207" cy="512064"/>
+          </a:xfrm>
+          <a:prstGeom prst="rect">
+            <a:avLst/>
+          </a:prstGeom>
+          <a:noFill/>
+        </p:spPr>
+        <p:txBody>
+          <a:bodyPr wrap="square" anchor="ctr" lIns="0" rIns="0" tIns="0" bIns="0"/>
+          <a:lstStyle/>
+          <a:p>
+            <a:pPr algn="l"/>
+            <a:r>
+              <a:rPr sz="1900" b="1" i="0">
+                <a:solidFill>
+                  <a:srgbClr val="03306E"/>
+                </a:solidFill>
+                <a:latin typeface="Calibri"/>
+              </a:rPr>
+              <a:t>Read</a:t>
+            </a:r>
+          </a:p>
+        </p:txBody>
+      </p:sp>
+      <p:sp>
+        <p:nvSpPr>
+          <p:cNvPr id="13" name="TextBox 12"/>
+          <p:cNvSpPr txBox="1"/>
+          <p:nvPr/>
+        </p:nvSpPr>
+        <p:spPr>
+          <a:xfrm>
+            <a:off x="6461607" y="2468880"/>
+            <a:ext cx="4952847" cy="1143000"/>
+          </a:xfrm>
+          <a:prstGeom prst="rect">
+            <a:avLst/>
+          </a:prstGeom>
+          <a:noFill/>
+        </p:spPr>
+        <p:txBody>
+          <a:bodyPr wrap="square" anchor="t" lIns="0" rIns="0" tIns="0" bIns="0"/>
+          <a:lstStyle/>
+          <a:p>
+            <a:pPr algn="l"/>
+            <a:r>
+              <a:rPr sz="2000" b="0" i="0">
+                <a:solidFill>
+                  <a:srgbClr val="202122"/>
+                </a:solidFill>
+                <a:latin typeface="Calibri"/>
+              </a:rPr>
+              <a:t>Extract and display data.</a:t>
+            </a:r>
+          </a:p>
+        </p:txBody>
+      </p:sp>
+      <p:sp>
+        <p:nvSpPr>
+          <p:cNvPr id="14" name="Rounded Rectangle 13"/>
+          <p:cNvSpPr/>
+          <p:nvPr/>
+        </p:nvSpPr>
+        <p:spPr>
+          <a:xfrm>
+            <a:off x="548640" y="4023360"/>
+            <a:ext cx="5410047" cy="2148840"/>
+          </a:xfrm>
+          <a:prstGeom prst="roundRect">
+            <a:avLst>
+              <a:gd name="adj" fmla="val 6000"/>
+            </a:avLst>
+          </a:prstGeom>
+          <a:solidFill>
+            <a:srgbClr val="EAF3FF"/>
+          </a:solidFill>
+          <a:ln>
+            <a:noFill/>
+          </a:ln>
+          <a:effectLst/>
+        </p:spPr>
+        <p:style>
+          <a:lnRef idx="1">
+            <a:schemeClr val="accent1"/>
+          </a:lnRef>
+          <a:fillRef idx="3">
+            <a:schemeClr val="accent1"/>
+          </a:fillRef>
+          <a:effectRef idx="2">
+            <a:schemeClr val="accent1"/>
+          </a:effectRef>
+          <a:fontRef idx="minor">
+            <a:schemeClr val="lt1"/>
+          </a:fontRef>
+        </p:style>
+        <p:txBody>
+          <a:bodyPr rtlCol="0" anchor="ctr"/>
+          <a:lstStyle/>
+          <a:p/>
+        </p:txBody>
+      </p:sp>
+      <p:sp>
+        <p:nvSpPr>
+          <p:cNvPr id="15" name="Oval 14"/>
+          <p:cNvSpPr/>
+          <p:nvPr/>
+        </p:nvSpPr>
+        <p:spPr>
+          <a:xfrm>
+            <a:off x="777240" y="4251960"/>
+            <a:ext cx="457200" cy="457200"/>
+          </a:xfrm>
+          <a:prstGeom prst="ellipse">
+            <a:avLst/>
+          </a:prstGeom>
+          <a:solidFill>
+            <a:srgbClr val="33C17A"/>
+          </a:solidFill>
+          <a:ln>
+            <a:noFill/>
+          </a:ln>
+          <a:effectLst/>
+        </p:spPr>
+        <p:style>
+          <a:lnRef idx="1">
+            <a:schemeClr val="accent1"/>
+          </a:lnRef>
+          <a:fillRef idx="3">
+            <a:schemeClr val="accent1"/>
+          </a:fillRef>
+          <a:effectRef idx="2">
+            <a:schemeClr val="accent1"/>
+          </a:effectRef>
+          <a:fontRef idx="minor">
+            <a:schemeClr val="lt1"/>
+          </a:fontRef>
+        </p:style>
+        <p:txBody>
+          <a:bodyPr rtlCol="0" anchor="ctr" lIns="0" rIns="0" tIns="0" bIns="0"/>
+          <a:lstStyle/>
+          <a:p>
+            <a:pPr algn="ctr"/>
+            <a:r>
+              <a:rPr sz="1500" b="1">
+                <a:solidFill>
+                  <a:srgbClr val="202122"/>
+                </a:solidFill>
+                <a:latin typeface="Calibri"/>
+              </a:rPr>
+              <a:t>3</a:t>
+            </a:r>
+          </a:p>
+        </p:txBody>
+      </p:sp>
+      <p:sp>
+        <p:nvSpPr>
+          <p:cNvPr id="16" name="TextBox 15"/>
+          <p:cNvSpPr txBox="1"/>
+          <p:nvPr/>
+        </p:nvSpPr>
+        <p:spPr>
+          <a:xfrm>
+            <a:off x="1371600" y="4224528"/>
+            <a:ext cx="4404207" cy="512064"/>
+          </a:xfrm>
+          <a:prstGeom prst="rect">
+            <a:avLst/>
+          </a:prstGeom>
+          <a:noFill/>
+        </p:spPr>
+        <p:txBody>
+          <a:bodyPr wrap="square" anchor="ctr" lIns="0" rIns="0" tIns="0" bIns="0"/>
+          <a:lstStyle/>
+          <a:p>
+            <a:pPr algn="l"/>
+            <a:r>
+              <a:rPr sz="1900" b="1" i="0">
+                <a:solidFill>
+                  <a:srgbClr val="03306E"/>
+                </a:solidFill>
+                <a:latin typeface="Calibri"/>
+              </a:rPr>
+              <a:t>Update</a:t>
+            </a:r>
+          </a:p>
+        </p:txBody>
+      </p:sp>
+      <p:sp>
+        <p:nvSpPr>
+          <p:cNvPr id="17" name="TextBox 16"/>
+          <p:cNvSpPr txBox="1"/>
+          <p:nvPr/>
+        </p:nvSpPr>
+        <p:spPr>
+          <a:xfrm>
+            <a:off x="777240" y="4892040"/>
+            <a:ext cx="4952847" cy="1143000"/>
+          </a:xfrm>
+          <a:prstGeom prst="rect">
+            <a:avLst/>
+          </a:prstGeom>
+          <a:noFill/>
+        </p:spPr>
+        <p:txBody>
+          <a:bodyPr wrap="square" anchor="t" lIns="0" rIns="0" tIns="0" bIns="0"/>
+          <a:lstStyle/>
+          <a:p>
+            <a:pPr algn="l"/>
+            <a:r>
+              <a:rPr sz="2000" b="0" i="0">
+                <a:solidFill>
+                  <a:srgbClr val="202122"/>
+                </a:solidFill>
+                <a:latin typeface="Calibri"/>
+              </a:rPr>
+              <a:t>Change existing records.</a:t>
+            </a:r>
+          </a:p>
+        </p:txBody>
+      </p:sp>
+      <p:sp>
+        <p:nvSpPr>
+          <p:cNvPr id="18" name="Rounded Rectangle 17"/>
+          <p:cNvSpPr/>
+          <p:nvPr/>
+        </p:nvSpPr>
+        <p:spPr>
+          <a:xfrm>
+            <a:off x="6233007" y="4023360"/>
+            <a:ext cx="5410047" cy="2148840"/>
+          </a:xfrm>
+          <a:prstGeom prst="roundRect">
+            <a:avLst>
+              <a:gd name="adj" fmla="val 6000"/>
+            </a:avLst>
+          </a:prstGeom>
+          <a:solidFill>
+            <a:srgbClr val="EAF3FF"/>
+          </a:solidFill>
+          <a:ln>
+            <a:noFill/>
+          </a:ln>
+          <a:effectLst/>
+        </p:spPr>
+        <p:style>
+          <a:lnRef idx="1">
+            <a:schemeClr val="accent1"/>
+          </a:lnRef>
+          <a:fillRef idx="3">
+            <a:schemeClr val="accent1"/>
+          </a:fillRef>
+          <a:effectRef idx="2">
+            <a:schemeClr val="accent1"/>
+          </a:effectRef>
+          <a:fontRef idx="minor">
+            <a:schemeClr val="lt1"/>
+          </a:fontRef>
+        </p:style>
+        <p:txBody>
+          <a:bodyPr rtlCol="0" anchor="ctr"/>
+          <a:lstStyle/>
+          <a:p/>
+        </p:txBody>
+      </p:sp>
+      <p:sp>
+        <p:nvSpPr>
+          <p:cNvPr id="19" name="Oval 18"/>
+          <p:cNvSpPr/>
+          <p:nvPr/>
+        </p:nvSpPr>
+        <p:spPr>
+          <a:xfrm>
+            <a:off x="6461607" y="4251960"/>
+            <a:ext cx="457200" cy="457200"/>
+          </a:xfrm>
+          <a:prstGeom prst="ellipse">
+            <a:avLst/>
+          </a:prstGeom>
+          <a:solidFill>
+            <a:srgbClr val="33C17A"/>
+          </a:solidFill>
+          <a:ln>
+            <a:noFill/>
+          </a:ln>
+          <a:effectLst/>
+        </p:spPr>
+        <p:style>
+          <a:lnRef idx="1">
+            <a:schemeClr val="accent1"/>
+          </a:lnRef>
+          <a:fillRef idx="3">
+            <a:schemeClr val="accent1"/>
+          </a:fillRef>
+          <a:effectRef idx="2">
+            <a:schemeClr val="accent1"/>
+          </a:effectRef>
+          <a:fontRef idx="minor">
+            <a:schemeClr val="lt1"/>
+          </a:fontRef>
+        </p:style>
+        <p:txBody>
+          <a:bodyPr rtlCol="0" anchor="ctr" lIns="0" rIns="0" tIns="0" bIns="0"/>
+          <a:lstStyle/>
+          <a:p>
+            <a:pPr algn="ctr"/>
+            <a:r>
+              <a:rPr sz="1500" b="1">
+                <a:solidFill>
+                  <a:srgbClr val="202122"/>
+                </a:solidFill>
+                <a:latin typeface="Calibri"/>
+              </a:rPr>
+              <a:t>4</a:t>
+            </a:r>
+          </a:p>
+        </p:txBody>
+      </p:sp>
+      <p:sp>
+        <p:nvSpPr>
+          <p:cNvPr id="20" name="TextBox 19"/>
+          <p:cNvSpPr txBox="1"/>
+          <p:nvPr/>
+        </p:nvSpPr>
+        <p:spPr>
+          <a:xfrm>
+            <a:off x="7055967" y="4224528"/>
+            <a:ext cx="4404207" cy="512064"/>
+          </a:xfrm>
+          <a:prstGeom prst="rect">
+            <a:avLst/>
+          </a:prstGeom>
+          <a:noFill/>
+        </p:spPr>
+        <p:txBody>
+          <a:bodyPr wrap="square" anchor="ctr" lIns="0" rIns="0" tIns="0" bIns="0"/>
+          <a:lstStyle/>
+          <a:p>
+            <a:pPr algn="l"/>
+            <a:r>
+              <a:rPr sz="1900" b="1" i="0">
+                <a:solidFill>
+                  <a:srgbClr val="03306E"/>
+                </a:solidFill>
+                <a:latin typeface="Calibri"/>
+              </a:rPr>
+              <a:t>Delete</a:t>
+            </a:r>
+          </a:p>
+        </p:txBody>
+      </p:sp>
+      <p:sp>
+        <p:nvSpPr>
+          <p:cNvPr id="21" name="TextBox 20"/>
+          <p:cNvSpPr txBox="1"/>
+          <p:nvPr/>
+        </p:nvSpPr>
+        <p:spPr>
+          <a:xfrm>
+            <a:off x="6461607" y="4892040"/>
+            <a:ext cx="4952847" cy="1143000"/>
+          </a:xfrm>
+          <a:prstGeom prst="rect">
+            <a:avLst/>
+          </a:prstGeom>
+          <a:noFill/>
+        </p:spPr>
+        <p:txBody>
+          <a:bodyPr wrap="square" anchor="t" lIns="0" rIns="0" tIns="0" bIns="0"/>
+          <a:lstStyle/>
+          <a:p>
+            <a:pPr algn="l"/>
+            <a:r>
+              <a:rPr sz="2000" b="0" i="0">
+                <a:solidFill>
+                  <a:srgbClr val="202122"/>
+                </a:solidFill>
+                <a:latin typeface="Calibri"/>
+              </a:rPr>
+              <a:t>Remove records safely.</a:t>
+            </a:r>
+          </a:p>
+        </p:txBody>
+      </p:sp>
+    </p:spTree>
+  </p:cSld>
+  <p:clrMapOvr>
+    <a:masterClrMapping/>
+  </p:clrMapOvr>
+</p:sld>
+</file>
+
+<file path=ppt/slides/slide7.xml><?xml version="1.0" encoding="utf-8"?>
+<p:sld xmlns:a="http://schemas.openxmlformats.org/drawingml/2006/main" xmlns:p="http://schemas.openxmlformats.org/presentationml/2006/main" xmlns:r="http://schemas.openxmlformats.org/officeDocument/2006/relationships">
+  <p:cSld>
+    <p:bg>
+      <p:bgPr>
+        <a:solidFill>
+          <a:srgbClr val="FFFFFF"/>
+        </a:solidFill>
+        <a:effectLst/>
+      </p:bgPr>
+    </p:bg>
+    <p:spTree>
+      <p:nvGrpSpPr>
+        <p:cNvPr id="1" name=""/>
+        <p:cNvGrpSpPr/>
+        <p:nvPr/>
+      </p:nvGrpSpPr>
+      <p:grpSpPr/>
+      <p:sp>
+        <p:nvSpPr>
+          <p:cNvPr id="2" name="TextBox 1"/>
+          <p:cNvSpPr txBox="1"/>
+          <p:nvPr/>
+        </p:nvSpPr>
+        <p:spPr>
+          <a:xfrm>
+            <a:off x="548640" y="320040"/>
+            <a:ext cx="11094415" cy="274320"/>
+          </a:xfrm>
+          <a:prstGeom prst="rect">
+            <a:avLst/>
+          </a:prstGeom>
+          <a:noFill/>
+        </p:spPr>
+        <p:txBody>
+          <a:bodyPr wrap="square" anchor="t" lIns="0" rIns="0" tIns="0" bIns="0"/>
+          <a:lstStyle/>
+          <a:p>
+            <a:pPr algn="l"/>
+            <a:r>
+              <a:rPr sz="1100" b="1" i="0">
+                <a:solidFill>
+                  <a:srgbClr val="54595D"/>
+                </a:solidFill>
+                <a:latin typeface="Calibri"/>
+              </a:rPr>
+              <a:t>OCCUPATIONAL SPECIALISM  ·  Specialism Content Area 6</a:t>
+            </a:r>
+          </a:p>
+        </p:txBody>
+      </p:sp>
+      <p:sp>
+        <p:nvSpPr>
+          <p:cNvPr id="3" name="TextBox 2"/>
+          <p:cNvSpPr txBox="1"/>
+          <p:nvPr/>
+        </p:nvSpPr>
+        <p:spPr>
+          <a:xfrm>
+            <a:off x="548640" y="566928"/>
+            <a:ext cx="11094415" cy="822960"/>
+          </a:xfrm>
+          <a:prstGeom prst="rect">
+            <a:avLst/>
+          </a:prstGeom>
+          <a:noFill/>
+        </p:spPr>
+        <p:txBody>
+          <a:bodyPr wrap="square" anchor="ctr" lIns="0" rIns="0" tIns="0" bIns="0"/>
+          <a:lstStyle/>
+          <a:p>
+            <a:pPr algn="l"/>
+            <a:r>
+              <a:rPr sz="3200" b="1" i="0">
+                <a:solidFill>
+                  <a:srgbClr val="03306E"/>
+                </a:solidFill>
+                <a:latin typeface="Cambria"/>
+              </a:rPr>
+              <a:t>Deployment methods</a:t>
+            </a:r>
+          </a:p>
+        </p:txBody>
+      </p:sp>
+      <p:sp>
+        <p:nvSpPr>
+          <p:cNvPr id="4" name="TextBox 3"/>
+          <p:cNvSpPr txBox="1"/>
+          <p:nvPr/>
+        </p:nvSpPr>
+        <p:spPr>
+          <a:xfrm>
+            <a:off x="548640" y="6446520"/>
+            <a:ext cx="8229600" cy="274320"/>
+          </a:xfrm>
+          <a:prstGeom prst="rect">
+            <a:avLst/>
+          </a:prstGeom>
+          <a:noFill/>
+        </p:spPr>
+        <p:txBody>
+          <a:bodyPr wrap="square" anchor="t" lIns="0" rIns="0" tIns="0" bIns="0"/>
+          <a:lstStyle/>
+          <a:p>
+            <a:pPr algn="l"/>
+            <a:r>
+              <a:rPr sz="1000" b="0" i="0">
+                <a:solidFill>
+                  <a:srgbClr val="54595D"/>
+                </a:solidFill>
+                <a:latin typeface="Calibri"/>
+              </a:rPr>
+              <a:t>Digital Software Development T Level  ·  Connecting to Data and Deploying Software</a:t>
+            </a:r>
+          </a:p>
+        </p:txBody>
+      </p:sp>
+      <p:sp>
+        <p:nvSpPr>
+          <p:cNvPr id="5" name="TextBox 4"/>
+          <p:cNvSpPr txBox="1"/>
+          <p:nvPr/>
+        </p:nvSpPr>
+        <p:spPr>
+          <a:xfrm>
+            <a:off x="10728655" y="6446520"/>
+            <a:ext cx="914400" cy="274320"/>
+          </a:xfrm>
+          <a:prstGeom prst="rect">
+            <a:avLst/>
+          </a:prstGeom>
+          <a:noFill/>
+        </p:spPr>
+        <p:txBody>
+          <a:bodyPr wrap="square" anchor="t" lIns="0" rIns="0" tIns="0" bIns="0"/>
+          <a:lstStyle/>
+          <a:p>
+            <a:pPr algn="r"/>
+            <a:r>
+              <a:rPr sz="1000" b="0" i="0">
+                <a:solidFill>
+                  <a:srgbClr val="54595D"/>
+                </a:solidFill>
+                <a:latin typeface="Calibri"/>
+              </a:rPr>
+              <a:t>7</a:t>
+            </a:r>
+          </a:p>
+        </p:txBody>
+      </p:sp>
+      <p:sp>
+        <p:nvSpPr>
+          <p:cNvPr id="6" name="TextBox 5"/>
+          <p:cNvSpPr txBox="1"/>
+          <p:nvPr/>
+        </p:nvSpPr>
+        <p:spPr>
+          <a:xfrm>
+            <a:off x="548640" y="1554480"/>
+            <a:ext cx="6720840" cy="4617720"/>
+          </a:xfrm>
+          <a:prstGeom prst="rect">
+            <a:avLst/>
+          </a:prstGeom>
+          <a:noFill/>
+        </p:spPr>
+        <p:txBody>
+          <a:bodyPr wrap="square" lIns="0" rIns="0" tIns="0" bIns="0">
+            <a:spAutoFit/>
+          </a:bodyPr>
+          <a:lstStyle/>
+          <a:p>
+            <a:pPr>
+              <a:spcAft>
+                <a:spcPts val="1320"/>
+              </a:spcAft>
+            </a:pPr>
+            <a:r>
+              <a:rPr sz="2200" b="0">
+                <a:solidFill>
+                  <a:srgbClr val="202122"/>
+                </a:solidFill>
+                <a:latin typeface="Calibri"/>
+              </a:rPr>
+              <a:t>Deployment gets software to users.</a:t>
+            </a:r>
+          </a:p>
+          <a:p>
+            <a:pPr>
+              <a:spcAft>
+                <a:spcPts val="1320"/>
+              </a:spcAft>
+            </a:pPr>
+            <a:r>
+              <a:rPr sz="2200" b="0">
+                <a:solidFill>
+                  <a:srgbClr val="202122"/>
+                </a:solidFill>
+                <a:latin typeface="Calibri"/>
+              </a:rPr>
+              <a:t>Local installation puts it on one machine. Network or server installation deploys it across an organisation. Mobile platforms distribute through app stores. Web and cloud platforms make it available in a browser with easy updates.</a:t>
+            </a:r>
+          </a:p>
+          <a:p>
+            <a:pPr>
+              <a:spcAft>
+                <a:spcPts val="1320"/>
+              </a:spcAft>
+            </a:pPr>
+            <a:r>
+              <a:rPr sz="2200" b="0">
+                <a:solidFill>
+                  <a:srgbClr val="202122"/>
+                </a:solidFill>
+                <a:latin typeface="Calibri"/>
+              </a:rPr>
+              <a:t>Containerisation packages the app with everything it needs, so it runs identically anywhere. Container-scheduling platforms run and scale many containers automatically.</a:t>
+            </a:r>
+          </a:p>
+          <a:p>
+            <a:pPr>
+              <a:spcAft>
+                <a:spcPts val="1320"/>
+              </a:spcAft>
+            </a:pPr>
+            <a:r>
+              <a:rPr sz="2200" b="0">
+                <a:solidFill>
+                  <a:srgbClr val="202122"/>
+                </a:solidFill>
+                <a:latin typeface="Calibri"/>
+              </a:rPr>
+              <a:t>Choose based on the users, the platform and how often it will be updated.</a:t>
+            </a:r>
+          </a:p>
+        </p:txBody>
+      </p:sp>
+      <p:sp>
+        <p:nvSpPr>
+          <p:cNvPr id="7" name="Rounded Rectangle 6"/>
+          <p:cNvSpPr/>
+          <p:nvPr/>
+        </p:nvSpPr>
+        <p:spPr>
+          <a:xfrm>
+            <a:off x="7772400" y="1554480"/>
+            <a:ext cx="3867912" cy="4526280"/>
+          </a:xfrm>
+          <a:prstGeom prst="roundRect">
+            <a:avLst>
+              <a:gd name="adj" fmla="val 8000"/>
+            </a:avLst>
+          </a:prstGeom>
+          <a:solidFill>
+            <a:srgbClr val="03306E"/>
+          </a:solidFill>
+          <a:ln>
+            <a:noFill/>
+          </a:ln>
+          <a:effectLst/>
+        </p:spPr>
+        <p:style>
+          <a:lnRef idx="1">
+            <a:schemeClr val="accent1"/>
+          </a:lnRef>
+          <a:fillRef idx="3">
+            <a:schemeClr val="accent1"/>
+          </a:fillRef>
+          <a:effectRef idx="2">
+            <a:schemeClr val="accent1"/>
+          </a:effectRef>
+          <a:fontRef idx="minor">
+            <a:schemeClr val="lt1"/>
+          </a:fontRef>
+        </p:style>
+        <p:txBody>
+          <a:bodyPr rtlCol="0" anchor="ctr"/>
+          <a:lstStyle/>
+          <a:p/>
+        </p:txBody>
+      </p:sp>
+      <p:sp>
+        <p:nvSpPr>
+          <p:cNvPr id="8" name="Oval 7"/>
+          <p:cNvSpPr/>
+          <p:nvPr/>
+        </p:nvSpPr>
+        <p:spPr>
+          <a:xfrm>
+            <a:off x="8046720" y="1828800"/>
+            <a:ext cx="548640" cy="548640"/>
+          </a:xfrm>
+          <a:prstGeom prst="ellipse">
+            <a:avLst/>
+          </a:prstGeom>
+          <a:solidFill>
+            <a:srgbClr val="33C17A"/>
+          </a:solidFill>
+          <a:ln>
+            <a:noFill/>
+          </a:ln>
+          <a:effectLst/>
+        </p:spPr>
+        <p:style>
+          <a:lnRef idx="1">
+            <a:schemeClr val="accent1"/>
+          </a:lnRef>
+          <a:fillRef idx="3">
+            <a:schemeClr val="accent1"/>
+          </a:fillRef>
+          <a:effectRef idx="2">
+            <a:schemeClr val="accent1"/>
+          </a:effectRef>
+          <a:fontRef idx="minor">
+            <a:schemeClr val="lt1"/>
+          </a:fontRef>
+        </p:style>
+        <p:txBody>
+          <a:bodyPr rtlCol="0" anchor="ctr" lIns="0" rIns="0" tIns="0" bIns="0"/>
+          <a:lstStyle/>
+          <a:p>
+            <a:pPr algn="ctr"/>
+            <a:r>
+              <a:rPr sz="1300" b="1">
+                <a:solidFill>
+                  <a:srgbClr val="202122"/>
+                </a:solidFill>
+                <a:latin typeface="Calibri"/>
+              </a:rPr>
+              <a:t>e.g.</a:t>
+            </a:r>
+          </a:p>
+        </p:txBody>
+      </p:sp>
+      <p:sp>
+        <p:nvSpPr>
+          <p:cNvPr id="9" name="TextBox 8"/>
+          <p:cNvSpPr txBox="1"/>
+          <p:nvPr/>
+        </p:nvSpPr>
+        <p:spPr>
+          <a:xfrm>
+            <a:off x="8046720" y="2560320"/>
+            <a:ext cx="3291840" cy="365760"/>
+          </a:xfrm>
+          <a:prstGeom prst="rect">
+            <a:avLst/>
+          </a:prstGeom>
+          <a:noFill/>
+        </p:spPr>
+        <p:txBody>
+          <a:bodyPr wrap="square" anchor="t" lIns="0" rIns="0" tIns="0" bIns="0"/>
+          <a:lstStyle/>
+          <a:p>
+            <a:pPr algn="l"/>
+            <a:r>
+              <a:rPr sz="1300" b="1" i="0">
+                <a:solidFill>
+                  <a:srgbClr val="A9C8F0"/>
+                </a:solidFill>
+                <a:latin typeface="Calibri"/>
+              </a:rPr>
+              <a:t>EXAMPLE</a:t>
+            </a:r>
+          </a:p>
+        </p:txBody>
+      </p:sp>
+      <p:sp>
+        <p:nvSpPr>
+          <p:cNvPr id="10" name="TextBox 9"/>
+          <p:cNvSpPr txBox="1"/>
+          <p:nvPr/>
+        </p:nvSpPr>
+        <p:spPr>
+          <a:xfrm>
+            <a:off x="8046720" y="2971800"/>
+            <a:ext cx="3291840" cy="2971800"/>
+          </a:xfrm>
+          <a:prstGeom prst="rect">
+            <a:avLst/>
+          </a:prstGeom>
+          <a:noFill/>
+        </p:spPr>
+        <p:txBody>
+          <a:bodyPr wrap="square" anchor="t" lIns="0" rIns="0" tIns="0" bIns="0"/>
+          <a:lstStyle/>
+          <a:p>
+            <a:pPr algn="l"/>
+            <a:r>
+              <a:rPr sz="1900" b="0" i="0">
+                <a:solidFill>
+                  <a:srgbClr val="FFFFFF"/>
+                </a:solidFill>
+                <a:latin typeface="Cambria"/>
+              </a:rPr>
+              <a:t>A web app deployed in containers on a cloud platform can scale from 10 to 10,000 users by adding containers automatically.</a:t>
+            </a:r>
+          </a:p>
+        </p:txBody>
+      </p:sp>
+    </p:spTree>
+  </p:cSld>
+  <p:clrMapOvr>
+    <a:masterClrMapping/>
+  </p:clrMapOvr>
+</p:sld>
+</file>
+
+<file path=ppt/slides/slide8.xml><?xml version="1.0" encoding="utf-8"?>
+<p:sld xmlns:a="http://schemas.openxmlformats.org/drawingml/2006/main" xmlns:p="http://schemas.openxmlformats.org/presentationml/2006/main" xmlns:r="http://schemas.openxmlformats.org/officeDocument/2006/relationships">
+  <p:cSld>
+    <p:bg>
+      <p:bgPr>
+        <a:solidFill>
+          <a:srgbClr val="FFFFFF"/>
+        </a:solidFill>
+        <a:effectLst/>
+      </p:bgPr>
+    </p:bg>
+    <p:spTree>
+      <p:nvGrpSpPr>
+        <p:cNvPr id="1" name=""/>
+        <p:cNvGrpSpPr/>
+        <p:nvPr/>
+      </p:nvGrpSpPr>
+      <p:grpSpPr/>
+      <p:sp>
+        <p:nvSpPr>
+          <p:cNvPr id="2" name="TextBox 1"/>
+          <p:cNvSpPr txBox="1"/>
+          <p:nvPr/>
+        </p:nvSpPr>
+        <p:spPr>
+          <a:xfrm>
+            <a:off x="548640" y="320040"/>
+            <a:ext cx="11094415" cy="274320"/>
+          </a:xfrm>
+          <a:prstGeom prst="rect">
+            <a:avLst/>
+          </a:prstGeom>
+          <a:noFill/>
+        </p:spPr>
+        <p:txBody>
+          <a:bodyPr wrap="square" anchor="t" lIns="0" rIns="0" tIns="0" bIns="0"/>
+          <a:lstStyle/>
+          <a:p>
+            <a:pPr algn="l"/>
+            <a:r>
+              <a:rPr sz="1100" b="1" i="0">
+                <a:solidFill>
+                  <a:srgbClr val="54595D"/>
+                </a:solidFill>
+                <a:latin typeface="Calibri"/>
+              </a:rPr>
+              <a:t>OCCUPATIONAL SPECIALISM  ·  Specialism Content Area 6</a:t>
+            </a:r>
+          </a:p>
+        </p:txBody>
+      </p:sp>
+      <p:sp>
+        <p:nvSpPr>
+          <p:cNvPr id="3" name="TextBox 2"/>
+          <p:cNvSpPr txBox="1"/>
+          <p:nvPr/>
+        </p:nvSpPr>
+        <p:spPr>
+          <a:xfrm>
+            <a:off x="548640" y="566928"/>
+            <a:ext cx="11094415" cy="822960"/>
+          </a:xfrm>
+          <a:prstGeom prst="rect">
+            <a:avLst/>
+          </a:prstGeom>
+          <a:noFill/>
+        </p:spPr>
+        <p:txBody>
+          <a:bodyPr wrap="square" anchor="ctr" lIns="0" rIns="0" tIns="0" bIns="0"/>
+          <a:lstStyle/>
+          <a:p>
+            <a:pPr algn="l"/>
+            <a:r>
+              <a:rPr sz="3200" b="1" i="0">
+                <a:solidFill>
+                  <a:srgbClr val="03306E"/>
+                </a:solidFill>
+                <a:latin typeface="Cambria"/>
+              </a:rPr>
+              <a:t>Deployment methods</a:t>
+            </a:r>
+          </a:p>
+        </p:txBody>
+      </p:sp>
+      <p:sp>
+        <p:nvSpPr>
+          <p:cNvPr id="4" name="TextBox 3"/>
+          <p:cNvSpPr txBox="1"/>
+          <p:nvPr/>
+        </p:nvSpPr>
+        <p:spPr>
+          <a:xfrm>
+            <a:off x="548640" y="6446520"/>
+            <a:ext cx="8229600" cy="274320"/>
+          </a:xfrm>
+          <a:prstGeom prst="rect">
+            <a:avLst/>
+          </a:prstGeom>
+          <a:noFill/>
+        </p:spPr>
+        <p:txBody>
+          <a:bodyPr wrap="square" anchor="t" lIns="0" rIns="0" tIns="0" bIns="0"/>
+          <a:lstStyle/>
+          <a:p>
+            <a:pPr algn="l"/>
+            <a:r>
+              <a:rPr sz="1000" b="0" i="0">
+                <a:solidFill>
+                  <a:srgbClr val="54595D"/>
+                </a:solidFill>
+                <a:latin typeface="Calibri"/>
+              </a:rPr>
+              <a:t>Digital Software Development T Level  ·  Connecting to Data and Deploying Software</a:t>
+            </a:r>
+          </a:p>
+        </p:txBody>
+      </p:sp>
+      <p:sp>
+        <p:nvSpPr>
+          <p:cNvPr id="5" name="TextBox 4"/>
+          <p:cNvSpPr txBox="1"/>
+          <p:nvPr/>
+        </p:nvSpPr>
+        <p:spPr>
+          <a:xfrm>
+            <a:off x="10728655" y="6446520"/>
+            <a:ext cx="914400" cy="274320"/>
+          </a:xfrm>
+          <a:prstGeom prst="rect">
+            <a:avLst/>
+          </a:prstGeom>
+          <a:noFill/>
+        </p:spPr>
+        <p:txBody>
+          <a:bodyPr wrap="square" anchor="t" lIns="0" rIns="0" tIns="0" bIns="0"/>
+          <a:lstStyle/>
+          <a:p>
+            <a:pPr algn="r"/>
+            <a:r>
+              <a:rPr sz="1000" b="0" i="0">
+                <a:solidFill>
+                  <a:srgbClr val="54595D"/>
+                </a:solidFill>
+                <a:latin typeface="Calibri"/>
+              </a:rPr>
+              <a:t>8</a:t>
             </a:r>
           </a:p>
         </p:txBody>
@@ -6205,7 +9993,7 @@
 </p:sld>
 </file>
 
-<file path=ppt/slides/slide6.xml><?xml version="1.0" encoding="utf-8"?>
+<file path=ppt/slides/slide9.xml><?xml version="1.0" encoding="utf-8"?>
 <p:sld xmlns:a="http://schemas.openxmlformats.org/drawingml/2006/main" xmlns:p="http://schemas.openxmlformats.org/presentationml/2006/main" xmlns:r="http://schemas.openxmlformats.org/officeDocument/2006/relationships">
   <p:cSld>
     <p:bg>
@@ -6284,7 +10072,7 @@
                 </a:solidFill>
                 <a:latin typeface="Cambria"/>
               </a:rPr>
-              <a:t>Check your understanding</a:t>
+              <a:t>Quick check: Deployment methods</a:t>
             </a:r>
           </a:p>
         </p:txBody>
@@ -6350,7 +10138,7 @@
                 </a:solidFill>
                 <a:latin typeface="Calibri"/>
               </a:rPr>
-              <a:t>6</a:t>
+              <a:t>9</a:t>
             </a:r>
           </a:p>
         </p:txBody>
@@ -6363,8 +10151,8 @@
         </p:nvSpPr>
         <p:spPr>
           <a:xfrm>
-            <a:off x="548640" y="1618488"/>
-            <a:ext cx="411480" cy="411480"/>
+            <a:off x="548640" y="1691640"/>
+            <a:ext cx="502920" cy="502920"/>
           </a:xfrm>
           <a:prstGeom prst="ellipse">
             <a:avLst/>
@@ -6397,7 +10185,7 @@
           <a:p>
             <a:pPr algn="ctr"/>
             <a:r>
-              <a:rPr sz="1400" b="1">
+              <a:rPr sz="1600" b="1">
                 <a:solidFill>
                   <a:srgbClr val="202122"/>
                 </a:solidFill>
@@ -6416,8 +10204,8 @@
         </p:nvSpPr>
         <p:spPr>
           <a:xfrm>
-            <a:off x="1234440" y="1600200"/>
-            <a:ext cx="10408615" cy="1030986"/>
+            <a:off x="1371600" y="1645920"/>
+            <a:ext cx="10271455" cy="1188720"/>
           </a:xfrm>
           <a:prstGeom prst="rect">
             <a:avLst/>
@@ -6430,13 +10218,13 @@
           <a:p>
             <a:pPr algn="l"/>
             <a:r>
-              <a:rPr sz="2200" b="0" i="0">
+              <a:rPr sz="2400" b="0" i="0">
                 <a:solidFill>
                   <a:srgbClr val="202122"/>
                 </a:solidFill>
                 <a:latin typeface="Calibri"/>
               </a:rPr>
-              <a:t>What is an API endpoint?</a:t>
+              <a:t>Why use containers?</a:t>
             </a:r>
           </a:p>
         </p:txBody>
@@ -6449,8 +10237,8 @@
         </p:nvSpPr>
         <p:spPr>
           <a:xfrm>
-            <a:off x="548640" y="2814066"/>
-            <a:ext cx="411480" cy="411480"/>
+            <a:off x="548640" y="3108960"/>
+            <a:ext cx="502920" cy="502920"/>
           </a:xfrm>
           <a:prstGeom prst="ellipse">
             <a:avLst/>
@@ -6483,7 +10271,7 @@
           <a:p>
             <a:pPr algn="ctr"/>
             <a:r>
-              <a:rPr sz="1400" b="1">
+              <a:rPr sz="1600" b="1">
                 <a:solidFill>
                   <a:srgbClr val="202122"/>
                 </a:solidFill>
@@ -6502,8 +10290,8 @@
         </p:nvSpPr>
         <p:spPr>
           <a:xfrm>
-            <a:off x="1234440" y="2795778"/>
-            <a:ext cx="10408615" cy="1030986"/>
+            <a:off x="1371600" y="3063240"/>
+            <a:ext cx="10271455" cy="1188720"/>
           </a:xfrm>
           <a:prstGeom prst="rect">
             <a:avLst/>
@@ -6516,13 +10304,13 @@
           <a:p>
             <a:pPr algn="l"/>
             <a:r>
-              <a:rPr sz="2200" b="0" i="0">
+              <a:rPr sz="2400" b="0" i="0">
                 <a:solidFill>
                   <a:srgbClr val="202122"/>
                 </a:solidFill>
                 <a:latin typeface="Calibri"/>
               </a:rPr>
-              <a:t>What does a prepared statement protect against?</a:t>
+              <a:t>How are mobile apps usually distributed?</a:t>
             </a:r>
           </a:p>
         </p:txBody>
@@ -6535,8 +10323,8 @@
         </p:nvSpPr>
         <p:spPr>
           <a:xfrm>
-            <a:off x="548640" y="4009644"/>
-            <a:ext cx="411480" cy="411480"/>
+            <a:off x="548640" y="4526280"/>
+            <a:ext cx="502920" cy="502920"/>
           </a:xfrm>
           <a:prstGeom prst="ellipse">
             <a:avLst/>
@@ -6569,7 +10357,7 @@
           <a:p>
             <a:pPr algn="ctr"/>
             <a:r>
-              <a:rPr sz="1400" b="1">
+              <a:rPr sz="1600" b="1">
                 <a:solidFill>
                   <a:srgbClr val="202122"/>
                 </a:solidFill>
@@ -6588,8 +10376,8 @@
         </p:nvSpPr>
         <p:spPr>
           <a:xfrm>
-            <a:off x="1234440" y="3991356"/>
-            <a:ext cx="10408615" cy="1030986"/>
+            <a:off x="1371600" y="4480560"/>
+            <a:ext cx="10271455" cy="1188720"/>
           </a:xfrm>
           <a:prstGeom prst="rect">
             <a:avLst/>
@@ -6602,1052 +10390,13 @@
           <a:p>
             <a:pPr algn="l"/>
             <a:r>
-              <a:rPr sz="2200" b="0" i="0">
+              <a:rPr sz="2400" b="0" i="0">
                 <a:solidFill>
                   <a:srgbClr val="202122"/>
                 </a:solidFill>
                 <a:latin typeface="Calibri"/>
               </a:rPr>
-              <a:t>What does ODBC stand for?</a:t>
-            </a:r>
-          </a:p>
-        </p:txBody>
-      </p:sp>
-      <p:sp>
-        <p:nvSpPr>
-          <p:cNvPr id="12" name="Oval 11"/>
-          <p:cNvSpPr/>
-          <p:nvPr/>
-        </p:nvSpPr>
-        <p:spPr>
-          <a:xfrm>
-            <a:off x="548640" y="5205221"/>
-            <a:ext cx="411480" cy="411480"/>
-          </a:xfrm>
-          <a:prstGeom prst="ellipse">
-            <a:avLst/>
-          </a:prstGeom>
-          <a:solidFill>
-            <a:srgbClr val="33C17A"/>
-          </a:solidFill>
-          <a:ln>
-            <a:noFill/>
-          </a:ln>
-          <a:effectLst/>
-        </p:spPr>
-        <p:style>
-          <a:lnRef idx="1">
-            <a:schemeClr val="accent1"/>
-          </a:lnRef>
-          <a:fillRef idx="3">
-            <a:schemeClr val="accent1"/>
-          </a:fillRef>
-          <a:effectRef idx="2">
-            <a:schemeClr val="accent1"/>
-          </a:effectRef>
-          <a:fontRef idx="minor">
-            <a:schemeClr val="lt1"/>
-          </a:fontRef>
-        </p:style>
-        <p:txBody>
-          <a:bodyPr rtlCol="0" anchor="ctr" lIns="0" rIns="0" tIns="0" bIns="0"/>
-          <a:lstStyle/>
-          <a:p>
-            <a:pPr algn="ctr"/>
-            <a:r>
-              <a:rPr sz="1400" b="1">
-                <a:solidFill>
-                  <a:srgbClr val="202122"/>
-                </a:solidFill>
-                <a:latin typeface="Calibri"/>
-              </a:rPr>
-              <a:t>4</a:t>
-            </a:r>
-          </a:p>
-        </p:txBody>
-      </p:sp>
-      <p:sp>
-        <p:nvSpPr>
-          <p:cNvPr id="13" name="TextBox 12"/>
-          <p:cNvSpPr txBox="1"/>
-          <p:nvPr/>
-        </p:nvSpPr>
-        <p:spPr>
-          <a:xfrm>
-            <a:off x="1234440" y="5186933"/>
-            <a:ext cx="10408615" cy="1030986"/>
-          </a:xfrm>
-          <a:prstGeom prst="rect">
-            <a:avLst/>
-          </a:prstGeom>
-          <a:noFill/>
-        </p:spPr>
-        <p:txBody>
-          <a:bodyPr wrap="square" anchor="t" lIns="0" rIns="0" tIns="0" bIns="0"/>
-          <a:lstStyle/>
-          <a:p>
-            <a:pPr algn="l"/>
-            <a:r>
-              <a:rPr sz="2200" b="0" i="0">
-                <a:solidFill>
-                  <a:srgbClr val="202122"/>
-                </a:solidFill>
-                <a:latin typeface="Calibri"/>
-              </a:rPr>
-              <a:t>Why use containers for deployment?</a:t>
-            </a:r>
-          </a:p>
-        </p:txBody>
-      </p:sp>
-    </p:spTree>
-  </p:cSld>
-  <p:clrMapOvr>
-    <a:masterClrMapping/>
-  </p:clrMapOvr>
-</p:sld>
-</file>
-
-<file path=ppt/slides/slide7.xml><?xml version="1.0" encoding="utf-8"?>
-<p:sld xmlns:a="http://schemas.openxmlformats.org/drawingml/2006/main" xmlns:p="http://schemas.openxmlformats.org/presentationml/2006/main" xmlns:r="http://schemas.openxmlformats.org/officeDocument/2006/relationships">
-  <p:cSld>
-    <p:bg>
-      <p:bgPr>
-        <a:solidFill>
-          <a:srgbClr val="FFFFFF"/>
-        </a:solidFill>
-        <a:effectLst/>
-      </p:bgPr>
-    </p:bg>
-    <p:spTree>
-      <p:nvGrpSpPr>
-        <p:cNvPr id="1" name=""/>
-        <p:cNvGrpSpPr/>
-        <p:nvPr/>
-      </p:nvGrpSpPr>
-      <p:grpSpPr/>
-      <p:sp>
-        <p:nvSpPr>
-          <p:cNvPr id="2" name="TextBox 1"/>
-          <p:cNvSpPr txBox="1"/>
-          <p:nvPr/>
-        </p:nvSpPr>
-        <p:spPr>
-          <a:xfrm>
-            <a:off x="548640" y="320040"/>
-            <a:ext cx="11094415" cy="274320"/>
-          </a:xfrm>
-          <a:prstGeom prst="rect">
-            <a:avLst/>
-          </a:prstGeom>
-          <a:noFill/>
-        </p:spPr>
-        <p:txBody>
-          <a:bodyPr wrap="square" anchor="t" lIns="0" rIns="0" tIns="0" bIns="0"/>
-          <a:lstStyle/>
-          <a:p>
-            <a:pPr algn="l"/>
-            <a:r>
-              <a:rPr sz="1100" b="1" i="0">
-                <a:solidFill>
-                  <a:srgbClr val="54595D"/>
-                </a:solidFill>
-                <a:latin typeface="Calibri"/>
-              </a:rPr>
-              <a:t>OCCUPATIONAL SPECIALISM  ·  Specialism Content Area 6</a:t>
-            </a:r>
-          </a:p>
-        </p:txBody>
-      </p:sp>
-      <p:sp>
-        <p:nvSpPr>
-          <p:cNvPr id="3" name="TextBox 2"/>
-          <p:cNvSpPr txBox="1"/>
-          <p:nvPr/>
-        </p:nvSpPr>
-        <p:spPr>
-          <a:xfrm>
-            <a:off x="548640" y="566928"/>
-            <a:ext cx="11094415" cy="822960"/>
-          </a:xfrm>
-          <a:prstGeom prst="rect">
-            <a:avLst/>
-          </a:prstGeom>
-          <a:noFill/>
-        </p:spPr>
-        <p:txBody>
-          <a:bodyPr wrap="square" anchor="ctr" lIns="0" rIns="0" tIns="0" bIns="0"/>
-          <a:lstStyle/>
-          <a:p>
-            <a:pPr algn="l"/>
-            <a:r>
-              <a:rPr sz="3200" b="1" i="0">
-                <a:solidFill>
-                  <a:srgbClr val="03306E"/>
-                </a:solidFill>
-                <a:latin typeface="Cambria"/>
-              </a:rPr>
-              <a:t>Answers</a:t>
-            </a:r>
-          </a:p>
-        </p:txBody>
-      </p:sp>
-      <p:sp>
-        <p:nvSpPr>
-          <p:cNvPr id="4" name="TextBox 3"/>
-          <p:cNvSpPr txBox="1"/>
-          <p:nvPr/>
-        </p:nvSpPr>
-        <p:spPr>
-          <a:xfrm>
-            <a:off x="548640" y="6446520"/>
-            <a:ext cx="8229600" cy="274320"/>
-          </a:xfrm>
-          <a:prstGeom prst="rect">
-            <a:avLst/>
-          </a:prstGeom>
-          <a:noFill/>
-        </p:spPr>
-        <p:txBody>
-          <a:bodyPr wrap="square" anchor="t" lIns="0" rIns="0" tIns="0" bIns="0"/>
-          <a:lstStyle/>
-          <a:p>
-            <a:pPr algn="l"/>
-            <a:r>
-              <a:rPr sz="1000" b="0" i="0">
-                <a:solidFill>
-                  <a:srgbClr val="54595D"/>
-                </a:solidFill>
-                <a:latin typeface="Calibri"/>
-              </a:rPr>
-              <a:t>Digital Software Development T Level  ·  Connecting to Data and Deploying Software</a:t>
-            </a:r>
-          </a:p>
-        </p:txBody>
-      </p:sp>
-      <p:sp>
-        <p:nvSpPr>
-          <p:cNvPr id="5" name="TextBox 4"/>
-          <p:cNvSpPr txBox="1"/>
-          <p:nvPr/>
-        </p:nvSpPr>
-        <p:spPr>
-          <a:xfrm>
-            <a:off x="10728655" y="6446520"/>
-            <a:ext cx="914400" cy="274320"/>
-          </a:xfrm>
-          <a:prstGeom prst="rect">
-            <a:avLst/>
-          </a:prstGeom>
-          <a:noFill/>
-        </p:spPr>
-        <p:txBody>
-          <a:bodyPr wrap="square" anchor="t" lIns="0" rIns="0" tIns="0" bIns="0"/>
-          <a:lstStyle/>
-          <a:p>
-            <a:pPr algn="r"/>
-            <a:r>
-              <a:rPr sz="1000" b="0" i="0">
-                <a:solidFill>
-                  <a:srgbClr val="54595D"/>
-                </a:solidFill>
-                <a:latin typeface="Calibri"/>
-              </a:rPr>
-              <a:t>7</a:t>
-            </a:r>
-          </a:p>
-        </p:txBody>
-      </p:sp>
-      <p:sp>
-        <p:nvSpPr>
-          <p:cNvPr id="6" name="Oval 5"/>
-          <p:cNvSpPr/>
-          <p:nvPr/>
-        </p:nvSpPr>
-        <p:spPr>
-          <a:xfrm>
-            <a:off x="548640" y="1618488"/>
-            <a:ext cx="411480" cy="411480"/>
-          </a:xfrm>
-          <a:prstGeom prst="ellipse">
-            <a:avLst/>
-          </a:prstGeom>
-          <a:solidFill>
-            <a:srgbClr val="33C17A"/>
-          </a:solidFill>
-          <a:ln>
-            <a:noFill/>
-          </a:ln>
-          <a:effectLst/>
-        </p:spPr>
-        <p:style>
-          <a:lnRef idx="1">
-            <a:schemeClr val="accent1"/>
-          </a:lnRef>
-          <a:fillRef idx="3">
-            <a:schemeClr val="accent1"/>
-          </a:fillRef>
-          <a:effectRef idx="2">
-            <a:schemeClr val="accent1"/>
-          </a:effectRef>
-          <a:fontRef idx="minor">
-            <a:schemeClr val="lt1"/>
-          </a:fontRef>
-        </p:style>
-        <p:txBody>
-          <a:bodyPr rtlCol="0" anchor="ctr" lIns="0" rIns="0" tIns="0" bIns="0"/>
-          <a:lstStyle/>
-          <a:p>
-            <a:pPr algn="ctr"/>
-            <a:r>
-              <a:rPr sz="1400" b="1">
-                <a:solidFill>
-                  <a:srgbClr val="202122"/>
-                </a:solidFill>
-                <a:latin typeface="Calibri"/>
-              </a:rPr>
-              <a:t>1</a:t>
-            </a:r>
-          </a:p>
-        </p:txBody>
-      </p:sp>
-      <p:sp>
-        <p:nvSpPr>
-          <p:cNvPr id="7" name="TextBox 6"/>
-          <p:cNvSpPr txBox="1"/>
-          <p:nvPr/>
-        </p:nvSpPr>
-        <p:spPr>
-          <a:xfrm>
-            <a:off x="1234440" y="1600200"/>
-            <a:ext cx="10408615" cy="1030986"/>
-          </a:xfrm>
-          <a:prstGeom prst="rect">
-            <a:avLst/>
-          </a:prstGeom>
-          <a:noFill/>
-        </p:spPr>
-        <p:txBody>
-          <a:bodyPr wrap="square" anchor="t" lIns="0" rIns="0" tIns="0" bIns="0"/>
-          <a:lstStyle/>
-          <a:p>
-            <a:pPr algn="l"/>
-            <a:r>
-              <a:rPr sz="1800" b="0" i="0">
-                <a:solidFill>
-                  <a:srgbClr val="54595D"/>
-                </a:solidFill>
-                <a:latin typeface="Calibri"/>
-              </a:rPr>
-              <a:t>What is an API endpoint?</a:t>
-            </a:r>
-          </a:p>
-          <a:p>
-            <a:r>
-              <a:rPr sz="1800" b="1">
-                <a:solidFill>
-                  <a:srgbClr val="03306E"/>
-                </a:solidFill>
-                <a:latin typeface="Calibri"/>
-              </a:rPr>
-              <a:t>A specific URL where an API receives requests.</a:t>
-            </a:r>
-          </a:p>
-        </p:txBody>
-      </p:sp>
-      <p:sp>
-        <p:nvSpPr>
-          <p:cNvPr id="8" name="Oval 7"/>
-          <p:cNvSpPr/>
-          <p:nvPr/>
-        </p:nvSpPr>
-        <p:spPr>
-          <a:xfrm>
-            <a:off x="548640" y="2814066"/>
-            <a:ext cx="411480" cy="411480"/>
-          </a:xfrm>
-          <a:prstGeom prst="ellipse">
-            <a:avLst/>
-          </a:prstGeom>
-          <a:solidFill>
-            <a:srgbClr val="33C17A"/>
-          </a:solidFill>
-          <a:ln>
-            <a:noFill/>
-          </a:ln>
-          <a:effectLst/>
-        </p:spPr>
-        <p:style>
-          <a:lnRef idx="1">
-            <a:schemeClr val="accent1"/>
-          </a:lnRef>
-          <a:fillRef idx="3">
-            <a:schemeClr val="accent1"/>
-          </a:fillRef>
-          <a:effectRef idx="2">
-            <a:schemeClr val="accent1"/>
-          </a:effectRef>
-          <a:fontRef idx="minor">
-            <a:schemeClr val="lt1"/>
-          </a:fontRef>
-        </p:style>
-        <p:txBody>
-          <a:bodyPr rtlCol="0" anchor="ctr" lIns="0" rIns="0" tIns="0" bIns="0"/>
-          <a:lstStyle/>
-          <a:p>
-            <a:pPr algn="ctr"/>
-            <a:r>
-              <a:rPr sz="1400" b="1">
-                <a:solidFill>
-                  <a:srgbClr val="202122"/>
-                </a:solidFill>
-                <a:latin typeface="Calibri"/>
-              </a:rPr>
-              <a:t>2</a:t>
-            </a:r>
-          </a:p>
-        </p:txBody>
-      </p:sp>
-      <p:sp>
-        <p:nvSpPr>
-          <p:cNvPr id="9" name="TextBox 8"/>
-          <p:cNvSpPr txBox="1"/>
-          <p:nvPr/>
-        </p:nvSpPr>
-        <p:spPr>
-          <a:xfrm>
-            <a:off x="1234440" y="2795778"/>
-            <a:ext cx="10408615" cy="1030986"/>
-          </a:xfrm>
-          <a:prstGeom prst="rect">
-            <a:avLst/>
-          </a:prstGeom>
-          <a:noFill/>
-        </p:spPr>
-        <p:txBody>
-          <a:bodyPr wrap="square" anchor="t" lIns="0" rIns="0" tIns="0" bIns="0"/>
-          <a:lstStyle/>
-          <a:p>
-            <a:pPr algn="l"/>
-            <a:r>
-              <a:rPr sz="1800" b="0" i="0">
-                <a:solidFill>
-                  <a:srgbClr val="54595D"/>
-                </a:solidFill>
-                <a:latin typeface="Calibri"/>
-              </a:rPr>
-              <a:t>What does a prepared statement protect against?</a:t>
-            </a:r>
-          </a:p>
-          <a:p>
-            <a:r>
-              <a:rPr sz="1800" b="1">
-                <a:solidFill>
-                  <a:srgbClr val="03306E"/>
-                </a:solidFill>
-                <a:latin typeface="Calibri"/>
-              </a:rPr>
-              <a:t>SQL injection.</a:t>
-            </a:r>
-          </a:p>
-        </p:txBody>
-      </p:sp>
-      <p:sp>
-        <p:nvSpPr>
-          <p:cNvPr id="10" name="Oval 9"/>
-          <p:cNvSpPr/>
-          <p:nvPr/>
-        </p:nvSpPr>
-        <p:spPr>
-          <a:xfrm>
-            <a:off x="548640" y="4009644"/>
-            <a:ext cx="411480" cy="411480"/>
-          </a:xfrm>
-          <a:prstGeom prst="ellipse">
-            <a:avLst/>
-          </a:prstGeom>
-          <a:solidFill>
-            <a:srgbClr val="33C17A"/>
-          </a:solidFill>
-          <a:ln>
-            <a:noFill/>
-          </a:ln>
-          <a:effectLst/>
-        </p:spPr>
-        <p:style>
-          <a:lnRef idx="1">
-            <a:schemeClr val="accent1"/>
-          </a:lnRef>
-          <a:fillRef idx="3">
-            <a:schemeClr val="accent1"/>
-          </a:fillRef>
-          <a:effectRef idx="2">
-            <a:schemeClr val="accent1"/>
-          </a:effectRef>
-          <a:fontRef idx="minor">
-            <a:schemeClr val="lt1"/>
-          </a:fontRef>
-        </p:style>
-        <p:txBody>
-          <a:bodyPr rtlCol="0" anchor="ctr" lIns="0" rIns="0" tIns="0" bIns="0"/>
-          <a:lstStyle/>
-          <a:p>
-            <a:pPr algn="ctr"/>
-            <a:r>
-              <a:rPr sz="1400" b="1">
-                <a:solidFill>
-                  <a:srgbClr val="202122"/>
-                </a:solidFill>
-                <a:latin typeface="Calibri"/>
-              </a:rPr>
-              <a:t>3</a:t>
-            </a:r>
-          </a:p>
-        </p:txBody>
-      </p:sp>
-      <p:sp>
-        <p:nvSpPr>
-          <p:cNvPr id="11" name="TextBox 10"/>
-          <p:cNvSpPr txBox="1"/>
-          <p:nvPr/>
-        </p:nvSpPr>
-        <p:spPr>
-          <a:xfrm>
-            <a:off x="1234440" y="3991356"/>
-            <a:ext cx="10408615" cy="1030986"/>
-          </a:xfrm>
-          <a:prstGeom prst="rect">
-            <a:avLst/>
-          </a:prstGeom>
-          <a:noFill/>
-        </p:spPr>
-        <p:txBody>
-          <a:bodyPr wrap="square" anchor="t" lIns="0" rIns="0" tIns="0" bIns="0"/>
-          <a:lstStyle/>
-          <a:p>
-            <a:pPr algn="l"/>
-            <a:r>
-              <a:rPr sz="1800" b="0" i="0">
-                <a:solidFill>
-                  <a:srgbClr val="54595D"/>
-                </a:solidFill>
-                <a:latin typeface="Calibri"/>
-              </a:rPr>
-              <a:t>What does ODBC stand for?</a:t>
-            </a:r>
-          </a:p>
-          <a:p>
-            <a:r>
-              <a:rPr sz="1800" b="1">
-                <a:solidFill>
-                  <a:srgbClr val="03306E"/>
-                </a:solidFill>
-                <a:latin typeface="Calibri"/>
-              </a:rPr>
-              <a:t>Open Database Connectivity.</a:t>
-            </a:r>
-          </a:p>
-        </p:txBody>
-      </p:sp>
-      <p:sp>
-        <p:nvSpPr>
-          <p:cNvPr id="12" name="Oval 11"/>
-          <p:cNvSpPr/>
-          <p:nvPr/>
-        </p:nvSpPr>
-        <p:spPr>
-          <a:xfrm>
-            <a:off x="548640" y="5205221"/>
-            <a:ext cx="411480" cy="411480"/>
-          </a:xfrm>
-          <a:prstGeom prst="ellipse">
-            <a:avLst/>
-          </a:prstGeom>
-          <a:solidFill>
-            <a:srgbClr val="33C17A"/>
-          </a:solidFill>
-          <a:ln>
-            <a:noFill/>
-          </a:ln>
-          <a:effectLst/>
-        </p:spPr>
-        <p:style>
-          <a:lnRef idx="1">
-            <a:schemeClr val="accent1"/>
-          </a:lnRef>
-          <a:fillRef idx="3">
-            <a:schemeClr val="accent1"/>
-          </a:fillRef>
-          <a:effectRef idx="2">
-            <a:schemeClr val="accent1"/>
-          </a:effectRef>
-          <a:fontRef idx="minor">
-            <a:schemeClr val="lt1"/>
-          </a:fontRef>
-        </p:style>
-        <p:txBody>
-          <a:bodyPr rtlCol="0" anchor="ctr" lIns="0" rIns="0" tIns="0" bIns="0"/>
-          <a:lstStyle/>
-          <a:p>
-            <a:pPr algn="ctr"/>
-            <a:r>
-              <a:rPr sz="1400" b="1">
-                <a:solidFill>
-                  <a:srgbClr val="202122"/>
-                </a:solidFill>
-                <a:latin typeface="Calibri"/>
-              </a:rPr>
-              <a:t>4</a:t>
-            </a:r>
-          </a:p>
-        </p:txBody>
-      </p:sp>
-      <p:sp>
-        <p:nvSpPr>
-          <p:cNvPr id="13" name="TextBox 12"/>
-          <p:cNvSpPr txBox="1"/>
-          <p:nvPr/>
-        </p:nvSpPr>
-        <p:spPr>
-          <a:xfrm>
-            <a:off x="1234440" y="5186933"/>
-            <a:ext cx="10408615" cy="1030986"/>
-          </a:xfrm>
-          <a:prstGeom prst="rect">
-            <a:avLst/>
-          </a:prstGeom>
-          <a:noFill/>
-        </p:spPr>
-        <p:txBody>
-          <a:bodyPr wrap="square" anchor="t" lIns="0" rIns="0" tIns="0" bIns="0"/>
-          <a:lstStyle/>
-          <a:p>
-            <a:pPr algn="l"/>
-            <a:r>
-              <a:rPr sz="1800" b="0" i="0">
-                <a:solidFill>
-                  <a:srgbClr val="54595D"/>
-                </a:solidFill>
-                <a:latin typeface="Calibri"/>
-              </a:rPr>
-              <a:t>Why use containers for deployment?</a:t>
-            </a:r>
-          </a:p>
-          <a:p>
-            <a:r>
-              <a:rPr sz="1800" b="1">
-                <a:solidFill>
-                  <a:srgbClr val="03306E"/>
-                </a:solidFill>
-                <a:latin typeface="Calibri"/>
-              </a:rPr>
-              <a:t>The app runs the same way everywhere and scales easily.</a:t>
-            </a:r>
-          </a:p>
-        </p:txBody>
-      </p:sp>
-    </p:spTree>
-  </p:cSld>
-  <p:clrMapOvr>
-    <a:masterClrMapping/>
-  </p:clrMapOvr>
-</p:sld>
-</file>
-
-<file path=ppt/slides/slide8.xml><?xml version="1.0" encoding="utf-8"?>
-<p:sld xmlns:a="http://schemas.openxmlformats.org/drawingml/2006/main" xmlns:p="http://schemas.openxmlformats.org/presentationml/2006/main" xmlns:r="http://schemas.openxmlformats.org/officeDocument/2006/relationships">
-  <p:cSld>
-    <p:bg>
-      <p:bgPr>
-        <a:solidFill>
-          <a:srgbClr val="FFFFFF"/>
-        </a:solidFill>
-        <a:effectLst/>
-      </p:bgPr>
-    </p:bg>
-    <p:spTree>
-      <p:nvGrpSpPr>
-        <p:cNvPr id="1" name=""/>
-        <p:cNvGrpSpPr/>
-        <p:nvPr/>
-      </p:nvGrpSpPr>
-      <p:grpSpPr/>
-      <p:sp>
-        <p:nvSpPr>
-          <p:cNvPr id="2" name="TextBox 1"/>
-          <p:cNvSpPr txBox="1"/>
-          <p:nvPr/>
-        </p:nvSpPr>
-        <p:spPr>
-          <a:xfrm>
-            <a:off x="548640" y="320040"/>
-            <a:ext cx="11094415" cy="274320"/>
-          </a:xfrm>
-          <a:prstGeom prst="rect">
-            <a:avLst/>
-          </a:prstGeom>
-          <a:noFill/>
-        </p:spPr>
-        <p:txBody>
-          <a:bodyPr wrap="square" anchor="t" lIns="0" rIns="0" tIns="0" bIns="0"/>
-          <a:lstStyle/>
-          <a:p>
-            <a:pPr algn="l"/>
-            <a:r>
-              <a:rPr sz="1100" b="1" i="0">
-                <a:solidFill>
-                  <a:srgbClr val="54595D"/>
-                </a:solidFill>
-                <a:latin typeface="Calibri"/>
-              </a:rPr>
-              <a:t>OCCUPATIONAL SPECIALISM  ·  Specialism Content Area 6</a:t>
-            </a:r>
-          </a:p>
-        </p:txBody>
-      </p:sp>
-      <p:sp>
-        <p:nvSpPr>
-          <p:cNvPr id="3" name="TextBox 2"/>
-          <p:cNvSpPr txBox="1"/>
-          <p:nvPr/>
-        </p:nvSpPr>
-        <p:spPr>
-          <a:xfrm>
-            <a:off x="548640" y="566928"/>
-            <a:ext cx="11094415" cy="822960"/>
-          </a:xfrm>
-          <a:prstGeom prst="rect">
-            <a:avLst/>
-          </a:prstGeom>
-          <a:noFill/>
-        </p:spPr>
-        <p:txBody>
-          <a:bodyPr wrap="square" anchor="ctr" lIns="0" rIns="0" tIns="0" bIns="0"/>
-          <a:lstStyle/>
-          <a:p>
-            <a:pPr algn="l"/>
-            <a:r>
-              <a:rPr sz="3200" b="1" i="0">
-                <a:solidFill>
-                  <a:srgbClr val="03306E"/>
-                </a:solidFill>
-                <a:latin typeface="Cambria"/>
-              </a:rPr>
-              <a:t>Activity: Call a real API</a:t>
-            </a:r>
-          </a:p>
-        </p:txBody>
-      </p:sp>
-      <p:sp>
-        <p:nvSpPr>
-          <p:cNvPr id="4" name="TextBox 3"/>
-          <p:cNvSpPr txBox="1"/>
-          <p:nvPr/>
-        </p:nvSpPr>
-        <p:spPr>
-          <a:xfrm>
-            <a:off x="548640" y="6446520"/>
-            <a:ext cx="8229600" cy="274320"/>
-          </a:xfrm>
-          <a:prstGeom prst="rect">
-            <a:avLst/>
-          </a:prstGeom>
-          <a:noFill/>
-        </p:spPr>
-        <p:txBody>
-          <a:bodyPr wrap="square" anchor="t" lIns="0" rIns="0" tIns="0" bIns="0"/>
-          <a:lstStyle/>
-          <a:p>
-            <a:pPr algn="l"/>
-            <a:r>
-              <a:rPr sz="1000" b="0" i="0">
-                <a:solidFill>
-                  <a:srgbClr val="54595D"/>
-                </a:solidFill>
-                <a:latin typeface="Calibri"/>
-              </a:rPr>
-              <a:t>Digital Software Development T Level  ·  Connecting to Data and Deploying Software</a:t>
-            </a:r>
-          </a:p>
-        </p:txBody>
-      </p:sp>
-      <p:sp>
-        <p:nvSpPr>
-          <p:cNvPr id="5" name="TextBox 4"/>
-          <p:cNvSpPr txBox="1"/>
-          <p:nvPr/>
-        </p:nvSpPr>
-        <p:spPr>
-          <a:xfrm>
-            <a:off x="10728655" y="6446520"/>
-            <a:ext cx="914400" cy="274320"/>
-          </a:xfrm>
-          <a:prstGeom prst="rect">
-            <a:avLst/>
-          </a:prstGeom>
-          <a:noFill/>
-        </p:spPr>
-        <p:txBody>
-          <a:bodyPr wrap="square" anchor="t" lIns="0" rIns="0" tIns="0" bIns="0"/>
-          <a:lstStyle/>
-          <a:p>
-            <a:pPr algn="r"/>
-            <a:r>
-              <a:rPr sz="1000" b="0" i="0">
-                <a:solidFill>
-                  <a:srgbClr val="54595D"/>
-                </a:solidFill>
-                <a:latin typeface="Calibri"/>
-              </a:rPr>
-              <a:t>8</a:t>
-            </a:r>
-          </a:p>
-        </p:txBody>
-      </p:sp>
-      <p:sp>
-        <p:nvSpPr>
-          <p:cNvPr id="6" name="Rounded Rectangle 5"/>
-          <p:cNvSpPr/>
-          <p:nvPr/>
-        </p:nvSpPr>
-        <p:spPr>
-          <a:xfrm>
-            <a:off x="548640" y="1508760"/>
-            <a:ext cx="2011680" cy="457200"/>
-          </a:xfrm>
-          <a:prstGeom prst="roundRect">
-            <a:avLst>
-              <a:gd name="adj" fmla="val 50000"/>
-            </a:avLst>
-          </a:prstGeom>
-          <a:solidFill>
-            <a:srgbClr val="33C17A"/>
-          </a:solidFill>
-          <a:ln>
-            <a:noFill/>
-          </a:ln>
-          <a:effectLst/>
-        </p:spPr>
-        <p:style>
-          <a:lnRef idx="1">
-            <a:schemeClr val="accent1"/>
-          </a:lnRef>
-          <a:fillRef idx="3">
-            <a:schemeClr val="accent1"/>
-          </a:fillRef>
-          <a:effectRef idx="2">
-            <a:schemeClr val="accent1"/>
-          </a:effectRef>
-          <a:fontRef idx="minor">
-            <a:schemeClr val="lt1"/>
-          </a:fontRef>
-        </p:style>
-        <p:txBody>
-          <a:bodyPr rtlCol="0" anchor="ctr"/>
-          <a:lstStyle/>
-          <a:p/>
-        </p:txBody>
-      </p:sp>
-      <p:sp>
-        <p:nvSpPr>
-          <p:cNvPr id="7" name="TextBox 6"/>
-          <p:cNvSpPr txBox="1"/>
-          <p:nvPr/>
-        </p:nvSpPr>
-        <p:spPr>
-          <a:xfrm>
-            <a:off x="548640" y="1508760"/>
-            <a:ext cx="2011680" cy="457200"/>
-          </a:xfrm>
-          <a:prstGeom prst="rect">
-            <a:avLst/>
-          </a:prstGeom>
-          <a:noFill/>
-        </p:spPr>
-        <p:txBody>
-          <a:bodyPr wrap="square" anchor="ctr" lIns="0" rIns="0" tIns="0" bIns="0"/>
-          <a:lstStyle/>
-          <a:p>
-            <a:pPr algn="ctr"/>
-            <a:r>
-              <a:rPr sz="1400" b="1" i="0">
-                <a:solidFill>
-                  <a:srgbClr val="202122"/>
-                </a:solidFill>
-                <a:latin typeface="Calibri"/>
-              </a:rPr>
-              <a:t>30 minutes</a:t>
-            </a:r>
-          </a:p>
-        </p:txBody>
-      </p:sp>
-      <p:sp>
-        <p:nvSpPr>
-          <p:cNvPr id="8" name="TextBox 7"/>
-          <p:cNvSpPr txBox="1"/>
-          <p:nvPr/>
-        </p:nvSpPr>
-        <p:spPr>
-          <a:xfrm>
-            <a:off x="2743200" y="1508760"/>
-            <a:ext cx="4754880" cy="457200"/>
-          </a:xfrm>
-          <a:prstGeom prst="rect">
-            <a:avLst/>
-          </a:prstGeom>
-          <a:noFill/>
-        </p:spPr>
-        <p:txBody>
-          <a:bodyPr wrap="square" anchor="ctr" lIns="0" rIns="0" tIns="0" bIns="0"/>
-          <a:lstStyle/>
-          <a:p>
-            <a:pPr algn="l"/>
-            <a:r>
-              <a:rPr sz="1400" b="0" i="1">
-                <a:solidFill>
-                  <a:srgbClr val="54595D"/>
-                </a:solidFill>
-                <a:latin typeface="Calibri"/>
-              </a:rPr>
-              <a:t>Pairs, in Python</a:t>
-            </a:r>
-          </a:p>
-        </p:txBody>
-      </p:sp>
-      <p:sp>
-        <p:nvSpPr>
-          <p:cNvPr id="9" name="Oval 8"/>
-          <p:cNvSpPr/>
-          <p:nvPr/>
-        </p:nvSpPr>
-        <p:spPr>
-          <a:xfrm>
-            <a:off x="548640" y="2482596"/>
-            <a:ext cx="384048" cy="384048"/>
-          </a:xfrm>
-          <a:prstGeom prst="ellipse">
-            <a:avLst/>
-          </a:prstGeom>
-          <a:solidFill>
-            <a:srgbClr val="0645AD"/>
-          </a:solidFill>
-          <a:ln>
-            <a:noFill/>
-          </a:ln>
-          <a:effectLst/>
-        </p:spPr>
-        <p:style>
-          <a:lnRef idx="1">
-            <a:schemeClr val="accent1"/>
-          </a:lnRef>
-          <a:fillRef idx="3">
-            <a:schemeClr val="accent1"/>
-          </a:fillRef>
-          <a:effectRef idx="2">
-            <a:schemeClr val="accent1"/>
-          </a:effectRef>
-          <a:fontRef idx="minor">
-            <a:schemeClr val="lt1"/>
-          </a:fontRef>
-        </p:style>
-        <p:txBody>
-          <a:bodyPr rtlCol="0" anchor="ctr" lIns="0" rIns="0" tIns="0" bIns="0"/>
-          <a:lstStyle/>
-          <a:p>
-            <a:pPr algn="ctr"/>
-            <a:r>
-              <a:rPr sz="1300" b="1">
-                <a:solidFill>
-                  <a:srgbClr val="FFFFFF"/>
-                </a:solidFill>
-                <a:latin typeface="Calibri"/>
-              </a:rPr>
-              <a:t>1</a:t>
-            </a:r>
-          </a:p>
-        </p:txBody>
-      </p:sp>
-      <p:sp>
-        <p:nvSpPr>
-          <p:cNvPr id="10" name="TextBox 9"/>
-          <p:cNvSpPr txBox="1"/>
-          <p:nvPr/>
-        </p:nvSpPr>
-        <p:spPr>
-          <a:xfrm>
-            <a:off x="1143000" y="2240280"/>
-            <a:ext cx="5943600" cy="868680"/>
-          </a:xfrm>
-          <a:prstGeom prst="rect">
-            <a:avLst/>
-          </a:prstGeom>
-          <a:noFill/>
-        </p:spPr>
-        <p:txBody>
-          <a:bodyPr wrap="square" anchor="ctr" lIns="0" rIns="0" tIns="0" bIns="0"/>
-          <a:lstStyle/>
-          <a:p>
-            <a:pPr algn="l"/>
-            <a:r>
-              <a:rPr sz="1700" b="0" i="0">
-                <a:solidFill>
-                  <a:srgbClr val="202122"/>
-                </a:solidFill>
-                <a:latin typeface="Calibri"/>
-              </a:rPr>
-              <a:t>Use the requests library to call a free public API chosen by your teacher.</a:t>
-            </a:r>
-          </a:p>
-        </p:txBody>
-      </p:sp>
-      <p:sp>
-        <p:nvSpPr>
-          <p:cNvPr id="11" name="Oval 10"/>
-          <p:cNvSpPr/>
-          <p:nvPr/>
-        </p:nvSpPr>
-        <p:spPr>
-          <a:xfrm>
-            <a:off x="548640" y="3461004"/>
-            <a:ext cx="384048" cy="384048"/>
-          </a:xfrm>
-          <a:prstGeom prst="ellipse">
-            <a:avLst/>
-          </a:prstGeom>
-          <a:solidFill>
-            <a:srgbClr val="0645AD"/>
-          </a:solidFill>
-          <a:ln>
-            <a:noFill/>
-          </a:ln>
-          <a:effectLst/>
-        </p:spPr>
-        <p:style>
-          <a:lnRef idx="1">
-            <a:schemeClr val="accent1"/>
-          </a:lnRef>
-          <a:fillRef idx="3">
-            <a:schemeClr val="accent1"/>
-          </a:fillRef>
-          <a:effectRef idx="2">
-            <a:schemeClr val="accent1"/>
-          </a:effectRef>
-          <a:fontRef idx="minor">
-            <a:schemeClr val="lt1"/>
-          </a:fontRef>
-        </p:style>
-        <p:txBody>
-          <a:bodyPr rtlCol="0" anchor="ctr" lIns="0" rIns="0" tIns="0" bIns="0"/>
-          <a:lstStyle/>
-          <a:p>
-            <a:pPr algn="ctr"/>
-            <a:r>
-              <a:rPr sz="1300" b="1">
-                <a:solidFill>
-                  <a:srgbClr val="FFFFFF"/>
-                </a:solidFill>
-                <a:latin typeface="Calibri"/>
-              </a:rPr>
-              <a:t>2</a:t>
+              <a:t>Give one advantage of web deployment.</a:t>
             </a:r>
           </a:p>
         </p:txBody>
@@ -7660,8 +10409,8 @@
         </p:nvSpPr>
         <p:spPr>
           <a:xfrm>
-            <a:off x="1143000" y="3218688"/>
-            <a:ext cx="5943600" cy="868680"/>
+            <a:off x="548640" y="5852160"/>
+            <a:ext cx="11094415" cy="365760"/>
           </a:xfrm>
           <a:prstGeom prst="rect">
             <a:avLst/>
@@ -7669,879 +10418,18 @@
           <a:noFill/>
         </p:spPr>
         <p:txBody>
-          <a:bodyPr wrap="square" anchor="ctr" lIns="0" rIns="0" tIns="0" bIns="0"/>
+          <a:bodyPr wrap="square" anchor="t" lIns="0" rIns="0" tIns="0" bIns="0"/>
           <a:lstStyle/>
           <a:p>
             <a:pPr algn="l"/>
             <a:r>
-              <a:rPr sz="1700" b="0" i="0">
-                <a:solidFill>
-                  <a:srgbClr val="202122"/>
-                </a:solidFill>
-                <a:latin typeface="Calibri"/>
-              </a:rPr>
-              <a:t>Parse the JSON response and display three values.</a:t>
-            </a:r>
-          </a:p>
-        </p:txBody>
-      </p:sp>
-      <p:sp>
-        <p:nvSpPr>
-          <p:cNvPr id="13" name="Oval 12"/>
-          <p:cNvSpPr/>
-          <p:nvPr/>
-        </p:nvSpPr>
-        <p:spPr>
-          <a:xfrm>
-            <a:off x="548640" y="4439412"/>
-            <a:ext cx="384048" cy="384048"/>
-          </a:xfrm>
-          <a:prstGeom prst="ellipse">
-            <a:avLst/>
-          </a:prstGeom>
-          <a:solidFill>
-            <a:srgbClr val="0645AD"/>
-          </a:solidFill>
-          <a:ln>
-            <a:noFill/>
-          </a:ln>
-          <a:effectLst/>
-        </p:spPr>
-        <p:style>
-          <a:lnRef idx="1">
-            <a:schemeClr val="accent1"/>
-          </a:lnRef>
-          <a:fillRef idx="3">
-            <a:schemeClr val="accent1"/>
-          </a:fillRef>
-          <a:effectRef idx="2">
-            <a:schemeClr val="accent1"/>
-          </a:effectRef>
-          <a:fontRef idx="minor">
-            <a:schemeClr val="lt1"/>
-          </a:fontRef>
-        </p:style>
-        <p:txBody>
-          <a:bodyPr rtlCol="0" anchor="ctr" lIns="0" rIns="0" tIns="0" bIns="0"/>
-          <a:lstStyle/>
-          <a:p>
-            <a:pPr algn="ctr"/>
-            <a:r>
-              <a:rPr sz="1300" b="1">
-                <a:solidFill>
-                  <a:srgbClr val="FFFFFF"/>
-                </a:solidFill>
-                <a:latin typeface="Calibri"/>
-              </a:rPr>
-              <a:t>3</a:t>
-            </a:r>
-          </a:p>
-        </p:txBody>
-      </p:sp>
-      <p:sp>
-        <p:nvSpPr>
-          <p:cNvPr id="14" name="TextBox 13"/>
-          <p:cNvSpPr txBox="1"/>
-          <p:nvPr/>
-        </p:nvSpPr>
-        <p:spPr>
-          <a:xfrm>
-            <a:off x="1143000" y="4197096"/>
-            <a:ext cx="5943600" cy="868680"/>
-          </a:xfrm>
-          <a:prstGeom prst="rect">
-            <a:avLst/>
-          </a:prstGeom>
-          <a:noFill/>
-        </p:spPr>
-        <p:txBody>
-          <a:bodyPr wrap="square" anchor="ctr" lIns="0" rIns="0" tIns="0" bIns="0"/>
-          <a:lstStyle/>
-          <a:p>
-            <a:pPr algn="l"/>
-            <a:r>
-              <a:rPr sz="1700" b="0" i="0">
-                <a:solidFill>
-                  <a:srgbClr val="202122"/>
-                </a:solidFill>
-                <a:latin typeface="Calibri"/>
-              </a:rPr>
-              <a:t>Handle a failed request with a clear message.</a:t>
-            </a:r>
-          </a:p>
-        </p:txBody>
-      </p:sp>
-      <p:sp>
-        <p:nvSpPr>
-          <p:cNvPr id="15" name="Oval 14"/>
-          <p:cNvSpPr/>
-          <p:nvPr/>
-        </p:nvSpPr>
-        <p:spPr>
-          <a:xfrm>
-            <a:off x="548640" y="5417820"/>
-            <a:ext cx="384048" cy="384048"/>
-          </a:xfrm>
-          <a:prstGeom prst="ellipse">
-            <a:avLst/>
-          </a:prstGeom>
-          <a:solidFill>
-            <a:srgbClr val="0645AD"/>
-          </a:solidFill>
-          <a:ln>
-            <a:noFill/>
-          </a:ln>
-          <a:effectLst/>
-        </p:spPr>
-        <p:style>
-          <a:lnRef idx="1">
-            <a:schemeClr val="accent1"/>
-          </a:lnRef>
-          <a:fillRef idx="3">
-            <a:schemeClr val="accent1"/>
-          </a:fillRef>
-          <a:effectRef idx="2">
-            <a:schemeClr val="accent1"/>
-          </a:effectRef>
-          <a:fontRef idx="minor">
-            <a:schemeClr val="lt1"/>
-          </a:fontRef>
-        </p:style>
-        <p:txBody>
-          <a:bodyPr rtlCol="0" anchor="ctr" lIns="0" rIns="0" tIns="0" bIns="0"/>
-          <a:lstStyle/>
-          <a:p>
-            <a:pPr algn="ctr"/>
-            <a:r>
-              <a:rPr sz="1300" b="1">
-                <a:solidFill>
-                  <a:srgbClr val="FFFFFF"/>
-                </a:solidFill>
-                <a:latin typeface="Calibri"/>
-              </a:rPr>
-              <a:t>4</a:t>
-            </a:r>
-          </a:p>
-        </p:txBody>
-      </p:sp>
-      <p:sp>
-        <p:nvSpPr>
-          <p:cNvPr id="16" name="TextBox 15"/>
-          <p:cNvSpPr txBox="1"/>
-          <p:nvPr/>
-        </p:nvSpPr>
-        <p:spPr>
-          <a:xfrm>
-            <a:off x="1143000" y="5175504"/>
-            <a:ext cx="5943600" cy="868680"/>
-          </a:xfrm>
-          <a:prstGeom prst="rect">
-            <a:avLst/>
-          </a:prstGeom>
-          <a:noFill/>
-        </p:spPr>
-        <p:txBody>
-          <a:bodyPr wrap="square" anchor="ctr" lIns="0" rIns="0" tIns="0" bIns="0"/>
-          <a:lstStyle/>
-          <a:p>
-            <a:pPr algn="l"/>
-            <a:r>
-              <a:rPr sz="1700" b="0" i="0">
-                <a:solidFill>
-                  <a:srgbClr val="202122"/>
-                </a:solidFill>
-                <a:latin typeface="Calibri"/>
-              </a:rPr>
-              <a:t>Recommend a deployment method for your tool.</a:t>
-            </a:r>
-          </a:p>
-        </p:txBody>
-      </p:sp>
-      <p:sp>
-        <p:nvSpPr>
-          <p:cNvPr id="17" name="Rounded Rectangle 16"/>
-          <p:cNvSpPr/>
-          <p:nvPr/>
-        </p:nvSpPr>
-        <p:spPr>
-          <a:xfrm>
-            <a:off x="7772400" y="1508760"/>
-            <a:ext cx="3867912" cy="4572000"/>
-          </a:xfrm>
-          <a:prstGeom prst="roundRect">
-            <a:avLst>
-              <a:gd name="adj" fmla="val 8000"/>
-            </a:avLst>
-          </a:prstGeom>
-          <a:solidFill>
-            <a:srgbClr val="EAF3FF"/>
-          </a:solidFill>
-          <a:ln>
-            <a:noFill/>
-          </a:ln>
-          <a:effectLst/>
-        </p:spPr>
-        <p:style>
-          <a:lnRef idx="1">
-            <a:schemeClr val="accent1"/>
-          </a:lnRef>
-          <a:fillRef idx="3">
-            <a:schemeClr val="accent1"/>
-          </a:fillRef>
-          <a:effectRef idx="2">
-            <a:schemeClr val="accent1"/>
-          </a:effectRef>
-          <a:fontRef idx="minor">
-            <a:schemeClr val="lt1"/>
-          </a:fontRef>
-        </p:style>
-        <p:txBody>
-          <a:bodyPr rtlCol="0" anchor="ctr"/>
-          <a:lstStyle/>
-          <a:p/>
-        </p:txBody>
-      </p:sp>
-      <p:sp>
-        <p:nvSpPr>
-          <p:cNvPr id="18" name="TextBox 17"/>
-          <p:cNvSpPr txBox="1"/>
-          <p:nvPr/>
-        </p:nvSpPr>
-        <p:spPr>
-          <a:xfrm>
-            <a:off x="8046720" y="1737360"/>
-            <a:ext cx="3291840" cy="365760"/>
-          </a:xfrm>
-          <a:prstGeom prst="rect">
-            <a:avLst/>
-          </a:prstGeom>
-          <a:noFill/>
-        </p:spPr>
-        <p:txBody>
-          <a:bodyPr wrap="square" anchor="t" lIns="0" rIns="0" tIns="0" bIns="0"/>
-          <a:lstStyle/>
-          <a:p>
-            <a:pPr algn="l"/>
-            <a:r>
-              <a:rPr sz="1300" b="1" i="0">
-                <a:solidFill>
-                  <a:srgbClr val="0645AD"/>
-                </a:solidFill>
-                <a:latin typeface="Calibri"/>
-              </a:rPr>
-              <a:t>SUCCESS CRITERIA</a:t>
-            </a:r>
-          </a:p>
-        </p:txBody>
-      </p:sp>
-      <p:sp>
-        <p:nvSpPr>
-          <p:cNvPr id="19" name="TextBox 18"/>
-          <p:cNvSpPr txBox="1"/>
-          <p:nvPr/>
-        </p:nvSpPr>
-        <p:spPr>
-          <a:xfrm>
-            <a:off x="8046720" y="2240280"/>
-            <a:ext cx="3337560" cy="3657600"/>
-          </a:xfrm>
-          <a:prstGeom prst="rect">
-            <a:avLst/>
-          </a:prstGeom>
-          <a:noFill/>
-        </p:spPr>
-        <p:txBody>
-          <a:bodyPr wrap="square" lIns="0" rIns="0" tIns="0" bIns="0">
-            <a:spAutoFit/>
-          </a:bodyPr>
-          <a:lstStyle/>
-          <a:p>
-            <a:pPr marL="274320" indent="-274320">
-              <a:spcAft>
-                <a:spcPts val="810"/>
-              </a:spcAft>
-              <a:buClr>
-                <a:srgbClr val="0645AD"/>
-              </a:buClr>
-              <a:buFont typeface="Arial"/>
-              <a:buChar char="•"/>
-            </a:pPr>
-            <a:r>
-              <a:rPr sz="1800" b="0">
-                <a:solidFill>
-                  <a:srgbClr val="202122"/>
-                </a:solidFill>
-                <a:latin typeface="Calibri"/>
-              </a:rPr>
-              <a:t>Data parsed correctly</a:t>
-            </a:r>
-          </a:p>
-          <a:p>
-            <a:pPr marL="274320" indent="-274320">
-              <a:spcAft>
-                <a:spcPts val="810"/>
-              </a:spcAft>
-              <a:buClr>
-                <a:srgbClr val="0645AD"/>
-              </a:buClr>
-              <a:buFont typeface="Arial"/>
-              <a:buChar char="•"/>
-            </a:pPr>
-            <a:r>
-              <a:rPr sz="1800" b="0">
-                <a:solidFill>
-                  <a:srgbClr val="202122"/>
-                </a:solidFill>
-                <a:latin typeface="Calibri"/>
-              </a:rPr>
-              <a:t>Errors handled</a:t>
-            </a:r>
-          </a:p>
-          <a:p>
-            <a:pPr marL="274320" indent="-274320">
-              <a:spcAft>
-                <a:spcPts val="810"/>
-              </a:spcAft>
-              <a:buClr>
-                <a:srgbClr val="0645AD"/>
-              </a:buClr>
-              <a:buFont typeface="Arial"/>
-              <a:buChar char="•"/>
-            </a:pPr>
-            <a:r>
-              <a:rPr sz="1800" b="0">
-                <a:solidFill>
-                  <a:srgbClr val="202122"/>
-                </a:solidFill>
-                <a:latin typeface="Calibri"/>
-              </a:rPr>
-              <a:t>Deployment choice justified</a:t>
-            </a:r>
-          </a:p>
-        </p:txBody>
-      </p:sp>
-    </p:spTree>
-  </p:cSld>
-  <p:clrMapOvr>
-    <a:masterClrMapping/>
-  </p:clrMapOvr>
-</p:sld>
-</file>
-
-<file path=ppt/slides/slide9.xml><?xml version="1.0" encoding="utf-8"?>
-<p:sld xmlns:a="http://schemas.openxmlformats.org/drawingml/2006/main" xmlns:p="http://schemas.openxmlformats.org/presentationml/2006/main" xmlns:r="http://schemas.openxmlformats.org/officeDocument/2006/relationships">
-  <p:cSld>
-    <p:bg>
-      <p:bgPr>
-        <a:solidFill>
-          <a:srgbClr val="03306E"/>
-        </a:solidFill>
-        <a:effectLst/>
-      </p:bgPr>
-    </p:bg>
-    <p:spTree>
-      <p:nvGrpSpPr>
-        <p:cNvPr id="1" name=""/>
-        <p:cNvGrpSpPr/>
-        <p:nvPr/>
-      </p:nvGrpSpPr>
-      <p:grpSpPr/>
-      <p:sp>
-        <p:nvSpPr>
-          <p:cNvPr id="2" name="TextBox 1"/>
-          <p:cNvSpPr txBox="1"/>
-          <p:nvPr/>
-        </p:nvSpPr>
-        <p:spPr>
-          <a:xfrm>
-            <a:off x="548640" y="320040"/>
-            <a:ext cx="11094415" cy="274320"/>
-          </a:xfrm>
-          <a:prstGeom prst="rect">
-            <a:avLst/>
-          </a:prstGeom>
-          <a:noFill/>
-        </p:spPr>
-        <p:txBody>
-          <a:bodyPr wrap="square" anchor="t" lIns="0" rIns="0" tIns="0" bIns="0"/>
-          <a:lstStyle/>
-          <a:p>
-            <a:pPr algn="l"/>
-            <a:r>
-              <a:rPr sz="1100" b="1" i="0">
-                <a:solidFill>
-                  <a:srgbClr val="A9C8F0"/>
-                </a:solidFill>
-                <a:latin typeface="Calibri"/>
-              </a:rPr>
-              <a:t>OCCUPATIONAL SPECIALISM  ·  Specialism Content Area 6</a:t>
-            </a:r>
-          </a:p>
-        </p:txBody>
-      </p:sp>
-      <p:sp>
-        <p:nvSpPr>
-          <p:cNvPr id="3" name="TextBox 2"/>
-          <p:cNvSpPr txBox="1"/>
-          <p:nvPr/>
-        </p:nvSpPr>
-        <p:spPr>
-          <a:xfrm>
-            <a:off x="548640" y="566928"/>
-            <a:ext cx="11094415" cy="822960"/>
-          </a:xfrm>
-          <a:prstGeom prst="rect">
-            <a:avLst/>
-          </a:prstGeom>
-          <a:noFill/>
-        </p:spPr>
-        <p:txBody>
-          <a:bodyPr wrap="square" anchor="ctr" lIns="0" rIns="0" tIns="0" bIns="0"/>
-          <a:lstStyle/>
-          <a:p>
-            <a:pPr algn="l"/>
-            <a:r>
-              <a:rPr sz="3200" b="1" i="0">
-                <a:solidFill>
-                  <a:srgbClr val="FFFFFF"/>
-                </a:solidFill>
-                <a:latin typeface="Cambria"/>
-              </a:rPr>
-              <a:t>Exit ticket</a:t>
-            </a:r>
-          </a:p>
-        </p:txBody>
-      </p:sp>
-      <p:sp>
-        <p:nvSpPr>
-          <p:cNvPr id="4" name="Oval 3"/>
-          <p:cNvSpPr/>
-          <p:nvPr/>
-        </p:nvSpPr>
-        <p:spPr>
-          <a:xfrm>
-            <a:off x="548640" y="1737360"/>
-            <a:ext cx="502920" cy="502920"/>
-          </a:xfrm>
-          <a:prstGeom prst="ellipse">
-            <a:avLst/>
-          </a:prstGeom>
-          <a:solidFill>
-            <a:srgbClr val="33C17A"/>
-          </a:solidFill>
-          <a:ln>
-            <a:noFill/>
-          </a:ln>
-          <a:effectLst/>
-        </p:spPr>
-        <p:style>
-          <a:lnRef idx="1">
-            <a:schemeClr val="accent1"/>
-          </a:lnRef>
-          <a:fillRef idx="3">
-            <a:schemeClr val="accent1"/>
-          </a:fillRef>
-          <a:effectRef idx="2">
-            <a:schemeClr val="accent1"/>
-          </a:effectRef>
-          <a:fontRef idx="minor">
-            <a:schemeClr val="lt1"/>
-          </a:fontRef>
-        </p:style>
-        <p:txBody>
-          <a:bodyPr rtlCol="0" anchor="ctr" lIns="0" rIns="0" tIns="0" bIns="0"/>
-          <a:lstStyle/>
-          <a:p>
-            <a:pPr algn="ctr"/>
-            <a:r>
-              <a:rPr sz="1700" b="1">
-                <a:solidFill>
-                  <a:srgbClr val="202122"/>
-                </a:solidFill>
-                <a:latin typeface="Calibri"/>
-              </a:rPr>
-              <a:t>1</a:t>
-            </a:r>
-          </a:p>
-        </p:txBody>
-      </p:sp>
-      <p:sp>
-        <p:nvSpPr>
-          <p:cNvPr id="5" name="TextBox 4"/>
-          <p:cNvSpPr txBox="1"/>
-          <p:nvPr/>
-        </p:nvSpPr>
-        <p:spPr>
-          <a:xfrm>
-            <a:off x="1325880" y="1645920"/>
-            <a:ext cx="6583680" cy="822960"/>
-          </a:xfrm>
-          <a:prstGeom prst="rect">
-            <a:avLst/>
-          </a:prstGeom>
-          <a:noFill/>
-        </p:spPr>
-        <p:txBody>
-          <a:bodyPr wrap="square" anchor="ctr" lIns="0" rIns="0" tIns="0" bIns="0"/>
-          <a:lstStyle/>
-          <a:p>
-            <a:pPr algn="l"/>
-            <a:r>
-              <a:rPr sz="2000" b="0" i="0">
-                <a:solidFill>
-                  <a:srgbClr val="FFFFFF"/>
-                </a:solidFill>
-                <a:latin typeface="Calibri"/>
-              </a:rPr>
-              <a:t>Why keep API keys secret?</a:t>
-            </a:r>
-          </a:p>
-        </p:txBody>
-      </p:sp>
-      <p:sp>
-        <p:nvSpPr>
-          <p:cNvPr id="6" name="Oval 5"/>
-          <p:cNvSpPr/>
-          <p:nvPr/>
-        </p:nvSpPr>
-        <p:spPr>
-          <a:xfrm>
-            <a:off x="548640" y="2697480"/>
-            <a:ext cx="502920" cy="502920"/>
-          </a:xfrm>
-          <a:prstGeom prst="ellipse">
-            <a:avLst/>
-          </a:prstGeom>
-          <a:solidFill>
-            <a:srgbClr val="33C17A"/>
-          </a:solidFill>
-          <a:ln>
-            <a:noFill/>
-          </a:ln>
-          <a:effectLst/>
-        </p:spPr>
-        <p:style>
-          <a:lnRef idx="1">
-            <a:schemeClr val="accent1"/>
-          </a:lnRef>
-          <a:fillRef idx="3">
-            <a:schemeClr val="accent1"/>
-          </a:fillRef>
-          <a:effectRef idx="2">
-            <a:schemeClr val="accent1"/>
-          </a:effectRef>
-          <a:fontRef idx="minor">
-            <a:schemeClr val="lt1"/>
-          </a:fontRef>
-        </p:style>
-        <p:txBody>
-          <a:bodyPr rtlCol="0" anchor="ctr" lIns="0" rIns="0" tIns="0" bIns="0"/>
-          <a:lstStyle/>
-          <a:p>
-            <a:pPr algn="ctr"/>
-            <a:r>
-              <a:rPr sz="1700" b="1">
-                <a:solidFill>
-                  <a:srgbClr val="202122"/>
-                </a:solidFill>
-                <a:latin typeface="Calibri"/>
-              </a:rPr>
-              <a:t>2</a:t>
-            </a:r>
-          </a:p>
-        </p:txBody>
-      </p:sp>
-      <p:sp>
-        <p:nvSpPr>
-          <p:cNvPr id="7" name="TextBox 6"/>
-          <p:cNvSpPr txBox="1"/>
-          <p:nvPr/>
-        </p:nvSpPr>
-        <p:spPr>
-          <a:xfrm>
-            <a:off x="1325880" y="2606040"/>
-            <a:ext cx="6583680" cy="822960"/>
-          </a:xfrm>
-          <a:prstGeom prst="rect">
-            <a:avLst/>
-          </a:prstGeom>
-          <a:noFill/>
-        </p:spPr>
-        <p:txBody>
-          <a:bodyPr wrap="square" anchor="ctr" lIns="0" rIns="0" tIns="0" bIns="0"/>
-          <a:lstStyle/>
-          <a:p>
-            <a:pPr algn="l"/>
-            <a:r>
-              <a:rPr sz="2000" b="0" i="0">
-                <a:solidFill>
-                  <a:srgbClr val="FFFFFF"/>
-                </a:solidFill>
-                <a:latin typeface="Calibri"/>
-              </a:rPr>
-              <a:t>When would you choose a mobile deployment?</a:t>
-            </a:r>
-          </a:p>
-        </p:txBody>
-      </p:sp>
-      <p:sp>
-        <p:nvSpPr>
-          <p:cNvPr id="8" name="Oval 7"/>
-          <p:cNvSpPr/>
-          <p:nvPr/>
-        </p:nvSpPr>
-        <p:spPr>
-          <a:xfrm>
-            <a:off x="548640" y="3657600"/>
-            <a:ext cx="502920" cy="502920"/>
-          </a:xfrm>
-          <a:prstGeom prst="ellipse">
-            <a:avLst/>
-          </a:prstGeom>
-          <a:solidFill>
-            <a:srgbClr val="33C17A"/>
-          </a:solidFill>
-          <a:ln>
-            <a:noFill/>
-          </a:ln>
-          <a:effectLst/>
-        </p:spPr>
-        <p:style>
-          <a:lnRef idx="1">
-            <a:schemeClr val="accent1"/>
-          </a:lnRef>
-          <a:fillRef idx="3">
-            <a:schemeClr val="accent1"/>
-          </a:fillRef>
-          <a:effectRef idx="2">
-            <a:schemeClr val="accent1"/>
-          </a:effectRef>
-          <a:fontRef idx="minor">
-            <a:schemeClr val="lt1"/>
-          </a:fontRef>
-        </p:style>
-        <p:txBody>
-          <a:bodyPr rtlCol="0" anchor="ctr" lIns="0" rIns="0" tIns="0" bIns="0"/>
-          <a:lstStyle/>
-          <a:p>
-            <a:pPr algn="ctr"/>
-            <a:r>
-              <a:rPr sz="1700" b="1">
-                <a:solidFill>
-                  <a:srgbClr val="202122"/>
-                </a:solidFill>
-                <a:latin typeface="Calibri"/>
-              </a:rPr>
-              <a:t>3</a:t>
-            </a:r>
-          </a:p>
-        </p:txBody>
-      </p:sp>
-      <p:sp>
-        <p:nvSpPr>
-          <p:cNvPr id="9" name="TextBox 8"/>
-          <p:cNvSpPr txBox="1"/>
-          <p:nvPr/>
-        </p:nvSpPr>
-        <p:spPr>
-          <a:xfrm>
-            <a:off x="1325880" y="3566160"/>
-            <a:ext cx="6583680" cy="822960"/>
-          </a:xfrm>
-          <a:prstGeom prst="rect">
-            <a:avLst/>
-          </a:prstGeom>
-          <a:noFill/>
-        </p:spPr>
-        <p:txBody>
-          <a:bodyPr wrap="square" anchor="ctr" lIns="0" rIns="0" tIns="0" bIns="0"/>
-          <a:lstStyle/>
-          <a:p>
-            <a:pPr algn="l"/>
-            <a:r>
-              <a:rPr sz="2000" b="0" i="0">
-                <a:solidFill>
-                  <a:srgbClr val="FFFFFF"/>
-                </a:solidFill>
-                <a:latin typeface="Calibri"/>
-              </a:rPr>
-              <a:t>What does CRUD stand for?</a:t>
-            </a:r>
-          </a:p>
-        </p:txBody>
-      </p:sp>
-      <p:sp>
-        <p:nvSpPr>
-          <p:cNvPr id="10" name="Rounded Rectangle 9"/>
-          <p:cNvSpPr/>
-          <p:nvPr/>
-        </p:nvSpPr>
-        <p:spPr>
-          <a:xfrm>
-            <a:off x="8229600" y="1645920"/>
-            <a:ext cx="3410712" cy="2926080"/>
-          </a:xfrm>
-          <a:prstGeom prst="roundRect">
-            <a:avLst>
-              <a:gd name="adj" fmla="val 8000"/>
-            </a:avLst>
-          </a:prstGeom>
-          <a:solidFill>
-            <a:srgbClr val="0645AD"/>
-          </a:solidFill>
-          <a:ln>
-            <a:noFill/>
-          </a:ln>
-          <a:effectLst/>
-        </p:spPr>
-        <p:style>
-          <a:lnRef idx="1">
-            <a:schemeClr val="accent1"/>
-          </a:lnRef>
-          <a:fillRef idx="3">
-            <a:schemeClr val="accent1"/>
-          </a:fillRef>
-          <a:effectRef idx="2">
-            <a:schemeClr val="accent1"/>
-          </a:effectRef>
-          <a:fontRef idx="minor">
-            <a:schemeClr val="lt1"/>
-          </a:fontRef>
-        </p:style>
-        <p:txBody>
-          <a:bodyPr rtlCol="0" anchor="ctr"/>
-          <a:lstStyle/>
-          <a:p/>
-        </p:txBody>
-      </p:sp>
-      <p:sp>
-        <p:nvSpPr>
-          <p:cNvPr id="11" name="TextBox 10"/>
-          <p:cNvSpPr txBox="1"/>
-          <p:nvPr/>
-        </p:nvSpPr>
-        <p:spPr>
-          <a:xfrm>
-            <a:off x="8503920" y="1874519"/>
-            <a:ext cx="2926080" cy="365760"/>
-          </a:xfrm>
-          <a:prstGeom prst="rect">
-            <a:avLst/>
-          </a:prstGeom>
-          <a:noFill/>
-        </p:spPr>
-        <p:txBody>
-          <a:bodyPr wrap="square" anchor="t" lIns="0" rIns="0" tIns="0" bIns="0"/>
-          <a:lstStyle/>
-          <a:p>
-            <a:pPr algn="l"/>
-            <a:r>
-              <a:rPr sz="1300" b="1" i="0">
-                <a:solidFill>
-                  <a:srgbClr val="A9C8F0"/>
-                </a:solidFill>
-                <a:latin typeface="Calibri"/>
-              </a:rPr>
-              <a:t>REVISE THIS TOPIC</a:t>
-            </a:r>
-          </a:p>
-        </p:txBody>
-      </p:sp>
-      <p:sp>
-        <p:nvSpPr>
-          <p:cNvPr id="12" name="TextBox 11"/>
-          <p:cNvSpPr txBox="1"/>
-          <p:nvPr/>
-        </p:nvSpPr>
-        <p:spPr>
-          <a:xfrm>
-            <a:off x="8503920" y="2286000"/>
-            <a:ext cx="2926080" cy="548640"/>
-          </a:xfrm>
-          <a:prstGeom prst="rect">
-            <a:avLst/>
-          </a:prstGeom>
-          <a:noFill/>
-        </p:spPr>
-        <p:txBody>
-          <a:bodyPr wrap="square" anchor="t" lIns="0" rIns="0" tIns="0" bIns="0"/>
-          <a:lstStyle/>
-          <a:p>
-            <a:pPr algn="l"/>
-            <a:r>
-              <a:rPr sz="1400" b="0" i="0">
-                <a:solidFill>
-                  <a:srgbClr val="FFFFFF"/>
-                </a:solidFill>
-                <a:latin typeface="Calibri"/>
-              </a:rPr>
-              <a:t>Revision notes for this lesson are on the study wiki:</a:t>
-            </a:r>
-          </a:p>
-        </p:txBody>
-      </p:sp>
-      <p:sp>
-        <p:nvSpPr>
-          <p:cNvPr id="13" name="TextBox 12"/>
-          <p:cNvSpPr txBox="1"/>
-          <p:nvPr/>
-        </p:nvSpPr>
-        <p:spPr>
-          <a:xfrm>
-            <a:off x="8503920" y="2926080"/>
-            <a:ext cx="2926080" cy="1463040"/>
-          </a:xfrm>
-          <a:prstGeom prst="rect">
-            <a:avLst/>
-          </a:prstGeom>
-          <a:noFill/>
-        </p:spPr>
-        <p:txBody>
-          <a:bodyPr wrap="square" anchor="t" lIns="0" rIns="0" tIns="0" bIns="0"/>
-          <a:lstStyle/>
-          <a:p>
-            <a:pPr algn="l"/>
-            <a:r>
-              <a:rPr sz="2000" b="1" i="0">
-                <a:solidFill>
-                  <a:srgbClr val="FFFFFF"/>
-                </a:solidFill>
-                <a:latin typeface="Cambria"/>
-              </a:rPr>
-              <a:t>Implement a Solution Using at Least Two Appropriate Languages</a:t>
-            </a:r>
-          </a:p>
-        </p:txBody>
-      </p:sp>
-      <p:sp>
-        <p:nvSpPr>
-          <p:cNvPr id="14" name="TextBox 13"/>
-          <p:cNvSpPr txBox="1"/>
-          <p:nvPr/>
-        </p:nvSpPr>
-        <p:spPr>
-          <a:xfrm>
-            <a:off x="548640" y="5669280"/>
-            <a:ext cx="11094415" cy="548640"/>
-          </a:xfrm>
-          <a:prstGeom prst="rect">
-            <a:avLst/>
-          </a:prstGeom>
-          <a:noFill/>
-        </p:spPr>
-        <p:txBody>
-          <a:bodyPr wrap="square" anchor="t" lIns="0" rIns="0" tIns="0" bIns="0"/>
-          <a:lstStyle/>
-          <a:p>
-            <a:pPr algn="l"/>
-            <a:r>
-              <a:rPr sz="1200" b="0" i="0">
-                <a:solidFill>
-                  <a:srgbClr val="A9C8F0"/>
-                </a:solidFill>
-                <a:latin typeface="Calibri"/>
-              </a:rPr>
-              <a:t>https://lana6478.github.io/T-level-Digital-Software-Development/#/02-occupational-specialism/06-implementation.md</a:t>
+              <a:rPr sz="1300" b="0" i="1">
+                <a:solidFill>
+                  <a:srgbClr val="54595D"/>
+                </a:solidFill>
+                <a:latin typeface="Calibri"/>
+              </a:rPr>
+              <a:t>Answer on mini whiteboards or in your book. Answers are in the speaker notes.</a:t>
             </a:r>
           </a:p>
         </p:txBody>
